--- a/exports/pptx/lessons/middle-module-04-doshas/day-07-imbalance-safety.pptx
+++ b/exports/pptx/lessons/middle-module-04-doshas/day-07-imbalance-safety.pptx
@@ -17,9 +17,17 @@
     <p:sldId id="265" r:id="rId11"/>
     <p:sldId id="266" r:id="rId12"/>
     <p:sldId id="267" r:id="rId13"/>
+    <p:sldId id="268" r:id="rId14"/>
+    <p:sldId id="269" r:id="rId15"/>
+    <p:sldId id="270" r:id="rId16"/>
+    <p:sldId id="271" r:id="rId17"/>
+    <p:sldId id="272" r:id="rId18"/>
+    <p:sldId id="273" r:id="rId19"/>
+    <p:sldId id="274" r:id="rId20"/>
+    <p:sldId id="275" r:id="rId21"/>
   </p:sldIdLst>
   <p:notesMasterIdLst>
-    <p:notesMasterId r:id="rId14"/>
+    <p:notesMasterId r:id="rId22"/>
   </p:notesMasterIdLst>
   <p:sldSz cx="9144000" cy="5143500"/>
   <p:notesSz cx="5143500" cy="9144000"/>
@@ -819,6 +827,622 @@
 </p:notes>
 </file>
 
+<file path=ppt/notesSlides/notesSlide13.xml><?xml version="1.0" encoding="utf-8"?>
+<p:notes xmlns:a="http://schemas.openxmlformats.org/drawingml/2006/main" xmlns:r="http://schemas.openxmlformats.org/officeDocument/2006/relationships" xmlns:p="http://schemas.openxmlformats.org/presentationml/2006/main">
+  <p:cSld>
+    <p:spTree>
+      <p:nvGrpSpPr>
+        <p:cNvPr id="1" name=""/>
+        <p:cNvGrpSpPr/>
+        <p:nvPr/>
+      </p:nvGrpSpPr>
+      <p:grpSpPr>
+        <a:xfrm>
+          <a:off x="0" y="0"/>
+          <a:ext cx="0" cy="0"/>
+          <a:chOff x="0" y="0"/>
+          <a:chExt cx="0" cy="0"/>
+        </a:xfrm>
+      </p:grpSpPr>
+      <p:sp>
+        <p:nvSpPr>
+          <p:cNvPr id="2" name="Slide Image Placeholder 1"/>
+          <p:cNvSpPr>
+            <a:spLocks noGrp="1" noRot="1" noChangeAspect="1"/>
+          </p:cNvSpPr>
+          <p:nvPr>
+            <p:ph type="sldImg"/>
+          </p:nvPr>
+        </p:nvSpPr>
+        <p:spPr/>
+      </p:sp>
+      <p:sp>
+        <p:nvSpPr>
+          <p:cNvPr id="3" name="Notes Placeholder 2"/>
+          <p:cNvSpPr>
+            <a:spLocks noGrp="1"/>
+          </p:cNvSpPr>
+          <p:nvPr>
+            <p:ph type="body" idx="1"/>
+          </p:nvPr>
+        </p:nvSpPr>
+        <p:spPr/>
+        <p:txBody>
+          <a:bodyPr/>
+          <a:lstStyle/>
+          <a:p>
+            <a:r>
+              <a:rPr lang="en-US" dirty="0"/>
+              <a:t/>
+            </a:r>
+            <a:endParaRPr lang="en-US" dirty="0"/>
+          </a:p>
+        </p:txBody>
+      </p:sp>
+      <p:sp>
+        <p:nvSpPr>
+          <p:cNvPr id="4" name="Slide Number Placeholder 3"/>
+          <p:cNvSpPr>
+            <a:spLocks noGrp="1"/>
+          </p:cNvSpPr>
+          <p:nvPr>
+            <p:ph type="sldNum" sz="quarter" idx="10"/>
+          </p:nvPr>
+        </p:nvSpPr>
+        <p:spPr/>
+        <p:txBody>
+          <a:bodyPr/>
+          <a:lstStyle/>
+          <a:p>
+            <a:fld id="{F7021451-1387-4CA6-816F-3879F97B5CBC}" type="slidenum">
+              <a:rPr lang="en-US"/>
+              <a:t>13</a:t>
+            </a:fld>
+            <a:endParaRPr lang="en-US"/>
+          </a:p>
+        </p:txBody>
+      </p:sp>
+    </p:spTree>
+    <p:extLst>
+      <p:ext uri="{BB962C8B-B14F-4D97-AF65-F5344CB8AC3E}">
+        <p14:creationId xmlns:p14="http://schemas.microsoft.com/office/powerpoint/2010/main" val="1024086991"/>
+      </p:ext>
+    </p:extLst>
+  </p:cSld>
+  <p:clrMapOvr>
+    <a:masterClrMapping/>
+  </p:clrMapOvr>
+</p:notes>
+</file>
+
+<file path=ppt/notesSlides/notesSlide14.xml><?xml version="1.0" encoding="utf-8"?>
+<p:notes xmlns:a="http://schemas.openxmlformats.org/drawingml/2006/main" xmlns:r="http://schemas.openxmlformats.org/officeDocument/2006/relationships" xmlns:p="http://schemas.openxmlformats.org/presentationml/2006/main">
+  <p:cSld>
+    <p:spTree>
+      <p:nvGrpSpPr>
+        <p:cNvPr id="1" name=""/>
+        <p:cNvGrpSpPr/>
+        <p:nvPr/>
+      </p:nvGrpSpPr>
+      <p:grpSpPr>
+        <a:xfrm>
+          <a:off x="0" y="0"/>
+          <a:ext cx="0" cy="0"/>
+          <a:chOff x="0" y="0"/>
+          <a:chExt cx="0" cy="0"/>
+        </a:xfrm>
+      </p:grpSpPr>
+      <p:sp>
+        <p:nvSpPr>
+          <p:cNvPr id="2" name="Slide Image Placeholder 1"/>
+          <p:cNvSpPr>
+            <a:spLocks noGrp="1" noRot="1" noChangeAspect="1"/>
+          </p:cNvSpPr>
+          <p:nvPr>
+            <p:ph type="sldImg"/>
+          </p:nvPr>
+        </p:nvSpPr>
+        <p:spPr/>
+      </p:sp>
+      <p:sp>
+        <p:nvSpPr>
+          <p:cNvPr id="3" name="Notes Placeholder 2"/>
+          <p:cNvSpPr>
+            <a:spLocks noGrp="1"/>
+          </p:cNvSpPr>
+          <p:nvPr>
+            <p:ph type="body" idx="1"/>
+          </p:nvPr>
+        </p:nvSpPr>
+        <p:spPr/>
+        <p:txBody>
+          <a:bodyPr/>
+          <a:lstStyle/>
+          <a:p>
+            <a:r>
+              <a:rPr lang="en-US" dirty="0"/>
+              <a:t/>
+            </a:r>
+            <a:endParaRPr lang="en-US" dirty="0"/>
+          </a:p>
+        </p:txBody>
+      </p:sp>
+      <p:sp>
+        <p:nvSpPr>
+          <p:cNvPr id="4" name="Slide Number Placeholder 3"/>
+          <p:cNvSpPr>
+            <a:spLocks noGrp="1"/>
+          </p:cNvSpPr>
+          <p:nvPr>
+            <p:ph type="sldNum" sz="quarter" idx="10"/>
+          </p:nvPr>
+        </p:nvSpPr>
+        <p:spPr/>
+        <p:txBody>
+          <a:bodyPr/>
+          <a:lstStyle/>
+          <a:p>
+            <a:fld id="{F7021451-1387-4CA6-816F-3879F97B5CBC}" type="slidenum">
+              <a:rPr lang="en-US"/>
+              <a:t>14</a:t>
+            </a:fld>
+            <a:endParaRPr lang="en-US"/>
+          </a:p>
+        </p:txBody>
+      </p:sp>
+    </p:spTree>
+    <p:extLst>
+      <p:ext uri="{BB962C8B-B14F-4D97-AF65-F5344CB8AC3E}">
+        <p14:creationId xmlns:p14="http://schemas.microsoft.com/office/powerpoint/2010/main" val="1024086991"/>
+      </p:ext>
+    </p:extLst>
+  </p:cSld>
+  <p:clrMapOvr>
+    <a:masterClrMapping/>
+  </p:clrMapOvr>
+</p:notes>
+</file>
+
+<file path=ppt/notesSlides/notesSlide15.xml><?xml version="1.0" encoding="utf-8"?>
+<p:notes xmlns:a="http://schemas.openxmlformats.org/drawingml/2006/main" xmlns:r="http://schemas.openxmlformats.org/officeDocument/2006/relationships" xmlns:p="http://schemas.openxmlformats.org/presentationml/2006/main">
+  <p:cSld>
+    <p:spTree>
+      <p:nvGrpSpPr>
+        <p:cNvPr id="1" name=""/>
+        <p:cNvGrpSpPr/>
+        <p:nvPr/>
+      </p:nvGrpSpPr>
+      <p:grpSpPr>
+        <a:xfrm>
+          <a:off x="0" y="0"/>
+          <a:ext cx="0" cy="0"/>
+          <a:chOff x="0" y="0"/>
+          <a:chExt cx="0" cy="0"/>
+        </a:xfrm>
+      </p:grpSpPr>
+      <p:sp>
+        <p:nvSpPr>
+          <p:cNvPr id="2" name="Slide Image Placeholder 1"/>
+          <p:cNvSpPr>
+            <a:spLocks noGrp="1" noRot="1" noChangeAspect="1"/>
+          </p:cNvSpPr>
+          <p:nvPr>
+            <p:ph type="sldImg"/>
+          </p:nvPr>
+        </p:nvSpPr>
+        <p:spPr/>
+      </p:sp>
+      <p:sp>
+        <p:nvSpPr>
+          <p:cNvPr id="3" name="Notes Placeholder 2"/>
+          <p:cNvSpPr>
+            <a:spLocks noGrp="1"/>
+          </p:cNvSpPr>
+          <p:nvPr>
+            <p:ph type="body" idx="1"/>
+          </p:nvPr>
+        </p:nvSpPr>
+        <p:spPr/>
+        <p:txBody>
+          <a:bodyPr/>
+          <a:lstStyle/>
+          <a:p>
+            <a:r>
+              <a:rPr lang="en-US" dirty="0"/>
+              <a:t/>
+            </a:r>
+            <a:endParaRPr lang="en-US" dirty="0"/>
+          </a:p>
+        </p:txBody>
+      </p:sp>
+      <p:sp>
+        <p:nvSpPr>
+          <p:cNvPr id="4" name="Slide Number Placeholder 3"/>
+          <p:cNvSpPr>
+            <a:spLocks noGrp="1"/>
+          </p:cNvSpPr>
+          <p:nvPr>
+            <p:ph type="sldNum" sz="quarter" idx="10"/>
+          </p:nvPr>
+        </p:nvSpPr>
+        <p:spPr/>
+        <p:txBody>
+          <a:bodyPr/>
+          <a:lstStyle/>
+          <a:p>
+            <a:fld id="{F7021451-1387-4CA6-816F-3879F97B5CBC}" type="slidenum">
+              <a:rPr lang="en-US"/>
+              <a:t>15</a:t>
+            </a:fld>
+            <a:endParaRPr lang="en-US"/>
+          </a:p>
+        </p:txBody>
+      </p:sp>
+    </p:spTree>
+    <p:extLst>
+      <p:ext uri="{BB962C8B-B14F-4D97-AF65-F5344CB8AC3E}">
+        <p14:creationId xmlns:p14="http://schemas.microsoft.com/office/powerpoint/2010/main" val="1024086991"/>
+      </p:ext>
+    </p:extLst>
+  </p:cSld>
+  <p:clrMapOvr>
+    <a:masterClrMapping/>
+  </p:clrMapOvr>
+</p:notes>
+</file>
+
+<file path=ppt/notesSlides/notesSlide16.xml><?xml version="1.0" encoding="utf-8"?>
+<p:notes xmlns:a="http://schemas.openxmlformats.org/drawingml/2006/main" xmlns:r="http://schemas.openxmlformats.org/officeDocument/2006/relationships" xmlns:p="http://schemas.openxmlformats.org/presentationml/2006/main">
+  <p:cSld>
+    <p:spTree>
+      <p:nvGrpSpPr>
+        <p:cNvPr id="1" name=""/>
+        <p:cNvGrpSpPr/>
+        <p:nvPr/>
+      </p:nvGrpSpPr>
+      <p:grpSpPr>
+        <a:xfrm>
+          <a:off x="0" y="0"/>
+          <a:ext cx="0" cy="0"/>
+          <a:chOff x="0" y="0"/>
+          <a:chExt cx="0" cy="0"/>
+        </a:xfrm>
+      </p:grpSpPr>
+      <p:sp>
+        <p:nvSpPr>
+          <p:cNvPr id="2" name="Slide Image Placeholder 1"/>
+          <p:cNvSpPr>
+            <a:spLocks noGrp="1" noRot="1" noChangeAspect="1"/>
+          </p:cNvSpPr>
+          <p:nvPr>
+            <p:ph type="sldImg"/>
+          </p:nvPr>
+        </p:nvSpPr>
+        <p:spPr/>
+      </p:sp>
+      <p:sp>
+        <p:nvSpPr>
+          <p:cNvPr id="3" name="Notes Placeholder 2"/>
+          <p:cNvSpPr>
+            <a:spLocks noGrp="1"/>
+          </p:cNvSpPr>
+          <p:nvPr>
+            <p:ph type="body" idx="1"/>
+          </p:nvPr>
+        </p:nvSpPr>
+        <p:spPr/>
+        <p:txBody>
+          <a:bodyPr/>
+          <a:lstStyle/>
+          <a:p>
+            <a:r>
+              <a:rPr lang="en-US" dirty="0"/>
+              <a:t/>
+            </a:r>
+            <a:endParaRPr lang="en-US" dirty="0"/>
+          </a:p>
+        </p:txBody>
+      </p:sp>
+      <p:sp>
+        <p:nvSpPr>
+          <p:cNvPr id="4" name="Slide Number Placeholder 3"/>
+          <p:cNvSpPr>
+            <a:spLocks noGrp="1"/>
+          </p:cNvSpPr>
+          <p:nvPr>
+            <p:ph type="sldNum" sz="quarter" idx="10"/>
+          </p:nvPr>
+        </p:nvSpPr>
+        <p:spPr/>
+        <p:txBody>
+          <a:bodyPr/>
+          <a:lstStyle/>
+          <a:p>
+            <a:fld id="{F7021451-1387-4CA6-816F-3879F97B5CBC}" type="slidenum">
+              <a:rPr lang="en-US"/>
+              <a:t>16</a:t>
+            </a:fld>
+            <a:endParaRPr lang="en-US"/>
+          </a:p>
+        </p:txBody>
+      </p:sp>
+    </p:spTree>
+    <p:extLst>
+      <p:ext uri="{BB962C8B-B14F-4D97-AF65-F5344CB8AC3E}">
+        <p14:creationId xmlns:p14="http://schemas.microsoft.com/office/powerpoint/2010/main" val="1024086991"/>
+      </p:ext>
+    </p:extLst>
+  </p:cSld>
+  <p:clrMapOvr>
+    <a:masterClrMapping/>
+  </p:clrMapOvr>
+</p:notes>
+</file>
+
+<file path=ppt/notesSlides/notesSlide17.xml><?xml version="1.0" encoding="utf-8"?>
+<p:notes xmlns:a="http://schemas.openxmlformats.org/drawingml/2006/main" xmlns:r="http://schemas.openxmlformats.org/officeDocument/2006/relationships" xmlns:p="http://schemas.openxmlformats.org/presentationml/2006/main">
+  <p:cSld>
+    <p:spTree>
+      <p:nvGrpSpPr>
+        <p:cNvPr id="1" name=""/>
+        <p:cNvGrpSpPr/>
+        <p:nvPr/>
+      </p:nvGrpSpPr>
+      <p:grpSpPr>
+        <a:xfrm>
+          <a:off x="0" y="0"/>
+          <a:ext cx="0" cy="0"/>
+          <a:chOff x="0" y="0"/>
+          <a:chExt cx="0" cy="0"/>
+        </a:xfrm>
+      </p:grpSpPr>
+      <p:sp>
+        <p:nvSpPr>
+          <p:cNvPr id="2" name="Slide Image Placeholder 1"/>
+          <p:cNvSpPr>
+            <a:spLocks noGrp="1" noRot="1" noChangeAspect="1"/>
+          </p:cNvSpPr>
+          <p:nvPr>
+            <p:ph type="sldImg"/>
+          </p:nvPr>
+        </p:nvSpPr>
+        <p:spPr/>
+      </p:sp>
+      <p:sp>
+        <p:nvSpPr>
+          <p:cNvPr id="3" name="Notes Placeholder 2"/>
+          <p:cNvSpPr>
+            <a:spLocks noGrp="1"/>
+          </p:cNvSpPr>
+          <p:nvPr>
+            <p:ph type="body" idx="1"/>
+          </p:nvPr>
+        </p:nvSpPr>
+        <p:spPr/>
+        <p:txBody>
+          <a:bodyPr/>
+          <a:lstStyle/>
+          <a:p>
+            <a:r>
+              <a:rPr lang="en-US" dirty="0"/>
+              <a:t/>
+            </a:r>
+            <a:endParaRPr lang="en-US" dirty="0"/>
+          </a:p>
+        </p:txBody>
+      </p:sp>
+      <p:sp>
+        <p:nvSpPr>
+          <p:cNvPr id="4" name="Slide Number Placeholder 3"/>
+          <p:cNvSpPr>
+            <a:spLocks noGrp="1"/>
+          </p:cNvSpPr>
+          <p:nvPr>
+            <p:ph type="sldNum" sz="quarter" idx="10"/>
+          </p:nvPr>
+        </p:nvSpPr>
+        <p:spPr/>
+        <p:txBody>
+          <a:bodyPr/>
+          <a:lstStyle/>
+          <a:p>
+            <a:fld id="{F7021451-1387-4CA6-816F-3879F97B5CBC}" type="slidenum">
+              <a:rPr lang="en-US"/>
+              <a:t>17</a:t>
+            </a:fld>
+            <a:endParaRPr lang="en-US"/>
+          </a:p>
+        </p:txBody>
+      </p:sp>
+    </p:spTree>
+    <p:extLst>
+      <p:ext uri="{BB962C8B-B14F-4D97-AF65-F5344CB8AC3E}">
+        <p14:creationId xmlns:p14="http://schemas.microsoft.com/office/powerpoint/2010/main" val="1024086991"/>
+      </p:ext>
+    </p:extLst>
+  </p:cSld>
+  <p:clrMapOvr>
+    <a:masterClrMapping/>
+  </p:clrMapOvr>
+</p:notes>
+</file>
+
+<file path=ppt/notesSlides/notesSlide18.xml><?xml version="1.0" encoding="utf-8"?>
+<p:notes xmlns:a="http://schemas.openxmlformats.org/drawingml/2006/main" xmlns:r="http://schemas.openxmlformats.org/officeDocument/2006/relationships" xmlns:p="http://schemas.openxmlformats.org/presentationml/2006/main">
+  <p:cSld>
+    <p:spTree>
+      <p:nvGrpSpPr>
+        <p:cNvPr id="1" name=""/>
+        <p:cNvGrpSpPr/>
+        <p:nvPr/>
+      </p:nvGrpSpPr>
+      <p:grpSpPr>
+        <a:xfrm>
+          <a:off x="0" y="0"/>
+          <a:ext cx="0" cy="0"/>
+          <a:chOff x="0" y="0"/>
+          <a:chExt cx="0" cy="0"/>
+        </a:xfrm>
+      </p:grpSpPr>
+      <p:sp>
+        <p:nvSpPr>
+          <p:cNvPr id="2" name="Slide Image Placeholder 1"/>
+          <p:cNvSpPr>
+            <a:spLocks noGrp="1" noRot="1" noChangeAspect="1"/>
+          </p:cNvSpPr>
+          <p:nvPr>
+            <p:ph type="sldImg"/>
+          </p:nvPr>
+        </p:nvSpPr>
+        <p:spPr/>
+      </p:sp>
+      <p:sp>
+        <p:nvSpPr>
+          <p:cNvPr id="3" name="Notes Placeholder 2"/>
+          <p:cNvSpPr>
+            <a:spLocks noGrp="1"/>
+          </p:cNvSpPr>
+          <p:nvPr>
+            <p:ph type="body" idx="1"/>
+          </p:nvPr>
+        </p:nvSpPr>
+        <p:spPr/>
+        <p:txBody>
+          <a:bodyPr/>
+          <a:lstStyle/>
+          <a:p>
+            <a:r>
+              <a:rPr lang="en-US" dirty="0"/>
+              <a:t/>
+            </a:r>
+            <a:endParaRPr lang="en-US" dirty="0"/>
+          </a:p>
+        </p:txBody>
+      </p:sp>
+      <p:sp>
+        <p:nvSpPr>
+          <p:cNvPr id="4" name="Slide Number Placeholder 3"/>
+          <p:cNvSpPr>
+            <a:spLocks noGrp="1"/>
+          </p:cNvSpPr>
+          <p:nvPr>
+            <p:ph type="sldNum" sz="quarter" idx="10"/>
+          </p:nvPr>
+        </p:nvSpPr>
+        <p:spPr/>
+        <p:txBody>
+          <a:bodyPr/>
+          <a:lstStyle/>
+          <a:p>
+            <a:fld id="{F7021451-1387-4CA6-816F-3879F97B5CBC}" type="slidenum">
+              <a:rPr lang="en-US"/>
+              <a:t>18</a:t>
+            </a:fld>
+            <a:endParaRPr lang="en-US"/>
+          </a:p>
+        </p:txBody>
+      </p:sp>
+    </p:spTree>
+    <p:extLst>
+      <p:ext uri="{BB962C8B-B14F-4D97-AF65-F5344CB8AC3E}">
+        <p14:creationId xmlns:p14="http://schemas.microsoft.com/office/powerpoint/2010/main" val="1024086991"/>
+      </p:ext>
+    </p:extLst>
+  </p:cSld>
+  <p:clrMapOvr>
+    <a:masterClrMapping/>
+  </p:clrMapOvr>
+</p:notes>
+</file>
+
+<file path=ppt/notesSlides/notesSlide19.xml><?xml version="1.0" encoding="utf-8"?>
+<p:notes xmlns:a="http://schemas.openxmlformats.org/drawingml/2006/main" xmlns:r="http://schemas.openxmlformats.org/officeDocument/2006/relationships" xmlns:p="http://schemas.openxmlformats.org/presentationml/2006/main">
+  <p:cSld>
+    <p:spTree>
+      <p:nvGrpSpPr>
+        <p:cNvPr id="1" name=""/>
+        <p:cNvGrpSpPr/>
+        <p:nvPr/>
+      </p:nvGrpSpPr>
+      <p:grpSpPr>
+        <a:xfrm>
+          <a:off x="0" y="0"/>
+          <a:ext cx="0" cy="0"/>
+          <a:chOff x="0" y="0"/>
+          <a:chExt cx="0" cy="0"/>
+        </a:xfrm>
+      </p:grpSpPr>
+      <p:sp>
+        <p:nvSpPr>
+          <p:cNvPr id="2" name="Slide Image Placeholder 1"/>
+          <p:cNvSpPr>
+            <a:spLocks noGrp="1" noRot="1" noChangeAspect="1"/>
+          </p:cNvSpPr>
+          <p:nvPr>
+            <p:ph type="sldImg"/>
+          </p:nvPr>
+        </p:nvSpPr>
+        <p:spPr/>
+      </p:sp>
+      <p:sp>
+        <p:nvSpPr>
+          <p:cNvPr id="3" name="Notes Placeholder 2"/>
+          <p:cNvSpPr>
+            <a:spLocks noGrp="1"/>
+          </p:cNvSpPr>
+          <p:nvPr>
+            <p:ph type="body" idx="1"/>
+          </p:nvPr>
+        </p:nvSpPr>
+        <p:spPr/>
+        <p:txBody>
+          <a:bodyPr/>
+          <a:lstStyle/>
+          <a:p>
+            <a:r>
+              <a:rPr lang="en-US" dirty="0"/>
+              <a:t/>
+            </a:r>
+            <a:endParaRPr lang="en-US" dirty="0"/>
+          </a:p>
+        </p:txBody>
+      </p:sp>
+      <p:sp>
+        <p:nvSpPr>
+          <p:cNvPr id="4" name="Slide Number Placeholder 3"/>
+          <p:cNvSpPr>
+            <a:spLocks noGrp="1"/>
+          </p:cNvSpPr>
+          <p:nvPr>
+            <p:ph type="sldNum" sz="quarter" idx="10"/>
+          </p:nvPr>
+        </p:nvSpPr>
+        <p:spPr/>
+        <p:txBody>
+          <a:bodyPr/>
+          <a:lstStyle/>
+          <a:p>
+            <a:fld id="{F7021451-1387-4CA6-816F-3879F97B5CBC}" type="slidenum">
+              <a:rPr lang="en-US"/>
+              <a:t>19</a:t>
+            </a:fld>
+            <a:endParaRPr lang="en-US"/>
+          </a:p>
+        </p:txBody>
+      </p:sp>
+    </p:spTree>
+    <p:extLst>
+      <p:ext uri="{BB962C8B-B14F-4D97-AF65-F5344CB8AC3E}">
+        <p14:creationId xmlns:p14="http://schemas.microsoft.com/office/powerpoint/2010/main" val="1024086991"/>
+      </p:ext>
+    </p:extLst>
+  </p:cSld>
+  <p:clrMapOvr>
+    <a:masterClrMapping/>
+  </p:clrMapOvr>
+</p:notes>
+</file>
+
 <file path=ppt/notesSlides/notesSlide2.xml><?xml version="1.0" encoding="utf-8"?>
 <p:notes xmlns:a="http://schemas.openxmlformats.org/drawingml/2006/main" xmlns:r="http://schemas.openxmlformats.org/officeDocument/2006/relationships" xmlns:p="http://schemas.openxmlformats.org/presentationml/2006/main">
   <p:cSld>
@@ -889,6 +1513,94 @@
             <a:fld id="{F7021451-1387-4CA6-816F-3879F97B5CBC}" type="slidenum">
               <a:rPr lang="en-US"/>
               <a:t>2</a:t>
+            </a:fld>
+            <a:endParaRPr lang="en-US"/>
+          </a:p>
+        </p:txBody>
+      </p:sp>
+    </p:spTree>
+    <p:extLst>
+      <p:ext uri="{BB962C8B-B14F-4D97-AF65-F5344CB8AC3E}">
+        <p14:creationId xmlns:p14="http://schemas.microsoft.com/office/powerpoint/2010/main" val="1024086991"/>
+      </p:ext>
+    </p:extLst>
+  </p:cSld>
+  <p:clrMapOvr>
+    <a:masterClrMapping/>
+  </p:clrMapOvr>
+</p:notes>
+</file>
+
+<file path=ppt/notesSlides/notesSlide20.xml><?xml version="1.0" encoding="utf-8"?>
+<p:notes xmlns:a="http://schemas.openxmlformats.org/drawingml/2006/main" xmlns:r="http://schemas.openxmlformats.org/officeDocument/2006/relationships" xmlns:p="http://schemas.openxmlformats.org/presentationml/2006/main">
+  <p:cSld>
+    <p:spTree>
+      <p:nvGrpSpPr>
+        <p:cNvPr id="1" name=""/>
+        <p:cNvGrpSpPr/>
+        <p:nvPr/>
+      </p:nvGrpSpPr>
+      <p:grpSpPr>
+        <a:xfrm>
+          <a:off x="0" y="0"/>
+          <a:ext cx="0" cy="0"/>
+          <a:chOff x="0" y="0"/>
+          <a:chExt cx="0" cy="0"/>
+        </a:xfrm>
+      </p:grpSpPr>
+      <p:sp>
+        <p:nvSpPr>
+          <p:cNvPr id="2" name="Slide Image Placeholder 1"/>
+          <p:cNvSpPr>
+            <a:spLocks noGrp="1" noRot="1" noChangeAspect="1"/>
+          </p:cNvSpPr>
+          <p:nvPr>
+            <p:ph type="sldImg"/>
+          </p:nvPr>
+        </p:nvSpPr>
+        <p:spPr/>
+      </p:sp>
+      <p:sp>
+        <p:nvSpPr>
+          <p:cNvPr id="3" name="Notes Placeholder 2"/>
+          <p:cNvSpPr>
+            <a:spLocks noGrp="1"/>
+          </p:cNvSpPr>
+          <p:nvPr>
+            <p:ph type="body" idx="1"/>
+          </p:nvPr>
+        </p:nvSpPr>
+        <p:spPr/>
+        <p:txBody>
+          <a:bodyPr/>
+          <a:lstStyle/>
+          <a:p>
+            <a:r>
+              <a:rPr lang="en-US" dirty="0"/>
+              <a:t/>
+            </a:r>
+            <a:endParaRPr lang="en-US" dirty="0"/>
+          </a:p>
+        </p:txBody>
+      </p:sp>
+      <p:sp>
+        <p:nvSpPr>
+          <p:cNvPr id="4" name="Slide Number Placeholder 3"/>
+          <p:cNvSpPr>
+            <a:spLocks noGrp="1"/>
+          </p:cNvSpPr>
+          <p:nvPr>
+            <p:ph type="sldNum" sz="quarter" idx="10"/>
+          </p:nvPr>
+        </p:nvSpPr>
+        <p:spPr/>
+        <p:txBody>
+          <a:bodyPr/>
+          <a:lstStyle/>
+          <a:p>
+            <a:fld id="{F7021451-1387-4CA6-816F-3879F97B5CBC}" type="slidenum">
+              <a:rPr lang="en-US"/>
+              <a:t>20</a:t>
             </a:fld>
             <a:endParaRPr lang="en-US"/>
           </a:p>
@@ -2100,240 +2812,6 @@
         </p:nvSpPr>
         <p:spPr>
           <a:xfrm>
-            <a:off x="406301" y="1223963"/>
-            <a:ext cx="8498026" cy="274290"/>
-          </a:xfrm>
-          <a:prstGeom prst="rect">
-            <a:avLst/>
-          </a:prstGeom>
-          <a:noFill/>
-          <a:ln/>
-        </p:spPr>
-        <p:txBody>
-          <a:bodyPr wrap="square" lIns="0" tIns="0" rIns="0" bIns="0" rtlCol="0" anchor="t"/>
-          <a:lstStyle/>
-          <a:p>
-            <a:pPr algn="l" indent="0" marL="0">
-              <a:lnSpc>
-                <a:spcPts val="2160"/>
-              </a:lnSpc>
-              <a:spcBef>
-                <a:spcPts val="600"/>
-              </a:spcBef>
-              <a:spcAft>
-                <a:spcPts val="800"/>
-              </a:spcAft>
-              <a:buNone/>
-            </a:pPr>
-            <a:r>
-              <a:rPr lang="en-US" sz="1800" b="1" dirty="0">
-                <a:solidFill>
-                  <a:srgbClr val="FE4447"/>
-                </a:solidFill>
-                <a:latin typeface="Georgia" pitchFamily="34" charset="0"/>
-                <a:ea typeface="Georgia" pitchFamily="34" charset="-122"/>
-                <a:cs typeface="Georgia" pitchFamily="34" charset="-120"/>
-              </a:rPr>
-              <a:t>Learning objective</a:t>
-            </a:r>
-            <a:endParaRPr lang="en-US" sz="1800" dirty="0"/>
-          </a:p>
-        </p:txBody>
-      </p:sp>
-      <p:sp>
-        <p:nvSpPr>
-          <p:cNvPr id="6" name="Text 4"/>
-          <p:cNvSpPr/>
-          <p:nvPr/>
-        </p:nvSpPr>
-        <p:spPr>
-          <a:xfrm>
-            <a:off x="406301" y="1637854"/>
-            <a:ext cx="8498026" cy="639812"/>
-          </a:xfrm>
-          <a:prstGeom prst="rect">
-            <a:avLst/>
-          </a:prstGeom>
-          <a:noFill/>
-          <a:ln/>
-        </p:spPr>
-        <p:txBody>
-          <a:bodyPr wrap="square" lIns="0" tIns="0" rIns="0" bIns="0" rtlCol="0" anchor="t"/>
-          <a:lstStyle/>
-          <a:p>
-            <a:pPr algn="l" indent="0" marL="0">
-              <a:lnSpc>
-                <a:spcPts val="1680"/>
-              </a:lnSpc>
-              <a:spcBef>
-                <a:spcPts val="300"/>
-              </a:spcBef>
-              <a:spcAft>
-                <a:spcPts val="300"/>
-              </a:spcAft>
-              <a:buNone/>
-            </a:pPr>
-            <a:r>
-              <a:rPr lang="en-US" sz="1200" dirty="0">
-                <a:solidFill>
-                  <a:srgbClr val="1C2833"/>
-                </a:solidFill>
-                <a:latin typeface="Arial" pitchFamily="34" charset="0"/>
-                <a:ea typeface="Arial" pitchFamily="34" charset="-122"/>
-                <a:cs typeface="Arial" pitchFamily="34" charset="-120"/>
-              </a:rPr>
-              <a:t>By the end of this lesson, students name three observable signs of imbalance per </a:t>
-            </a:r>
-            <a:pPr algn="l" indent="0" marL="0">
-              <a:lnSpc>
-                <a:spcPts val="1680"/>
-              </a:lnSpc>
-              <a:spcBef>
-                <a:spcPts val="300"/>
-              </a:spcBef>
-              <a:spcAft>
-                <a:spcPts val="300"/>
-              </a:spcAft>
-              <a:buNone/>
-            </a:pPr>
-            <a:r>
-              <a:rPr lang="en-US" sz="1200" i="1" dirty="0">
-                <a:solidFill>
-                  <a:srgbClr val="1C2833"/>
-                </a:solidFill>
-                <a:latin typeface="Arial" pitchFamily="34" charset="0"/>
-                <a:ea typeface="Arial" pitchFamily="34" charset="-122"/>
-                <a:cs typeface="Arial" pitchFamily="34" charset="-120"/>
-              </a:rPr>
-              <a:t>doṣa</a:t>
-            </a:r>
-            <a:pPr algn="l" indent="0" marL="0">
-              <a:lnSpc>
-                <a:spcPts val="1680"/>
-              </a:lnSpc>
-              <a:spcBef>
-                <a:spcPts val="300"/>
-              </a:spcBef>
-              <a:spcAft>
-                <a:spcPts val="300"/>
-              </a:spcAft>
-              <a:buNone/>
-            </a:pPr>
-            <a:r>
-              <a:rPr lang="en-US" sz="1200" dirty="0">
-                <a:solidFill>
-                  <a:srgbClr val="1C2833"/>
-                </a:solidFill>
-                <a:latin typeface="Arial" pitchFamily="34" charset="0"/>
-                <a:ea typeface="Arial" pitchFamily="34" charset="-122"/>
-                <a:cs typeface="Arial" pitchFamily="34" charset="-120"/>
-              </a:rPr>
-              <a:t>, distinguish between </a:t>
-            </a:r>
-            <a:pPr algn="l" indent="0" marL="0">
-              <a:lnSpc>
-                <a:spcPts val="1680"/>
-              </a:lnSpc>
-              <a:spcBef>
-                <a:spcPts val="300"/>
-              </a:spcBef>
-              <a:spcAft>
-                <a:spcPts val="300"/>
-              </a:spcAft>
-              <a:buNone/>
-            </a:pPr>
-            <a:r>
-              <a:rPr lang="en-US" sz="1200" i="1" dirty="0">
-                <a:solidFill>
-                  <a:srgbClr val="1C2833"/>
-                </a:solidFill>
-                <a:latin typeface="Arial" pitchFamily="34" charset="0"/>
-                <a:ea typeface="Arial" pitchFamily="34" charset="-122"/>
-                <a:cs typeface="Arial" pitchFamily="34" charset="-120"/>
-              </a:rPr>
-              <a:t>lifestyle observation</a:t>
-            </a:r>
-            <a:pPr algn="l" indent="0" marL="0">
-              <a:lnSpc>
-                <a:spcPts val="1680"/>
-              </a:lnSpc>
-              <a:spcBef>
-                <a:spcPts val="300"/>
-              </a:spcBef>
-              <a:spcAft>
-                <a:spcPts val="300"/>
-              </a:spcAft>
-              <a:buNone/>
-            </a:pPr>
-            <a:r>
-              <a:rPr lang="en-US" sz="1200" dirty="0">
-                <a:solidFill>
-                  <a:srgbClr val="1C2833"/>
-                </a:solidFill>
-                <a:latin typeface="Arial" pitchFamily="34" charset="0"/>
-                <a:ea typeface="Arial" pitchFamily="34" charset="-122"/>
-                <a:cs typeface="Arial" pitchFamily="34" charset="-120"/>
-              </a:rPr>
-              <a:t> (where Ayurveda's framework can help) and </a:t>
-            </a:r>
-            <a:pPr algn="l" indent="0" marL="0">
-              <a:lnSpc>
-                <a:spcPts val="1680"/>
-              </a:lnSpc>
-              <a:spcBef>
-                <a:spcPts val="300"/>
-              </a:spcBef>
-              <a:spcAft>
-                <a:spcPts val="300"/>
-              </a:spcAft>
-              <a:buNone/>
-            </a:pPr>
-            <a:r>
-              <a:rPr lang="en-US" sz="1200" i="1" dirty="0">
-                <a:solidFill>
-                  <a:srgbClr val="1C2833"/>
-                </a:solidFill>
-                <a:latin typeface="Arial" pitchFamily="34" charset="0"/>
-                <a:ea typeface="Arial" pitchFamily="34" charset="-122"/>
-                <a:cs typeface="Arial" pitchFamily="34" charset="-120"/>
-              </a:rPr>
-              <a:t>medical symptom</a:t>
-            </a:r>
-            <a:pPr algn="l" indent="0" marL="0">
-              <a:lnSpc>
-                <a:spcPts val="1680"/>
-              </a:lnSpc>
-              <a:spcBef>
-                <a:spcPts val="300"/>
-              </a:spcBef>
-              <a:spcAft>
-                <a:spcPts val="300"/>
-              </a:spcAft>
-              <a:buNone/>
-            </a:pPr>
-            <a:r>
-              <a:rPr lang="en-US" sz="1200" dirty="0">
-                <a:solidFill>
-                  <a:srgbClr val="1C2833"/>
-                </a:solidFill>
-                <a:latin typeface="Arial" pitchFamily="34" charset="0"/>
-                <a:ea typeface="Arial" pitchFamily="34" charset="-122"/>
-                <a:cs typeface="Arial" pitchFamily="34" charset="-120"/>
-              </a:rPr>
-              <a:t> (where a doctor must be consulted), and articulate the safety boundary in their own words.</a:t>
-            </a:r>
-            <a:endParaRPr lang="en-US" sz="1200" dirty="0"/>
-          </a:p>
-        </p:txBody>
-      </p:sp>
-      <p:sp>
-        <p:nvSpPr>
-          <p:cNvPr id="7" name="Text 5"/>
-          <p:cNvSpPr/>
-          <p:nvPr/>
-        </p:nvSpPr>
-        <p:spPr>
-          <a:xfrm>
             <a:off x="406301" y="4434929"/>
             <a:ext cx="8498026" cy="213271"/>
           </a:xfrm>
@@ -2478,7 +2956,7 @@
                 <a:ea typeface="Georgia" pitchFamily="34" charset="-122"/>
                 <a:cs typeface="Georgia" pitchFamily="34" charset="-120"/>
               </a:rPr>
-              <a:t>Differentiation</a:t>
+              <a:t>Core (20 min) (cont.)</a:t>
             </a:r>
             <a:endParaRPr lang="en-US" sz="1800" dirty="0"/>
           </a:p>
@@ -2493,7 +2971,7 @@
         <p:spPr>
           <a:xfrm>
             <a:off x="634901" y="883593"/>
-            <a:ext cx="8102798" cy="937022"/>
+            <a:ext cx="8102798" cy="1988344"/>
           </a:xfrm>
           <a:prstGeom prst="rect">
             <a:avLst/>
@@ -2524,7 +3002,7 @@
                 <a:ea typeface="Arial" pitchFamily="34" charset="-122"/>
                 <a:cs typeface="Arial" pitchFamily="34" charset="-120"/>
               </a:rPr>
-              <a:t>One tier up:</a:t>
+              <a:t>Mildly dry skin in winter</a:t>
             </a:r>
             <a:pPr algn="l" indent="0" marL="0">
               <a:lnSpc>
@@ -2544,7 +3022,7 @@
                 <a:ea typeface="Arial" pitchFamily="34" charset="-122"/>
                 <a:cs typeface="Arial" pitchFamily="34" charset="-120"/>
               </a:rPr>
-              <a:t> Imagine you are an Ayurvedic clinician AND a modern doctor in conversation. Write a 3-line dialogue about a teenage patient with persistent dry cough. Who says what?</a:t>
+              <a:t> — Skin lesion that doesn't heal in 2 weeks</a:t>
             </a:r>
             <a:endParaRPr lang="en-US" sz="1200" dirty="0"/>
           </a:p>
@@ -2568,7 +3046,7 @@
                 <a:ea typeface="Arial" pitchFamily="34" charset="-122"/>
                 <a:cs typeface="Arial" pitchFamily="34" charset="-120"/>
               </a:rPr>
-              <a:t>One tier down:</a:t>
+              <a:t>Occasional acidity after spicy food</a:t>
             </a:r>
             <a:pPr algn="l" indent="0" marL="0">
               <a:lnSpc>
@@ -2588,27 +3066,271 @@
                 <a:ea typeface="Arial" pitchFamily="34" charset="-122"/>
                 <a:cs typeface="Arial" pitchFamily="34" charset="-120"/>
               </a:rPr>
-              <a:t> Memorise the two-column rule of thumb: </a:t>
-            </a:r>
-            <a:pPr algn="l" indent="0" marL="0">
+              <a:t> — Heartburn that wakes you at night, persistent</a:t>
+            </a:r>
+            <a:endParaRPr lang="en-US" sz="1200" dirty="0"/>
+          </a:p>
+          <a:p>
+            <a:pPr algn="l" marL="342900" indent="-342900">
               <a:lnSpc>
                 <a:spcPts val="1620"/>
               </a:lnSpc>
               <a:spcAft>
                 <a:spcPts val="300"/>
               </a:spcAft>
-              <a:buNone/>
-            </a:pPr>
-            <a:r>
-              <a:rPr lang="en-US" sz="1200" i="1" dirty="0">
-                <a:solidFill>
-                  <a:srgbClr val="1C2833"/>
-                </a:solidFill>
-                <a:latin typeface="Arial" pitchFamily="34" charset="0"/>
-                <a:ea typeface="Arial" pitchFamily="34" charset="-122"/>
-                <a:cs typeface="Arial" pitchFamily="34" charset="-120"/>
-              </a:rPr>
-              <a:t>"persistent or severe → doctor; brief and mild → notice + adjust."</a:t>
+              <a:buSzPct val="100000"/>
+              <a:buChar char="•"/>
+            </a:pPr>
+            <a:r>
+              <a:rPr lang="en-US" sz="1200" b="1" dirty="0">
+                <a:solidFill>
+                  <a:srgbClr val="1C2833"/>
+                </a:solidFill>
+                <a:latin typeface="Arial" pitchFamily="34" charset="0"/>
+                <a:ea typeface="Arial" pitchFamily="34" charset="-122"/>
+                <a:cs typeface="Arial" pitchFamily="34" charset="-120"/>
+              </a:rPr>
+              <a:t>Feeling sluggish after a heavy meal</a:t>
+            </a:r>
+            <a:pPr algn="l" indent="0" marL="0">
+              <a:lnSpc>
+                <a:spcPts val="1620"/>
+              </a:lnSpc>
+              <a:spcAft>
+                <a:spcPts val="300"/>
+              </a:spcAft>
+              <a:buNone/>
+            </a:pPr>
+            <a:r>
+              <a:rPr lang="en-US" sz="1200" dirty="0">
+                <a:solidFill>
+                  <a:srgbClr val="1C2833"/>
+                </a:solidFill>
+                <a:latin typeface="Arial" pitchFamily="34" charset="0"/>
+                <a:ea typeface="Arial" pitchFamily="34" charset="-122"/>
+                <a:cs typeface="Arial" pitchFamily="34" charset="-120"/>
+              </a:rPr>
+              <a:t> — Persistent fatigue lasting weeks</a:t>
+            </a:r>
+            <a:endParaRPr lang="en-US" sz="1200" dirty="0"/>
+          </a:p>
+          <a:p>
+            <a:pPr algn="l" marL="342900" indent="-342900">
+              <a:lnSpc>
+                <a:spcPts val="1620"/>
+              </a:lnSpc>
+              <a:spcAft>
+                <a:spcPts val="300"/>
+              </a:spcAft>
+              <a:buSzPct val="100000"/>
+              <a:buChar char="•"/>
+            </a:pPr>
+            <a:r>
+              <a:rPr lang="en-US" sz="1200" b="1" dirty="0">
+                <a:solidFill>
+                  <a:srgbClr val="1C2833"/>
+                </a:solidFill>
+                <a:latin typeface="Arial" pitchFamily="34" charset="0"/>
+                <a:ea typeface="Arial" pitchFamily="34" charset="-122"/>
+                <a:cs typeface="Arial" pitchFamily="34" charset="-120"/>
+              </a:rPr>
+              <a:t>Mild congestion in monsoon</a:t>
+            </a:r>
+            <a:pPr algn="l" indent="0" marL="0">
+              <a:lnSpc>
+                <a:spcPts val="1620"/>
+              </a:lnSpc>
+              <a:spcAft>
+                <a:spcPts val="300"/>
+              </a:spcAft>
+              <a:buNone/>
+            </a:pPr>
+            <a:r>
+              <a:rPr lang="en-US" sz="1200" dirty="0">
+                <a:solidFill>
+                  <a:srgbClr val="1C2833"/>
+                </a:solidFill>
+                <a:latin typeface="Arial" pitchFamily="34" charset="0"/>
+                <a:ea typeface="Arial" pitchFamily="34" charset="-122"/>
+                <a:cs typeface="Arial" pitchFamily="34" charset="-120"/>
+              </a:rPr>
+              <a:t> — Cough lasting &gt; 2 weeks, blood in mucus</a:t>
+            </a:r>
+            <a:endParaRPr lang="en-US" sz="1200" dirty="0"/>
+          </a:p>
+          <a:p>
+            <a:pPr algn="l" marL="342900" indent="-342900">
+              <a:lnSpc>
+                <a:spcPts val="1620"/>
+              </a:lnSpc>
+              <a:spcAft>
+                <a:spcPts val="300"/>
+              </a:spcAft>
+              <a:buSzPct val="100000"/>
+              <a:buChar char="•"/>
+            </a:pPr>
+            <a:r>
+              <a:rPr lang="en-US" sz="1200" b="1" dirty="0">
+                <a:solidFill>
+                  <a:srgbClr val="1C2833"/>
+                </a:solidFill>
+                <a:latin typeface="Arial" pitchFamily="34" charset="0"/>
+                <a:ea typeface="Arial" pitchFamily="34" charset="-122"/>
+                <a:cs typeface="Arial" pitchFamily="34" charset="-120"/>
+              </a:rPr>
+              <a:t>Restless sleep one night</a:t>
+            </a:r>
+            <a:pPr algn="l" indent="0" marL="0">
+              <a:lnSpc>
+                <a:spcPts val="1620"/>
+              </a:lnSpc>
+              <a:spcAft>
+                <a:spcPts val="300"/>
+              </a:spcAft>
+              <a:buNone/>
+            </a:pPr>
+            <a:r>
+              <a:rPr lang="en-US" sz="1200" dirty="0">
+                <a:solidFill>
+                  <a:srgbClr val="1C2833"/>
+                </a:solidFill>
+                <a:latin typeface="Arial" pitchFamily="34" charset="0"/>
+                <a:ea typeface="Arial" pitchFamily="34" charset="-122"/>
+                <a:cs typeface="Arial" pitchFamily="34" charset="-120"/>
+              </a:rPr>
+              <a:t> — Insomnia &gt; 2 weeks</a:t>
+            </a:r>
+            <a:endParaRPr lang="en-US" sz="1200" dirty="0"/>
+          </a:p>
+          <a:p>
+            <a:pPr algn="l" marL="342900" indent="-342900">
+              <a:lnSpc>
+                <a:spcPts val="1620"/>
+              </a:lnSpc>
+              <a:spcAft>
+                <a:spcPts val="300"/>
+              </a:spcAft>
+              <a:buSzPct val="100000"/>
+              <a:buChar char="•"/>
+            </a:pPr>
+            <a:r>
+              <a:rPr lang="en-US" sz="1200" b="1" dirty="0">
+                <a:solidFill>
+                  <a:srgbClr val="1C2833"/>
+                </a:solidFill>
+                <a:latin typeface="Arial" pitchFamily="34" charset="0"/>
+                <a:ea typeface="Arial" pitchFamily="34" charset="-122"/>
+                <a:cs typeface="Arial" pitchFamily="34" charset="-120"/>
+              </a:rPr>
+              <a:t>Anxious before a test</a:t>
+            </a:r>
+            <a:pPr algn="l" indent="0" marL="0">
+              <a:lnSpc>
+                <a:spcPts val="1620"/>
+              </a:lnSpc>
+              <a:spcAft>
+                <a:spcPts val="300"/>
+              </a:spcAft>
+              <a:buNone/>
+            </a:pPr>
+            <a:r>
+              <a:rPr lang="en-US" sz="1200" dirty="0">
+                <a:solidFill>
+                  <a:srgbClr val="1C2833"/>
+                </a:solidFill>
+                <a:latin typeface="Arial" pitchFamily="34" charset="0"/>
+                <a:ea typeface="Arial" pitchFamily="34" charset="-122"/>
+                <a:cs typeface="Arial" pitchFamily="34" charset="-120"/>
+              </a:rPr>
+              <a:t> — Anxiety that interferes with daily life</a:t>
+            </a:r>
+            <a:endParaRPr lang="en-US" sz="1200" dirty="0"/>
+          </a:p>
+          <a:p>
+            <a:pPr algn="l" marL="342900" indent="-342900">
+              <a:lnSpc>
+                <a:spcPts val="1620"/>
+              </a:lnSpc>
+              <a:spcAft>
+                <a:spcPts val="300"/>
+              </a:spcAft>
+              <a:buSzPct val="100000"/>
+              <a:buChar char="•"/>
+            </a:pPr>
+            <a:r>
+              <a:rPr lang="en-US" sz="1200" b="1" dirty="0">
+                <a:solidFill>
+                  <a:srgbClr val="1C2833"/>
+                </a:solidFill>
+                <a:latin typeface="Arial" pitchFamily="34" charset="0"/>
+                <a:ea typeface="Arial" pitchFamily="34" charset="-122"/>
+                <a:cs typeface="Arial" pitchFamily="34" charset="-120"/>
+              </a:rPr>
+              <a:t>Bowel a bit off for a day</a:t>
+            </a:r>
+            <a:pPr algn="l" indent="0" marL="0">
+              <a:lnSpc>
+                <a:spcPts val="1620"/>
+              </a:lnSpc>
+              <a:spcAft>
+                <a:spcPts val="300"/>
+              </a:spcAft>
+              <a:buNone/>
+            </a:pPr>
+            <a:r>
+              <a:rPr lang="en-US" sz="1200" dirty="0">
+                <a:solidFill>
+                  <a:srgbClr val="1C2833"/>
+                </a:solidFill>
+                <a:latin typeface="Arial" pitchFamily="34" charset="0"/>
+                <a:ea typeface="Arial" pitchFamily="34" charset="-122"/>
+                <a:cs typeface="Arial" pitchFamily="34" charset="-120"/>
+              </a:rPr>
+              <a:t> — Diarrhoea / constipation &gt; 1 week, blood in stool</a:t>
+            </a:r>
+            <a:endParaRPr lang="en-US" sz="1200" dirty="0"/>
+          </a:p>
+          <a:p>
+            <a:pPr algn="l" marL="342900" indent="-342900">
+              <a:lnSpc>
+                <a:spcPts val="1620"/>
+              </a:lnSpc>
+              <a:spcAft>
+                <a:spcPts val="300"/>
+              </a:spcAft>
+              <a:buSzPct val="100000"/>
+              <a:buChar char="•"/>
+            </a:pPr>
+            <a:r>
+              <a:rPr lang="en-US" sz="1200" b="1" dirty="0">
+                <a:solidFill>
+                  <a:srgbClr val="1C2833"/>
+                </a:solidFill>
+                <a:latin typeface="Arial" pitchFamily="34" charset="0"/>
+                <a:ea typeface="Arial" pitchFamily="34" charset="-122"/>
+                <a:cs typeface="Arial" pitchFamily="34" charset="-120"/>
+              </a:rPr>
+              <a:t>Mild headache after late night</a:t>
+            </a:r>
+            <a:pPr algn="l" indent="0" marL="0">
+              <a:lnSpc>
+                <a:spcPts val="1620"/>
+              </a:lnSpc>
+              <a:spcAft>
+                <a:spcPts val="300"/>
+              </a:spcAft>
+              <a:buNone/>
+            </a:pPr>
+            <a:r>
+              <a:rPr lang="en-US" sz="1200" dirty="0">
+                <a:solidFill>
+                  <a:srgbClr val="1C2833"/>
+                </a:solidFill>
+                <a:latin typeface="Arial" pitchFamily="34" charset="0"/>
+                <a:ea typeface="Arial" pitchFamily="34" charset="-122"/>
+                <a:cs typeface="Arial" pitchFamily="34" charset="-120"/>
+              </a:rPr>
+              <a:t> — Severe headache, recurrent, with nausea or vision change</a:t>
             </a:r>
             <a:endParaRPr lang="en-US" sz="1200" dirty="0"/>
           </a:p>
@@ -2766,7 +3488,7 @@
                 <a:ea typeface="Georgia" pitchFamily="34" charset="-122"/>
                 <a:cs typeface="Georgia" pitchFamily="34" charset="-120"/>
               </a:rPr>
-              <a:t>Teacher notes</a:t>
+              <a:t>Core (20 min) (cont.)</a:t>
             </a:r>
             <a:endParaRPr lang="en-US" sz="1800" dirty="0"/>
           </a:p>
@@ -2781,7 +3503,7 @@
         <p:spPr>
           <a:xfrm>
             <a:off x="406301" y="870942"/>
-            <a:ext cx="8498026" cy="853083"/>
+            <a:ext cx="8498026" cy="426541"/>
           </a:xfrm>
           <a:prstGeom prst="rect">
             <a:avLst/>
@@ -2806,6 +3528,72 @@
               <a:buNone/>
             </a:pPr>
             <a:r>
+              <a:rPr lang="en-US" sz="1200" i="1" dirty="0">
+                <a:solidFill>
+                  <a:srgbClr val="1C2833"/>
+                </a:solidFill>
+                <a:latin typeface="Arial" pitchFamily="34" charset="0"/>
+                <a:ea typeface="Arial" pitchFamily="34" charset="-122"/>
+                <a:cs typeface="Arial" pitchFamily="34" charset="-120"/>
+              </a:rPr>
+              <a:t>"The left column — the framework can help. Notice patterns, adjust routine, try the opposite quality. The right column — go to a doctor. Doṣa-language is not enough."</a:t>
+            </a:r>
+            <a:endParaRPr lang="en-US" sz="1200" dirty="0"/>
+          </a:p>
+        </p:txBody>
+      </p:sp>
+      <p:sp>
+        <p:nvSpPr>
+          <p:cNvPr id="5" name="Text 3"/>
+          <p:cNvSpPr/>
+          <p:nvPr/>
+        </p:nvSpPr>
+        <p:spPr>
+          <a:xfrm>
+            <a:off x="634901" y="1386334"/>
+            <a:ext cx="8102798" cy="281880"/>
+          </a:xfrm>
+          <a:prstGeom prst="rect">
+            <a:avLst/>
+          </a:prstGeom>
+          <a:noFill/>
+          <a:ln/>
+        </p:spPr>
+        <p:txBody>
+          <a:bodyPr wrap="square" lIns="0" tIns="0" rIns="0" bIns="0" rtlCol="0" anchor="t"/>
+          <a:lstStyle/>
+          <a:p>
+            <a:pPr algn="l" marL="342900" indent="-342900">
+              <a:lnSpc>
+                <a:spcPts val="1620"/>
+              </a:lnSpc>
+              <a:spcAft>
+                <a:spcPts val="300"/>
+              </a:spcAft>
+              <a:buSzPct val="100000"/>
+              <a:buChar char="•"/>
+            </a:pPr>
+            <a:r>
+              <a:rPr lang="en-US" sz="1200" b="1" dirty="0">
+                <a:solidFill>
+                  <a:srgbClr val="1C2833"/>
+                </a:solidFill>
+                <a:latin typeface="Arial" pitchFamily="34" charset="0"/>
+                <a:ea typeface="Arial" pitchFamily="34" charset="-122"/>
+                <a:cs typeface="Arial" pitchFamily="34" charset="-120"/>
+              </a:rPr>
+              <a:t>Source paraphrase</a:t>
+            </a:r>
+            <a:pPr algn="l" indent="0" marL="0">
+              <a:lnSpc>
+                <a:spcPts val="1620"/>
+              </a:lnSpc>
+              <a:spcAft>
+                <a:spcPts val="300"/>
+              </a:spcAft>
+              <a:buNone/>
+            </a:pPr>
+            <a:r>
               <a:rPr lang="en-US" sz="1200" dirty="0">
                 <a:solidFill>
                   <a:srgbClr val="1C2833"/>
@@ -2814,11 +3602,89 @@
                 <a:ea typeface="Arial" pitchFamily="34" charset="-122"/>
                 <a:cs typeface="Arial" pitchFamily="34" charset="-120"/>
               </a:rPr>
-              <a:t>– This is the safety lesson. </a:t>
-            </a:r>
-            <a:pPr algn="l" indent="0" marL="0">
-              <a:lnSpc>
-                <a:spcPts val="1680"/>
+              <a:t>:</a:t>
+            </a:r>
+            <a:endParaRPr lang="en-US" sz="1200" dirty="0"/>
+          </a:p>
+        </p:txBody>
+      </p:sp>
+      <p:sp>
+        <p:nvSpPr>
+          <p:cNvPr id="6" name="Text 4"/>
+          <p:cNvSpPr/>
+          <p:nvPr/>
+        </p:nvSpPr>
+        <p:spPr>
+          <a:xfrm>
+            <a:off x="406301" y="1769715"/>
+            <a:ext cx="8331398" cy="842963"/>
+          </a:xfrm>
+          <a:prstGeom prst="rect">
+            <a:avLst/>
+          </a:prstGeom>
+          <a:solidFill>
+            <a:srgbClr val="F4F8F9"/>
+          </a:solidFill>
+          <a:ln/>
+        </p:spPr>
+        <p:txBody>
+          <a:bodyPr wrap="square" rtlCol="0" anchor="ctr"/>
+          <a:lstStyle/>
+          <a:p>
+            <a:pPr indent="0" marL="0">
+              <a:buNone/>
+            </a:pPr>
+            <a:endParaRPr lang="en-US" dirty="0"/>
+          </a:p>
+        </p:txBody>
+      </p:sp>
+      <p:sp>
+        <p:nvSpPr>
+          <p:cNvPr id="7" name="Shape 5"/>
+          <p:cNvSpPr/>
+          <p:nvPr/>
+        </p:nvSpPr>
+        <p:spPr>
+          <a:xfrm>
+            <a:off x="434876" y="1769715"/>
+            <a:ext cx="0" cy="842962"/>
+          </a:xfrm>
+          <a:prstGeom prst="line">
+            <a:avLst/>
+          </a:prstGeom>
+          <a:noFill/>
+          <a:ln w="57150">
+            <a:solidFill>
+              <a:srgbClr val="FE4447"/>
+            </a:solidFill>
+            <a:prstDash val="solid"/>
+          </a:ln>
+        </p:spPr>
+      </p:sp>
+      <p:sp>
+        <p:nvSpPr>
+          <p:cNvPr id="8" name="Text 6"/>
+          <p:cNvSpPr/>
+          <p:nvPr/>
+        </p:nvSpPr>
+        <p:spPr>
+          <a:xfrm>
+            <a:off x="692051" y="1960215"/>
+            <a:ext cx="7973389" cy="461963"/>
+          </a:xfrm>
+          <a:prstGeom prst="rect">
+            <a:avLst/>
+          </a:prstGeom>
+          <a:noFill/>
+          <a:ln/>
+        </p:spPr>
+        <p:txBody>
+          <a:bodyPr wrap="square" lIns="0" tIns="0" rIns="0" bIns="0" rtlCol="0" anchor="t"/>
+          <a:lstStyle/>
+          <a:p>
+            <a:pPr algn="l" indent="0" marL="0">
+              <a:lnSpc>
+                <a:spcPts val="1820"/>
               </a:lnSpc>
               <a:spcBef>
                 <a:spcPts val="300"/>
@@ -2829,19 +3695,19 @@
               <a:buNone/>
             </a:pPr>
             <a:r>
-              <a:rPr lang="en-US" sz="1200" b="1" dirty="0">
-                <a:solidFill>
-                  <a:srgbClr val="1C2833"/>
-                </a:solidFill>
-                <a:latin typeface="Arial" pitchFamily="34" charset="0"/>
-                <a:ea typeface="Arial" pitchFamily="34" charset="-122"/>
-                <a:cs typeface="Arial" pitchFamily="34" charset="-120"/>
-              </a:rPr>
-              <a:t>Do not skip even if compressing the module.</a:t>
-            </a:r>
-            <a:pPr algn="l" indent="0" marL="0">
-              <a:lnSpc>
-                <a:spcPts val="1680"/>
+              <a:rPr lang="en-US" sz="1300" dirty="0">
+                <a:solidFill>
+                  <a:srgbClr val="1C2833"/>
+                </a:solidFill>
+                <a:latin typeface="Georgia" pitchFamily="34" charset="0"/>
+                <a:ea typeface="Georgia" pitchFamily="34" charset="-122"/>
+                <a:cs typeface="Georgia" pitchFamily="34" charset="-120"/>
+              </a:rPr>
+              <a:t>"Knowing the doṣas in both their natural and disturbed states is the foundation of medical practice." — paraphrased from Aṣṭāṅga Hṛdaya, </a:t>
+            </a:r>
+            <a:pPr algn="l" indent="0" marL="0">
+              <a:lnSpc>
+                <a:spcPts val="1820"/>
               </a:lnSpc>
               <a:spcBef>
                 <a:spcPts val="300"/>
@@ -2852,19 +3718,19 @@
               <a:buNone/>
             </a:pPr>
             <a:r>
-              <a:rPr lang="en-US" sz="1200" dirty="0">
-                <a:solidFill>
-                  <a:srgbClr val="1C2833"/>
-                </a:solidFill>
-                <a:latin typeface="Arial" pitchFamily="34" charset="0"/>
-                <a:ea typeface="Arial" pitchFamily="34" charset="-122"/>
-                <a:cs typeface="Arial" pitchFamily="34" charset="-120"/>
-              </a:rPr>
-              <a:t> – Some students may have actual unmanaged symptoms. Be alert. Refer to school counsellor or nurse where needed. – Don't list specific herbs or remedies even casually. Module 4 is observation-only. – Some Indian families do consult Ayurvedic doctors. Honour that. The point is: </a:t>
-            </a:r>
-            <a:pPr algn="l" indent="0" marL="0">
-              <a:lnSpc>
-                <a:spcPts val="1680"/>
+              <a:rPr lang="en-US" sz="1300" i="1" dirty="0">
+                <a:solidFill>
+                  <a:srgbClr val="1C2833"/>
+                </a:solidFill>
+                <a:latin typeface="Georgia" pitchFamily="34" charset="0"/>
+                <a:ea typeface="Georgia" pitchFamily="34" charset="-122"/>
+                <a:cs typeface="Georgia" pitchFamily="34" charset="-120"/>
+              </a:rPr>
+              <a:t>Sūtrasthāna</a:t>
+            </a:r>
+            <a:pPr algn="l" indent="0" marL="0">
+              <a:lnSpc>
+                <a:spcPts val="1820"/>
               </a:lnSpc>
               <a:spcBef>
                 <a:spcPts val="300"/>
@@ -2875,92 +3741,23 @@
               <a:buNone/>
             </a:pPr>
             <a:r>
-              <a:rPr lang="en-US" sz="1200" i="1" dirty="0">
-                <a:solidFill>
-                  <a:srgbClr val="1C2833"/>
-                </a:solidFill>
-                <a:latin typeface="Arial" pitchFamily="34" charset="0"/>
-                <a:ea typeface="Arial" pitchFamily="34" charset="-122"/>
-                <a:cs typeface="Arial" pitchFamily="34" charset="-120"/>
-              </a:rPr>
-              <a:t>a qualified clinician</a:t>
-            </a:r>
-            <a:pPr algn="l" indent="0" marL="0">
-              <a:lnSpc>
-                <a:spcPts val="1680"/>
-              </a:lnSpc>
-              <a:spcBef>
-                <a:spcPts val="300"/>
-              </a:spcBef>
-              <a:spcAft>
-                <a:spcPts val="300"/>
-              </a:spcAft>
-              <a:buNone/>
-            </a:pPr>
-            <a:r>
-              <a:rPr lang="en-US" sz="1200" dirty="0">
-                <a:solidFill>
-                  <a:srgbClr val="1C2833"/>
-                </a:solidFill>
-                <a:latin typeface="Arial" pitchFamily="34" charset="0"/>
-                <a:ea typeface="Arial" pitchFamily="34" charset="-122"/>
-                <a:cs typeface="Arial" pitchFamily="34" charset="-120"/>
-              </a:rPr>
-              <a:t> — Ayurvedic or modern — is who diagnoses. </a:t>
-            </a:r>
-            <a:pPr algn="l" indent="0" marL="0">
-              <a:lnSpc>
-                <a:spcPts val="1680"/>
-              </a:lnSpc>
-              <a:spcBef>
-                <a:spcPts val="300"/>
-              </a:spcBef>
-              <a:spcAft>
-                <a:spcPts val="300"/>
-              </a:spcAft>
-              <a:buNone/>
-            </a:pPr>
-            <a:r>
-              <a:rPr lang="en-US" sz="1200" i="1" dirty="0">
-                <a:solidFill>
-                  <a:srgbClr val="1C2833"/>
-                </a:solidFill>
-                <a:latin typeface="Arial" pitchFamily="34" charset="0"/>
-                <a:ea typeface="Arial" pitchFamily="34" charset="-122"/>
-                <a:cs typeface="Arial" pitchFamily="34" charset="-120"/>
-              </a:rPr>
-              <a:t>A student with a wall poster</a:t>
-            </a:r>
-            <a:pPr algn="l" indent="0" marL="0">
-              <a:lnSpc>
-                <a:spcPts val="1680"/>
-              </a:lnSpc>
-              <a:spcBef>
-                <a:spcPts val="300"/>
-              </a:spcBef>
-              <a:spcAft>
-                <a:spcPts val="300"/>
-              </a:spcAft>
-              <a:buNone/>
-            </a:pPr>
-            <a:r>
-              <a:rPr lang="en-US" sz="1200" dirty="0">
-                <a:solidFill>
-                  <a:srgbClr val="1C2833"/>
-                </a:solidFill>
-                <a:latin typeface="Arial" pitchFamily="34" charset="0"/>
-                <a:ea typeface="Arial" pitchFamily="34" charset="-122"/>
-                <a:cs typeface="Arial" pitchFamily="34" charset="-120"/>
-              </a:rPr>
-              <a:t> is not.</a:t>
-            </a:r>
-            <a:endParaRPr lang="en-US" sz="1200" dirty="0"/>
-          </a:p>
-        </p:txBody>
-      </p:sp>
-      <p:sp>
-        <p:nvSpPr>
-          <p:cNvPr id="5" name="Text 3"/>
+              <a:rPr lang="en-US" sz="1300" dirty="0">
+                <a:solidFill>
+                  <a:srgbClr val="1C2833"/>
+                </a:solidFill>
+                <a:latin typeface="Georgia" pitchFamily="34" charset="0"/>
+                <a:ea typeface="Georgia" pitchFamily="34" charset="-122"/>
+                <a:cs typeface="Georgia" pitchFamily="34" charset="-120"/>
+              </a:rPr>
+              <a:t> 1.8</a:t>
+            </a:r>
+            <a:endParaRPr lang="en-US" sz="1300" dirty="0"/>
+          </a:p>
+        </p:txBody>
+      </p:sp>
+      <p:sp>
+        <p:nvSpPr>
+          <p:cNvPr id="9" name="Text 7"/>
           <p:cNvSpPr/>
           <p:nvPr/>
         </p:nvSpPr>
@@ -3110,7 +3907,733 @@
                 <a:ea typeface="Georgia" pitchFamily="34" charset="-122"/>
                 <a:cs typeface="Georgia" pitchFamily="34" charset="-120"/>
               </a:rPr>
-              <a:t>Citation(s) used in this lesson</a:t>
+              <a:t>Core (20 min) (cont.)</a:t>
+            </a:r>
+            <a:endParaRPr lang="en-US" sz="1800" dirty="0"/>
+          </a:p>
+        </p:txBody>
+      </p:sp>
+      <p:sp>
+        <p:nvSpPr>
+          <p:cNvPr id="4" name="Text 2"/>
+          <p:cNvSpPr/>
+          <p:nvPr/>
+        </p:nvSpPr>
+        <p:spPr>
+          <a:xfrm>
+            <a:off x="406301" y="870942"/>
+            <a:ext cx="8498026" cy="426541"/>
+          </a:xfrm>
+          <a:prstGeom prst="rect">
+            <a:avLst/>
+          </a:prstGeom>
+          <a:noFill/>
+          <a:ln/>
+        </p:spPr>
+        <p:txBody>
+          <a:bodyPr wrap="square" lIns="0" tIns="0" rIns="0" bIns="0" rtlCol="0" anchor="t"/>
+          <a:lstStyle/>
+          <a:p>
+            <a:pPr algn="l" indent="0" marL="0">
+              <a:lnSpc>
+                <a:spcPts val="1680"/>
+              </a:lnSpc>
+              <a:spcBef>
+                <a:spcPts val="300"/>
+              </a:spcBef>
+              <a:spcAft>
+                <a:spcPts val="300"/>
+              </a:spcAft>
+              <a:buNone/>
+            </a:pPr>
+            <a:r>
+              <a:rPr lang="en-US" sz="1200" dirty="0">
+                <a:solidFill>
+                  <a:srgbClr val="1C2833"/>
+                </a:solidFill>
+                <a:latin typeface="Arial" pitchFamily="34" charset="0"/>
+                <a:ea typeface="Arial" pitchFamily="34" charset="-122"/>
+                <a:cs typeface="Arial" pitchFamily="34" charset="-120"/>
+              </a:rPr>
+              <a:t>Note even Vāgbhaṭa's classical statement situates </a:t>
+            </a:r>
+            <a:pPr algn="l" indent="0" marL="0">
+              <a:lnSpc>
+                <a:spcPts val="1680"/>
+              </a:lnSpc>
+              <a:spcBef>
+                <a:spcPts val="300"/>
+              </a:spcBef>
+              <a:spcAft>
+                <a:spcPts val="300"/>
+              </a:spcAft>
+              <a:buNone/>
+            </a:pPr>
+            <a:r>
+              <a:rPr lang="en-US" sz="1200" i="1" dirty="0">
+                <a:solidFill>
+                  <a:srgbClr val="1C2833"/>
+                </a:solidFill>
+                <a:latin typeface="Arial" pitchFamily="34" charset="0"/>
+                <a:ea typeface="Arial" pitchFamily="34" charset="-122"/>
+                <a:cs typeface="Arial" pitchFamily="34" charset="-120"/>
+              </a:rPr>
+              <a:t>doṣa</a:t>
+            </a:r>
+            <a:pPr algn="l" indent="0" marL="0">
+              <a:lnSpc>
+                <a:spcPts val="1680"/>
+              </a:lnSpc>
+              <a:spcBef>
+                <a:spcPts val="300"/>
+              </a:spcBef>
+              <a:spcAft>
+                <a:spcPts val="300"/>
+              </a:spcAft>
+              <a:buNone/>
+            </a:pPr>
+            <a:r>
+              <a:rPr lang="en-US" sz="1200" dirty="0">
+                <a:solidFill>
+                  <a:srgbClr val="1C2833"/>
+                </a:solidFill>
+                <a:latin typeface="Arial" pitchFamily="34" charset="0"/>
+                <a:ea typeface="Arial" pitchFamily="34" charset="-122"/>
+                <a:cs typeface="Arial" pitchFamily="34" charset="-120"/>
+              </a:rPr>
+              <a:t> knowledge as a </a:t>
+            </a:r>
+            <a:pPr algn="l" indent="0" marL="0">
+              <a:lnSpc>
+                <a:spcPts val="1680"/>
+              </a:lnSpc>
+              <a:spcBef>
+                <a:spcPts val="300"/>
+              </a:spcBef>
+              <a:spcAft>
+                <a:spcPts val="300"/>
+              </a:spcAft>
+              <a:buNone/>
+            </a:pPr>
+            <a:r>
+              <a:rPr lang="en-US" sz="1200" i="1" dirty="0">
+                <a:solidFill>
+                  <a:srgbClr val="1C2833"/>
+                </a:solidFill>
+                <a:latin typeface="Arial" pitchFamily="34" charset="0"/>
+                <a:ea typeface="Arial" pitchFamily="34" charset="-122"/>
+                <a:cs typeface="Arial" pitchFamily="34" charset="-120"/>
+              </a:rPr>
+              <a:t>foundation</a:t>
+            </a:r>
+            <a:pPr algn="l" indent="0" marL="0">
+              <a:lnSpc>
+                <a:spcPts val="1680"/>
+              </a:lnSpc>
+              <a:spcBef>
+                <a:spcPts val="300"/>
+              </a:spcBef>
+              <a:spcAft>
+                <a:spcPts val="300"/>
+              </a:spcAft>
+              <a:buNone/>
+            </a:pPr>
+            <a:r>
+              <a:rPr lang="en-US" sz="1200" dirty="0">
+                <a:solidFill>
+                  <a:srgbClr val="1C2833"/>
+                </a:solidFill>
+                <a:latin typeface="Arial" pitchFamily="34" charset="0"/>
+                <a:ea typeface="Arial" pitchFamily="34" charset="-122"/>
+                <a:cs typeface="Arial" pitchFamily="34" charset="-120"/>
+              </a:rPr>
+              <a:t> — not the whole of medicine. Diagnosis is more than naming the </a:t>
+            </a:r>
+            <a:pPr algn="l" indent="0" marL="0">
+              <a:lnSpc>
+                <a:spcPts val="1680"/>
+              </a:lnSpc>
+              <a:spcBef>
+                <a:spcPts val="300"/>
+              </a:spcBef>
+              <a:spcAft>
+                <a:spcPts val="300"/>
+              </a:spcAft>
+              <a:buNone/>
+            </a:pPr>
+            <a:r>
+              <a:rPr lang="en-US" sz="1200" i="1" dirty="0">
+                <a:solidFill>
+                  <a:srgbClr val="1C2833"/>
+                </a:solidFill>
+                <a:latin typeface="Arial" pitchFamily="34" charset="0"/>
+                <a:ea typeface="Arial" pitchFamily="34" charset="-122"/>
+                <a:cs typeface="Arial" pitchFamily="34" charset="-120"/>
+              </a:rPr>
+              <a:t>doṣa</a:t>
+            </a:r>
+            <a:pPr algn="l" indent="0" marL="0">
+              <a:lnSpc>
+                <a:spcPts val="1680"/>
+              </a:lnSpc>
+              <a:spcBef>
+                <a:spcPts val="300"/>
+              </a:spcBef>
+              <a:spcAft>
+                <a:spcPts val="300"/>
+              </a:spcAft>
+              <a:buNone/>
+            </a:pPr>
+            <a:r>
+              <a:rPr lang="en-US" sz="1200" dirty="0">
+                <a:solidFill>
+                  <a:srgbClr val="1C2833"/>
+                </a:solidFill>
+                <a:latin typeface="Arial" pitchFamily="34" charset="0"/>
+                <a:ea typeface="Arial" pitchFamily="34" charset="-122"/>
+                <a:cs typeface="Arial" pitchFamily="34" charset="-120"/>
+              </a:rPr>
+              <a:t>.</a:t>
+            </a:r>
+            <a:endParaRPr lang="en-US" sz="1200" dirty="0"/>
+          </a:p>
+        </p:txBody>
+      </p:sp>
+      <p:sp>
+        <p:nvSpPr>
+          <p:cNvPr id="5" name="Text 3"/>
+          <p:cNvSpPr/>
+          <p:nvPr/>
+        </p:nvSpPr>
+        <p:spPr>
+          <a:xfrm>
+            <a:off x="406301" y="4434929"/>
+            <a:ext cx="8498026" cy="213271"/>
+          </a:xfrm>
+          <a:prstGeom prst="rect">
+            <a:avLst/>
+          </a:prstGeom>
+          <a:noFill/>
+          <a:ln/>
+        </p:spPr>
+        <p:txBody>
+          <a:bodyPr wrap="square" lIns="0" tIns="0" rIns="0" bIns="0" rtlCol="0" anchor="t"/>
+          <a:lstStyle/>
+          <a:p>
+            <a:pPr algn="l" indent="0" marL="0">
+              <a:lnSpc>
+                <a:spcPts val="1680"/>
+              </a:lnSpc>
+              <a:spcBef>
+                <a:spcPts val="300"/>
+              </a:spcBef>
+              <a:spcAft>
+                <a:spcPts val="300"/>
+              </a:spcAft>
+              <a:buNone/>
+            </a:pPr>
+            <a:r>
+              <a:rPr lang="en-US" sz="1200" dirty="0">
+                <a:solidFill>
+                  <a:srgbClr val="1C2833"/>
+                </a:solidFill>
+                <a:latin typeface="Arial" pitchFamily="34" charset="0"/>
+                <a:ea typeface="Arial" pitchFamily="34" charset="-122"/>
+                <a:cs typeface="Arial" pitchFamily="34" charset="-120"/>
+              </a:rPr>
+              <a:t>Middle ·  · IKS Curriculum</a:t>
+            </a:r>
+            <a:endParaRPr lang="en-US" sz="1200" dirty="0"/>
+          </a:p>
+        </p:txBody>
+      </p:sp>
+    </p:spTree>
+  </p:cSld>
+  <p:clrMapOvr>
+    <a:masterClrMapping/>
+  </p:clrMapOvr>
+</p:sld>
+</file>
+
+<file path=ppt/slides/slide13.xml><?xml version="1.0" encoding="utf-8"?>
+<p:sld xmlns:a="http://schemas.openxmlformats.org/drawingml/2006/main" xmlns:r="http://schemas.openxmlformats.org/officeDocument/2006/relationships" xmlns:p="http://schemas.openxmlformats.org/presentationml/2006/main">
+  <p:cSld name="Slide 13">
+    <p:bg>
+      <p:bgPr>
+        <a:solidFill>
+          <a:srgbClr val="FFFFFF"/>
+        </a:solidFill>
+      </p:bgPr>
+    </p:bg>
+    <p:spTree>
+      <p:nvGrpSpPr>
+        <p:cNvPr id="1" name=""/>
+        <p:cNvGrpSpPr/>
+        <p:nvPr/>
+      </p:nvGrpSpPr>
+      <p:grpSpPr>
+        <a:xfrm>
+          <a:off x="0" y="0"/>
+          <a:ext cx="0" cy="0"/>
+          <a:chOff x="0" y="0"/>
+          <a:chExt cx="0" cy="0"/>
+        </a:xfrm>
+      </p:grpSpPr>
+      <p:sp>
+        <p:nvSpPr>
+          <p:cNvPr id="2" name="Text 0"/>
+          <p:cNvSpPr/>
+          <p:nvPr/>
+        </p:nvSpPr>
+        <p:spPr>
+          <a:xfrm>
+            <a:off x="0" y="0"/>
+            <a:ext cx="9144000" cy="101501"/>
+          </a:xfrm>
+          <a:prstGeom prst="rect">
+            <a:avLst/>
+          </a:prstGeom>
+          <a:solidFill>
+            <a:srgbClr val="277884"/>
+          </a:solidFill>
+          <a:ln/>
+        </p:spPr>
+        <p:txBody>
+          <a:bodyPr wrap="square" rtlCol="0" anchor="ctr"/>
+          <a:lstStyle/>
+          <a:p>
+            <a:pPr indent="0" marL="0">
+              <a:buNone/>
+            </a:pPr>
+            <a:endParaRPr lang="en-US" dirty="0"/>
+          </a:p>
+        </p:txBody>
+      </p:sp>
+      <p:sp>
+        <p:nvSpPr>
+          <p:cNvPr id="3" name="Text 1"/>
+          <p:cNvSpPr/>
+          <p:nvPr/>
+        </p:nvSpPr>
+        <p:spPr>
+          <a:xfrm>
+            <a:off x="406301" y="457051"/>
+            <a:ext cx="8498026" cy="274290"/>
+          </a:xfrm>
+          <a:prstGeom prst="rect">
+            <a:avLst/>
+          </a:prstGeom>
+          <a:noFill/>
+          <a:ln/>
+        </p:spPr>
+        <p:txBody>
+          <a:bodyPr wrap="square" lIns="0" tIns="0" rIns="0" bIns="0" rtlCol="0" anchor="t"/>
+          <a:lstStyle/>
+          <a:p>
+            <a:pPr algn="l" indent="0" marL="0">
+              <a:lnSpc>
+                <a:spcPts val="2160"/>
+              </a:lnSpc>
+              <a:spcBef>
+                <a:spcPts val="600"/>
+              </a:spcBef>
+              <a:spcAft>
+                <a:spcPts val="800"/>
+              </a:spcAft>
+              <a:buNone/>
+            </a:pPr>
+            <a:r>
+              <a:rPr lang="en-US" sz="1800" b="1" dirty="0">
+                <a:solidFill>
+                  <a:srgbClr val="FE4447"/>
+                </a:solidFill>
+                <a:latin typeface="Georgia" pitchFamily="34" charset="0"/>
+                <a:ea typeface="Georgia" pitchFamily="34" charset="-122"/>
+                <a:cs typeface="Georgia" pitchFamily="34" charset="-120"/>
+              </a:rPr>
+              <a:t>Core (20 min) (cont.)</a:t>
+            </a:r>
+            <a:endParaRPr lang="en-US" sz="1800" dirty="0"/>
+          </a:p>
+        </p:txBody>
+      </p:sp>
+      <p:sp>
+        <p:nvSpPr>
+          <p:cNvPr id="4" name="Text 2"/>
+          <p:cNvSpPr/>
+          <p:nvPr/>
+        </p:nvSpPr>
+        <p:spPr>
+          <a:xfrm>
+            <a:off x="634901" y="883593"/>
+            <a:ext cx="8102798" cy="281880"/>
+          </a:xfrm>
+          <a:prstGeom prst="rect">
+            <a:avLst/>
+          </a:prstGeom>
+          <a:noFill/>
+          <a:ln/>
+        </p:spPr>
+        <p:txBody>
+          <a:bodyPr wrap="square" lIns="0" tIns="0" rIns="0" bIns="0" rtlCol="0" anchor="t"/>
+          <a:lstStyle/>
+          <a:p>
+            <a:pPr algn="l" marL="342900" indent="-342900">
+              <a:lnSpc>
+                <a:spcPts val="1620"/>
+              </a:lnSpc>
+              <a:spcAft>
+                <a:spcPts val="300"/>
+              </a:spcAft>
+              <a:buSzPct val="100000"/>
+              <a:buChar char="•"/>
+            </a:pPr>
+            <a:r>
+              <a:rPr lang="en-US" sz="1200" b="1" dirty="0">
+                <a:solidFill>
+                  <a:srgbClr val="1C2833"/>
+                </a:solidFill>
+                <a:latin typeface="Arial" pitchFamily="34" charset="0"/>
+                <a:ea typeface="Arial" pitchFamily="34" charset="-122"/>
+                <a:cs typeface="Arial" pitchFamily="34" charset="-120"/>
+              </a:rPr>
+              <a:t>The misuse pattern to watch for</a:t>
+            </a:r>
+            <a:pPr algn="l" indent="0" marL="0">
+              <a:lnSpc>
+                <a:spcPts val="1620"/>
+              </a:lnSpc>
+              <a:spcAft>
+                <a:spcPts val="300"/>
+              </a:spcAft>
+              <a:buNone/>
+            </a:pPr>
+            <a:r>
+              <a:rPr lang="en-US" sz="1200" dirty="0">
+                <a:solidFill>
+                  <a:srgbClr val="1C2833"/>
+                </a:solidFill>
+                <a:latin typeface="Arial" pitchFamily="34" charset="0"/>
+                <a:ea typeface="Arial" pitchFamily="34" charset="-122"/>
+                <a:cs typeface="Arial" pitchFamily="34" charset="-120"/>
+              </a:rPr>
+              <a:t>:</a:t>
+            </a:r>
+            <a:endParaRPr lang="en-US" sz="1200" dirty="0"/>
+          </a:p>
+        </p:txBody>
+      </p:sp>
+      <p:sp>
+        <p:nvSpPr>
+          <p:cNvPr id="5" name="Text 3"/>
+          <p:cNvSpPr/>
+          <p:nvPr/>
+        </p:nvSpPr>
+        <p:spPr>
+          <a:xfrm>
+            <a:off x="634901" y="1266974"/>
+            <a:ext cx="8102798" cy="1218902"/>
+          </a:xfrm>
+          <a:prstGeom prst="rect">
+            <a:avLst/>
+          </a:prstGeom>
+          <a:noFill/>
+          <a:ln/>
+        </p:spPr>
+        <p:txBody>
+          <a:bodyPr wrap="square" lIns="0" tIns="0" rIns="0" bIns="0" rtlCol="0" anchor="t"/>
+          <a:lstStyle/>
+          <a:p>
+            <a:pPr algn="l" marL="342900" indent="-342900">
+              <a:lnSpc>
+                <a:spcPts val="1620"/>
+              </a:lnSpc>
+              <a:spcAft>
+                <a:spcPts val="300"/>
+              </a:spcAft>
+              <a:buSzPct val="100000"/>
+              <a:buChar char="•"/>
+            </a:pPr>
+            <a:r>
+              <a:rPr lang="en-US" sz="1200" dirty="0">
+                <a:solidFill>
+                  <a:srgbClr val="1C2833"/>
+                </a:solidFill>
+                <a:latin typeface="Arial" pitchFamily="34" charset="0"/>
+                <a:ea typeface="Arial" pitchFamily="34" charset="-122"/>
+                <a:cs typeface="Arial" pitchFamily="34" charset="-120"/>
+              </a:rPr>
+              <a:t>"It's just my Vāta acting up" — used to dismiss anxiety that needs help.</a:t>
+            </a:r>
+            <a:endParaRPr lang="en-US" sz="1200" dirty="0"/>
+          </a:p>
+          <a:p>
+            <a:pPr algn="l" marL="342900" indent="-342900">
+              <a:lnSpc>
+                <a:spcPts val="1620"/>
+              </a:lnSpc>
+              <a:spcAft>
+                <a:spcPts val="300"/>
+              </a:spcAft>
+              <a:buSzPct val="100000"/>
+              <a:buChar char="•"/>
+            </a:pPr>
+            <a:r>
+              <a:rPr lang="en-US" sz="1200" dirty="0">
+                <a:solidFill>
+                  <a:srgbClr val="1C2833"/>
+                </a:solidFill>
+                <a:latin typeface="Arial" pitchFamily="34" charset="0"/>
+                <a:ea typeface="Arial" pitchFamily="34" charset="-122"/>
+                <a:cs typeface="Arial" pitchFamily="34" charset="-120"/>
+              </a:rPr>
+              <a:t>"I'm naturally Kapha so I can't lose weight" — used as a fixed-identity excuse.</a:t>
+            </a:r>
+            <a:endParaRPr lang="en-US" sz="1200" dirty="0"/>
+          </a:p>
+          <a:p>
+            <a:pPr algn="l" marL="342900" indent="-342900">
+              <a:lnSpc>
+                <a:spcPts val="1620"/>
+              </a:lnSpc>
+              <a:spcAft>
+                <a:spcPts val="300"/>
+              </a:spcAft>
+              <a:buSzPct val="100000"/>
+              <a:buChar char="•"/>
+            </a:pPr>
+            <a:r>
+              <a:rPr lang="en-US" sz="1200" dirty="0">
+                <a:solidFill>
+                  <a:srgbClr val="1C2833"/>
+                </a:solidFill>
+                <a:latin typeface="Arial" pitchFamily="34" charset="0"/>
+                <a:ea typeface="Arial" pitchFamily="34" charset="-122"/>
+                <a:cs typeface="Arial" pitchFamily="34" charset="-120"/>
+              </a:rPr>
+              <a:t>"Eat this herb to balance your Pitta" — non-doctor giving medical advice. Refuse.</a:t>
+            </a:r>
+            <a:endParaRPr lang="en-US" sz="1200" dirty="0"/>
+          </a:p>
+          <a:p>
+            <a:pPr algn="l" marL="342900" indent="-342900">
+              <a:lnSpc>
+                <a:spcPts val="1620"/>
+              </a:lnSpc>
+              <a:spcAft>
+                <a:spcPts val="300"/>
+              </a:spcAft>
+              <a:buSzPct val="100000"/>
+              <a:buChar char="•"/>
+            </a:pPr>
+            <a:r>
+              <a:rPr lang="en-US" sz="1200" dirty="0">
+                <a:solidFill>
+                  <a:srgbClr val="1C2833"/>
+                </a:solidFill>
+                <a:latin typeface="Arial" pitchFamily="34" charset="0"/>
+                <a:ea typeface="Arial" pitchFamily="34" charset="-122"/>
+                <a:cs typeface="Arial" pitchFamily="34" charset="-120"/>
+              </a:rPr>
+              <a:t>"Don't take that medicine; it'll make your Vāta worse" — dangerous. Never substitute </a:t>
+            </a:r>
+            <a:pPr algn="l" indent="0" marL="0">
+              <a:lnSpc>
+                <a:spcPts val="1620"/>
+              </a:lnSpc>
+              <a:spcAft>
+                <a:spcPts val="300"/>
+              </a:spcAft>
+              <a:buNone/>
+            </a:pPr>
+            <a:r>
+              <a:rPr lang="en-US" sz="1200" i="1" dirty="0">
+                <a:solidFill>
+                  <a:srgbClr val="1C2833"/>
+                </a:solidFill>
+                <a:latin typeface="Arial" pitchFamily="34" charset="0"/>
+                <a:ea typeface="Arial" pitchFamily="34" charset="-122"/>
+                <a:cs typeface="Arial" pitchFamily="34" charset="-120"/>
+              </a:rPr>
+              <a:t>doṣa</a:t>
+            </a:r>
+            <a:pPr algn="l" indent="0" marL="0">
+              <a:lnSpc>
+                <a:spcPts val="1620"/>
+              </a:lnSpc>
+              <a:spcAft>
+                <a:spcPts val="300"/>
+              </a:spcAft>
+              <a:buNone/>
+            </a:pPr>
+            <a:r>
+              <a:rPr lang="en-US" sz="1200" dirty="0">
+                <a:solidFill>
+                  <a:srgbClr val="1C2833"/>
+                </a:solidFill>
+                <a:latin typeface="Arial" pitchFamily="34" charset="0"/>
+                <a:ea typeface="Arial" pitchFamily="34" charset="-122"/>
+                <a:cs typeface="Arial" pitchFamily="34" charset="-120"/>
+              </a:rPr>
+              <a:t> advice for prescribed treatment.</a:t>
+            </a:r>
+            <a:endParaRPr lang="en-US" sz="1200" dirty="0"/>
+          </a:p>
+        </p:txBody>
+      </p:sp>
+      <p:sp>
+        <p:nvSpPr>
+          <p:cNvPr id="6" name="Text 4"/>
+          <p:cNvSpPr/>
+          <p:nvPr/>
+        </p:nvSpPr>
+        <p:spPr>
+          <a:xfrm>
+            <a:off x="406301" y="4434929"/>
+            <a:ext cx="8498026" cy="213271"/>
+          </a:xfrm>
+          <a:prstGeom prst="rect">
+            <a:avLst/>
+          </a:prstGeom>
+          <a:noFill/>
+          <a:ln/>
+        </p:spPr>
+        <p:txBody>
+          <a:bodyPr wrap="square" lIns="0" tIns="0" rIns="0" bIns="0" rtlCol="0" anchor="t"/>
+          <a:lstStyle/>
+          <a:p>
+            <a:pPr algn="l" indent="0" marL="0">
+              <a:lnSpc>
+                <a:spcPts val="1680"/>
+              </a:lnSpc>
+              <a:spcBef>
+                <a:spcPts val="300"/>
+              </a:spcBef>
+              <a:spcAft>
+                <a:spcPts val="300"/>
+              </a:spcAft>
+              <a:buNone/>
+            </a:pPr>
+            <a:r>
+              <a:rPr lang="en-US" sz="1200" dirty="0">
+                <a:solidFill>
+                  <a:srgbClr val="1C2833"/>
+                </a:solidFill>
+                <a:latin typeface="Arial" pitchFamily="34" charset="0"/>
+                <a:ea typeface="Arial" pitchFamily="34" charset="-122"/>
+                <a:cs typeface="Arial" pitchFamily="34" charset="-120"/>
+              </a:rPr>
+              <a:t>Middle ·  · IKS Curriculum</a:t>
+            </a:r>
+            <a:endParaRPr lang="en-US" sz="1200" dirty="0"/>
+          </a:p>
+        </p:txBody>
+      </p:sp>
+    </p:spTree>
+  </p:cSld>
+  <p:clrMapOvr>
+    <a:masterClrMapping/>
+  </p:clrMapOvr>
+</p:sld>
+</file>
+
+<file path=ppt/slides/slide14.xml><?xml version="1.0" encoding="utf-8"?>
+<p:sld xmlns:a="http://schemas.openxmlformats.org/drawingml/2006/main" xmlns:r="http://schemas.openxmlformats.org/officeDocument/2006/relationships" xmlns:p="http://schemas.openxmlformats.org/presentationml/2006/main">
+  <p:cSld name="Slide 14">
+    <p:bg>
+      <p:bgPr>
+        <a:solidFill>
+          <a:srgbClr val="FFFFFF"/>
+        </a:solidFill>
+      </p:bgPr>
+    </p:bg>
+    <p:spTree>
+      <p:nvGrpSpPr>
+        <p:cNvPr id="1" name=""/>
+        <p:cNvGrpSpPr/>
+        <p:nvPr/>
+      </p:nvGrpSpPr>
+      <p:grpSpPr>
+        <a:xfrm>
+          <a:off x="0" y="0"/>
+          <a:ext cx="0" cy="0"/>
+          <a:chOff x="0" y="0"/>
+          <a:chExt cx="0" cy="0"/>
+        </a:xfrm>
+      </p:grpSpPr>
+      <p:sp>
+        <p:nvSpPr>
+          <p:cNvPr id="2" name="Text 0"/>
+          <p:cNvSpPr/>
+          <p:nvPr/>
+        </p:nvSpPr>
+        <p:spPr>
+          <a:xfrm>
+            <a:off x="0" y="0"/>
+            <a:ext cx="9144000" cy="101501"/>
+          </a:xfrm>
+          <a:prstGeom prst="rect">
+            <a:avLst/>
+          </a:prstGeom>
+          <a:solidFill>
+            <a:srgbClr val="277884"/>
+          </a:solidFill>
+          <a:ln/>
+        </p:spPr>
+        <p:txBody>
+          <a:bodyPr wrap="square" rtlCol="0" anchor="ctr"/>
+          <a:lstStyle/>
+          <a:p>
+            <a:pPr indent="0" marL="0">
+              <a:buNone/>
+            </a:pPr>
+            <a:endParaRPr lang="en-US" dirty="0"/>
+          </a:p>
+        </p:txBody>
+      </p:sp>
+      <p:sp>
+        <p:nvSpPr>
+          <p:cNvPr id="3" name="Text 1"/>
+          <p:cNvSpPr/>
+          <p:nvPr/>
+        </p:nvSpPr>
+        <p:spPr>
+          <a:xfrm>
+            <a:off x="406301" y="457051"/>
+            <a:ext cx="8498026" cy="274290"/>
+          </a:xfrm>
+          <a:prstGeom prst="rect">
+            <a:avLst/>
+          </a:prstGeom>
+          <a:noFill/>
+          <a:ln/>
+        </p:spPr>
+        <p:txBody>
+          <a:bodyPr wrap="square" lIns="0" tIns="0" rIns="0" bIns="0" rtlCol="0" anchor="t"/>
+          <a:lstStyle/>
+          <a:p>
+            <a:pPr algn="l" indent="0" marL="0">
+              <a:lnSpc>
+                <a:spcPts val="2160"/>
+              </a:lnSpc>
+              <a:spcBef>
+                <a:spcPts val="600"/>
+              </a:spcBef>
+              <a:spcAft>
+                <a:spcPts val="800"/>
+              </a:spcAft>
+              <a:buNone/>
+            </a:pPr>
+            <a:r>
+              <a:rPr lang="en-US" sz="1800" b="1" dirty="0">
+                <a:solidFill>
+                  <a:srgbClr val="FE4447"/>
+                </a:solidFill>
+                <a:latin typeface="Georgia" pitchFamily="34" charset="0"/>
+                <a:ea typeface="Georgia" pitchFamily="34" charset="-122"/>
+                <a:cs typeface="Georgia" pitchFamily="34" charset="-120"/>
+              </a:rPr>
+              <a:t>Activity (15 min) — Scope debate</a:t>
             </a:r>
             <a:endParaRPr lang="en-US" sz="1800" dirty="0"/>
           </a:p>
@@ -3158,7 +4681,7 @@
                 <a:ea typeface="Arial" pitchFamily="34" charset="-122"/>
                 <a:cs typeface="Arial" pitchFamily="34" charset="-120"/>
               </a:rPr>
-              <a:t>– Aṣṭāṅga Hṛdaya, </a:t>
+              <a:t>Detailed in </a:t>
             </a:r>
             <a:pPr algn="l" indent="0" marL="0">
               <a:lnSpc>
@@ -3173,6 +4696,391 @@
               <a:buNone/>
             </a:pPr>
             <a:r>
+              <a:rPr lang="en-US" sz="1200" dirty="0">
+                <a:solidFill>
+                  <a:srgbClr val="1C2833"/>
+                </a:solidFill>
+                <a:latin typeface="Arial" pitchFamily="34" charset="0"/>
+                <a:ea typeface="Arial" pitchFamily="34" charset="-122"/>
+                <a:cs typeface="Arial" pitchFamily="34" charset="-120"/>
+              </a:rPr>
+              <a:t>activities/activity-03-scope-debate.md</a:t>
+            </a:r>
+            <a:pPr algn="l" indent="0" marL="0">
+              <a:lnSpc>
+                <a:spcPts val="1680"/>
+              </a:lnSpc>
+              <a:spcBef>
+                <a:spcPts val="300"/>
+              </a:spcBef>
+              <a:spcAft>
+                <a:spcPts val="300"/>
+              </a:spcAft>
+              <a:buNone/>
+            </a:pPr>
+            <a:r>
+              <a:rPr lang="en-US" sz="1200" dirty="0">
+                <a:solidFill>
+                  <a:srgbClr val="1C2833"/>
+                </a:solidFill>
+                <a:latin typeface="Arial" pitchFamily="34" charset="0"/>
+                <a:ea typeface="Arial" pitchFamily="34" charset="-122"/>
+                <a:cs typeface="Arial" pitchFamily="34" charset="-120"/>
+              </a:rPr>
+              <a:t>. Summary:</a:t>
+            </a:r>
+            <a:endParaRPr lang="en-US" sz="1200" dirty="0"/>
+          </a:p>
+        </p:txBody>
+      </p:sp>
+      <p:sp>
+        <p:nvSpPr>
+          <p:cNvPr id="5" name="Text 3"/>
+          <p:cNvSpPr/>
+          <p:nvPr/>
+        </p:nvSpPr>
+        <p:spPr>
+          <a:xfrm>
+            <a:off x="634901" y="1182588"/>
+            <a:ext cx="8102798" cy="1013222"/>
+          </a:xfrm>
+          <a:prstGeom prst="rect">
+            <a:avLst/>
+          </a:prstGeom>
+          <a:noFill/>
+          <a:ln/>
+        </p:spPr>
+        <p:txBody>
+          <a:bodyPr wrap="square" lIns="0" tIns="0" rIns="0" bIns="0" rtlCol="0" anchor="t"/>
+          <a:lstStyle/>
+          <a:p>
+            <a:pPr algn="l" marL="342900" indent="-342900">
+              <a:lnSpc>
+                <a:spcPts val="1620"/>
+              </a:lnSpc>
+              <a:spcAft>
+                <a:spcPts val="300"/>
+              </a:spcAft>
+              <a:buSzPct val="100000"/>
+              <a:buChar char="•"/>
+            </a:pPr>
+            <a:r>
+              <a:rPr lang="en-US" sz="1200" dirty="0">
+                <a:solidFill>
+                  <a:srgbClr val="1C2833"/>
+                </a:solidFill>
+                <a:latin typeface="Arial" pitchFamily="34" charset="0"/>
+                <a:ea typeface="Arial" pitchFamily="34" charset="-122"/>
+                <a:cs typeface="Arial" pitchFamily="34" charset="-120"/>
+              </a:rPr>
+              <a:t>Pairs receive a scenario card describing a person and symptom.</a:t>
+            </a:r>
+            <a:endParaRPr lang="en-US" sz="1200" dirty="0"/>
+          </a:p>
+          <a:p>
+            <a:pPr algn="l" marL="342900" indent="-342900">
+              <a:lnSpc>
+                <a:spcPts val="1620"/>
+              </a:lnSpc>
+              <a:spcAft>
+                <a:spcPts val="300"/>
+              </a:spcAft>
+              <a:buSzPct val="100000"/>
+              <a:buChar char="•"/>
+            </a:pPr>
+            <a:r>
+              <a:rPr lang="en-US" sz="1200" dirty="0">
+                <a:solidFill>
+                  <a:srgbClr val="1C2833"/>
+                </a:solidFill>
+                <a:latin typeface="Arial" pitchFamily="34" charset="0"/>
+                <a:ea typeface="Arial" pitchFamily="34" charset="-122"/>
+                <a:cs typeface="Arial" pitchFamily="34" charset="-120"/>
+              </a:rPr>
+              <a:t>Pair discusses: lifestyle range or medical territory? Why?</a:t>
+            </a:r>
+            <a:endParaRPr lang="en-US" sz="1200" dirty="0"/>
+          </a:p>
+          <a:p>
+            <a:pPr algn="l" marL="342900" indent="-342900">
+              <a:lnSpc>
+                <a:spcPts val="1620"/>
+              </a:lnSpc>
+              <a:spcAft>
+                <a:spcPts val="300"/>
+              </a:spcAft>
+              <a:buSzPct val="100000"/>
+              <a:buChar char="•"/>
+            </a:pPr>
+            <a:r>
+              <a:rPr lang="en-US" sz="1200" dirty="0">
+                <a:solidFill>
+                  <a:srgbClr val="1C2833"/>
+                </a:solidFill>
+                <a:latin typeface="Arial" pitchFamily="34" charset="0"/>
+                <a:ea typeface="Arial" pitchFamily="34" charset="-122"/>
+                <a:cs typeface="Arial" pitchFamily="34" charset="-120"/>
+              </a:rPr>
+              <a:t>5 scenario rounds. After each, brief class share.</a:t>
+            </a:r>
+            <a:endParaRPr lang="en-US" sz="1200" dirty="0"/>
+          </a:p>
+          <a:p>
+            <a:pPr algn="l" marL="342900" indent="-342900">
+              <a:lnSpc>
+                <a:spcPts val="1620"/>
+              </a:lnSpc>
+              <a:spcAft>
+                <a:spcPts val="300"/>
+              </a:spcAft>
+              <a:buSzPct val="100000"/>
+              <a:buChar char="•"/>
+            </a:pPr>
+            <a:r>
+              <a:rPr lang="en-US" sz="1200" dirty="0">
+                <a:solidFill>
+                  <a:srgbClr val="1C2833"/>
+                </a:solidFill>
+                <a:latin typeface="Arial" pitchFamily="34" charset="0"/>
+                <a:ea typeface="Arial" pitchFamily="34" charset="-122"/>
+                <a:cs typeface="Arial" pitchFamily="34" charset="-120"/>
+              </a:rPr>
+              <a:t>Some cards are deliberately ambiguous — the discussion is the lesson.</a:t>
+            </a:r>
+            <a:endParaRPr lang="en-US" sz="1200" dirty="0"/>
+          </a:p>
+        </p:txBody>
+      </p:sp>
+      <p:sp>
+        <p:nvSpPr>
+          <p:cNvPr id="6" name="Text 4"/>
+          <p:cNvSpPr/>
+          <p:nvPr/>
+        </p:nvSpPr>
+        <p:spPr>
+          <a:xfrm>
+            <a:off x="406301" y="4434929"/>
+            <a:ext cx="8498026" cy="213271"/>
+          </a:xfrm>
+          <a:prstGeom prst="rect">
+            <a:avLst/>
+          </a:prstGeom>
+          <a:noFill/>
+          <a:ln/>
+        </p:spPr>
+        <p:txBody>
+          <a:bodyPr wrap="square" lIns="0" tIns="0" rIns="0" bIns="0" rtlCol="0" anchor="t"/>
+          <a:lstStyle/>
+          <a:p>
+            <a:pPr algn="l" indent="0" marL="0">
+              <a:lnSpc>
+                <a:spcPts val="1680"/>
+              </a:lnSpc>
+              <a:spcBef>
+                <a:spcPts val="300"/>
+              </a:spcBef>
+              <a:spcAft>
+                <a:spcPts val="300"/>
+              </a:spcAft>
+              <a:buNone/>
+            </a:pPr>
+            <a:r>
+              <a:rPr lang="en-US" sz="1200" dirty="0">
+                <a:solidFill>
+                  <a:srgbClr val="1C2833"/>
+                </a:solidFill>
+                <a:latin typeface="Arial" pitchFamily="34" charset="0"/>
+                <a:ea typeface="Arial" pitchFamily="34" charset="-122"/>
+                <a:cs typeface="Arial" pitchFamily="34" charset="-120"/>
+              </a:rPr>
+              <a:t>Middle ·  · IKS Curriculum</a:t>
+            </a:r>
+            <a:endParaRPr lang="en-US" sz="1200" dirty="0"/>
+          </a:p>
+        </p:txBody>
+      </p:sp>
+    </p:spTree>
+  </p:cSld>
+  <p:clrMapOvr>
+    <a:masterClrMapping/>
+  </p:clrMapOvr>
+</p:sld>
+</file>
+
+<file path=ppt/slides/slide15.xml><?xml version="1.0" encoding="utf-8"?>
+<p:sld xmlns:a="http://schemas.openxmlformats.org/drawingml/2006/main" xmlns:r="http://schemas.openxmlformats.org/officeDocument/2006/relationships" xmlns:p="http://schemas.openxmlformats.org/presentationml/2006/main">
+  <p:cSld name="Slide 15">
+    <p:bg>
+      <p:bgPr>
+        <a:solidFill>
+          <a:srgbClr val="FFFFFF"/>
+        </a:solidFill>
+      </p:bgPr>
+    </p:bg>
+    <p:spTree>
+      <p:nvGrpSpPr>
+        <p:cNvPr id="1" name=""/>
+        <p:cNvGrpSpPr/>
+        <p:nvPr/>
+      </p:nvGrpSpPr>
+      <p:grpSpPr>
+        <a:xfrm>
+          <a:off x="0" y="0"/>
+          <a:ext cx="0" cy="0"/>
+          <a:chOff x="0" y="0"/>
+          <a:chExt cx="0" cy="0"/>
+        </a:xfrm>
+      </p:grpSpPr>
+      <p:sp>
+        <p:nvSpPr>
+          <p:cNvPr id="2" name="Text 0"/>
+          <p:cNvSpPr/>
+          <p:nvPr/>
+        </p:nvSpPr>
+        <p:spPr>
+          <a:xfrm>
+            <a:off x="0" y="0"/>
+            <a:ext cx="9144000" cy="101501"/>
+          </a:xfrm>
+          <a:prstGeom prst="rect">
+            <a:avLst/>
+          </a:prstGeom>
+          <a:solidFill>
+            <a:srgbClr val="277884"/>
+          </a:solidFill>
+          <a:ln/>
+        </p:spPr>
+        <p:txBody>
+          <a:bodyPr wrap="square" rtlCol="0" anchor="ctr"/>
+          <a:lstStyle/>
+          <a:p>
+            <a:pPr indent="0" marL="0">
+              <a:buNone/>
+            </a:pPr>
+            <a:endParaRPr lang="en-US" dirty="0"/>
+          </a:p>
+        </p:txBody>
+      </p:sp>
+      <p:sp>
+        <p:nvSpPr>
+          <p:cNvPr id="3" name="Text 1"/>
+          <p:cNvSpPr/>
+          <p:nvPr/>
+        </p:nvSpPr>
+        <p:spPr>
+          <a:xfrm>
+            <a:off x="406301" y="457051"/>
+            <a:ext cx="8498026" cy="274290"/>
+          </a:xfrm>
+          <a:prstGeom prst="rect">
+            <a:avLst/>
+          </a:prstGeom>
+          <a:noFill/>
+          <a:ln/>
+        </p:spPr>
+        <p:txBody>
+          <a:bodyPr wrap="square" lIns="0" tIns="0" rIns="0" bIns="0" rtlCol="0" anchor="t"/>
+          <a:lstStyle/>
+          <a:p>
+            <a:pPr algn="l" indent="0" marL="0">
+              <a:lnSpc>
+                <a:spcPts val="2160"/>
+              </a:lnSpc>
+              <a:spcBef>
+                <a:spcPts val="600"/>
+              </a:spcBef>
+              <a:spcAft>
+                <a:spcPts val="800"/>
+              </a:spcAft>
+              <a:buNone/>
+            </a:pPr>
+            <a:r>
+              <a:rPr lang="en-US" sz="1800" b="1" dirty="0">
+                <a:solidFill>
+                  <a:srgbClr val="FE4447"/>
+                </a:solidFill>
+                <a:latin typeface="Georgia" pitchFamily="34" charset="0"/>
+                <a:ea typeface="Georgia" pitchFamily="34" charset="-122"/>
+                <a:cs typeface="Georgia" pitchFamily="34" charset="-120"/>
+              </a:rPr>
+              <a:t>Wrap-up (5 min)</a:t>
+            </a:r>
+            <a:endParaRPr lang="en-US" sz="1800" dirty="0"/>
+          </a:p>
+        </p:txBody>
+      </p:sp>
+      <p:sp>
+        <p:nvSpPr>
+          <p:cNvPr id="4" name="Text 2"/>
+          <p:cNvSpPr/>
+          <p:nvPr/>
+        </p:nvSpPr>
+        <p:spPr>
+          <a:xfrm>
+            <a:off x="634901" y="883593"/>
+            <a:ext cx="8102798" cy="1386483"/>
+          </a:xfrm>
+          <a:prstGeom prst="rect">
+            <a:avLst/>
+          </a:prstGeom>
+          <a:noFill/>
+          <a:ln/>
+        </p:spPr>
+        <p:txBody>
+          <a:bodyPr wrap="square" lIns="0" tIns="0" rIns="0" bIns="0" rtlCol="0" anchor="t"/>
+          <a:lstStyle/>
+          <a:p>
+            <a:pPr algn="l" marL="342900" indent="-342900">
+              <a:lnSpc>
+                <a:spcPts val="1620"/>
+              </a:lnSpc>
+              <a:spcAft>
+                <a:spcPts val="300"/>
+              </a:spcAft>
+              <a:buSzPct val="100000"/>
+              <a:buChar char="•"/>
+            </a:pPr>
+            <a:r>
+              <a:rPr lang="en-US" sz="1200" b="1" dirty="0">
+                <a:solidFill>
+                  <a:srgbClr val="1C2833"/>
+                </a:solidFill>
+                <a:latin typeface="Arial" pitchFamily="34" charset="0"/>
+                <a:ea typeface="Arial" pitchFamily="34" charset="-122"/>
+                <a:cs typeface="Arial" pitchFamily="34" charset="-120"/>
+              </a:rPr>
+              <a:t>Exit question</a:t>
+            </a:r>
+            <a:pPr algn="l" indent="0" marL="0">
+              <a:lnSpc>
+                <a:spcPts val="1620"/>
+              </a:lnSpc>
+              <a:spcAft>
+                <a:spcPts val="300"/>
+              </a:spcAft>
+              <a:buNone/>
+            </a:pPr>
+            <a:r>
+              <a:rPr lang="en-US" sz="1200" dirty="0">
+                <a:solidFill>
+                  <a:srgbClr val="1C2833"/>
+                </a:solidFill>
+                <a:latin typeface="Arial" pitchFamily="34" charset="0"/>
+                <a:ea typeface="Arial" pitchFamily="34" charset="-122"/>
+                <a:cs typeface="Arial" pitchFamily="34" charset="-120"/>
+              </a:rPr>
+              <a:t> (whole class, no slip needed): </a:t>
+            </a:r>
+            <a:pPr algn="l" indent="0" marL="0">
+              <a:lnSpc>
+                <a:spcPts val="1620"/>
+              </a:lnSpc>
+              <a:spcAft>
+                <a:spcPts val="300"/>
+              </a:spcAft>
+              <a:buNone/>
+            </a:pPr>
+            <a:r>
               <a:rPr lang="en-US" sz="1200" i="1" dirty="0">
                 <a:solidFill>
                   <a:srgbClr val="1C2833"/>
@@ -3181,8 +5089,121 @@
                 <a:ea typeface="Arial" pitchFamily="34" charset="-122"/>
                 <a:cs typeface="Arial" pitchFamily="34" charset="-120"/>
               </a:rPr>
-              <a:t>Sūtrasthāna</a:t>
-            </a:r>
+              <a:t>"In your own words — when do you stop using doṣa language and call a doctor?"</a:t>
+            </a:r>
+            <a:endParaRPr lang="en-US" sz="1200" dirty="0"/>
+          </a:p>
+          <a:p>
+            <a:pPr algn="l" marL="342900" indent="-342900">
+              <a:lnSpc>
+                <a:spcPts val="1620"/>
+              </a:lnSpc>
+              <a:spcAft>
+                <a:spcPts val="300"/>
+              </a:spcAft>
+              <a:buSzPct val="100000"/>
+              <a:buChar char="•"/>
+            </a:pPr>
+            <a:r>
+              <a:rPr lang="en-US" sz="1200" dirty="0">
+                <a:solidFill>
+                  <a:srgbClr val="1C2833"/>
+                </a:solidFill>
+                <a:latin typeface="Arial" pitchFamily="34" charset="0"/>
+                <a:ea typeface="Arial" pitchFamily="34" charset="-122"/>
+                <a:cs typeface="Arial" pitchFamily="34" charset="-120"/>
+              </a:rPr>
+              <a:t>Take 3 student answers. The frame to aim for: </a:t>
+            </a:r>
+            <a:pPr algn="l" indent="0" marL="0">
+              <a:lnSpc>
+                <a:spcPts val="1620"/>
+              </a:lnSpc>
+              <a:spcAft>
+                <a:spcPts val="300"/>
+              </a:spcAft>
+              <a:buNone/>
+            </a:pPr>
+            <a:r>
+              <a:rPr lang="en-US" sz="1200" i="1" dirty="0">
+                <a:solidFill>
+                  <a:srgbClr val="1C2833"/>
+                </a:solidFill>
+                <a:latin typeface="Arial" pitchFamily="34" charset="0"/>
+                <a:ea typeface="Arial" pitchFamily="34" charset="-122"/>
+                <a:cs typeface="Arial" pitchFamily="34" charset="-120"/>
+              </a:rPr>
+              <a:t>"When the observation lasts longer than a week or is severe, or when someone is suffering. Doṣa language is for noticing patterns over time — not for treating something that's actually wrong."</a:t>
+            </a:r>
+            <a:endParaRPr lang="en-US" sz="1200" dirty="0"/>
+          </a:p>
+          <a:p>
+            <a:pPr algn="l" marL="342900" indent="-342900">
+              <a:lnSpc>
+                <a:spcPts val="1620"/>
+              </a:lnSpc>
+              <a:spcAft>
+                <a:spcPts val="300"/>
+              </a:spcAft>
+              <a:buSzPct val="100000"/>
+              <a:buChar char="•"/>
+            </a:pPr>
+            <a:r>
+              <a:rPr lang="en-US" sz="1200" dirty="0">
+                <a:solidFill>
+                  <a:srgbClr val="1C2833"/>
+                </a:solidFill>
+                <a:latin typeface="Arial" pitchFamily="34" charset="0"/>
+                <a:ea typeface="Arial" pitchFamily="34" charset="-122"/>
+                <a:cs typeface="Arial" pitchFamily="34" charset="-120"/>
+              </a:rPr>
+              <a:t>Preview Day 8: </a:t>
+            </a:r>
+            <a:pPr algn="l" indent="0" marL="0">
+              <a:lnSpc>
+                <a:spcPts val="1620"/>
+              </a:lnSpc>
+              <a:spcAft>
+                <a:spcPts val="300"/>
+              </a:spcAft>
+              <a:buNone/>
+            </a:pPr>
+            <a:r>
+              <a:rPr lang="en-US" sz="1200" i="1" dirty="0">
+                <a:solidFill>
+                  <a:srgbClr val="1C2833"/>
+                </a:solidFill>
+                <a:latin typeface="Arial" pitchFamily="34" charset="0"/>
+                <a:ea typeface="Arial" pitchFamily="34" charset="-122"/>
+                <a:cs typeface="Arial" pitchFamily="34" charset="-120"/>
+              </a:rPr>
+              <a:t>"Tomorrow — you start designing your own 5-day doṣa-aware week."</a:t>
+            </a:r>
+            <a:endParaRPr lang="en-US" sz="1200" dirty="0"/>
+          </a:p>
+        </p:txBody>
+      </p:sp>
+      <p:sp>
+        <p:nvSpPr>
+          <p:cNvPr id="5" name="Text 3"/>
+          <p:cNvSpPr/>
+          <p:nvPr/>
+        </p:nvSpPr>
+        <p:spPr>
+          <a:xfrm>
+            <a:off x="406301" y="4434929"/>
+            <a:ext cx="8498026" cy="213271"/>
+          </a:xfrm>
+          <a:prstGeom prst="rect">
+            <a:avLst/>
+          </a:prstGeom>
+          <a:noFill/>
+          <a:ln/>
+        </p:spPr>
+        <p:txBody>
+          <a:bodyPr wrap="square" lIns="0" tIns="0" rIns="0" bIns="0" rtlCol="0" anchor="t"/>
+          <a:lstStyle/>
+          <a:p>
             <a:pPr algn="l" indent="0" marL="0">
               <a:lnSpc>
                 <a:spcPts val="1680"/>
@@ -3204,8 +5225,768 @@
                 <a:ea typeface="Arial" pitchFamily="34" charset="-122"/>
                 <a:cs typeface="Arial" pitchFamily="34" charset="-120"/>
               </a:rPr>
-              <a:t> 1.8 (paraphrase). See </a:t>
-            </a:r>
+              <a:t>Middle ·  · IKS Curriculum</a:t>
+            </a:r>
+            <a:endParaRPr lang="en-US" sz="1200" dirty="0"/>
+          </a:p>
+        </p:txBody>
+      </p:sp>
+    </p:spTree>
+  </p:cSld>
+  <p:clrMapOvr>
+    <a:masterClrMapping/>
+  </p:clrMapOvr>
+</p:sld>
+</file>
+
+<file path=ppt/slides/slide16.xml><?xml version="1.0" encoding="utf-8"?>
+<p:sld xmlns:a="http://schemas.openxmlformats.org/drawingml/2006/main" xmlns:r="http://schemas.openxmlformats.org/officeDocument/2006/relationships" xmlns:p="http://schemas.openxmlformats.org/presentationml/2006/main">
+  <p:cSld name="Slide 16">
+    <p:bg>
+      <p:bgPr>
+        <a:solidFill>
+          <a:srgbClr val="FFFFFF"/>
+        </a:solidFill>
+      </p:bgPr>
+    </p:bg>
+    <p:spTree>
+      <p:nvGrpSpPr>
+        <p:cNvPr id="1" name=""/>
+        <p:cNvGrpSpPr/>
+        <p:nvPr/>
+      </p:nvGrpSpPr>
+      <p:grpSpPr>
+        <a:xfrm>
+          <a:off x="0" y="0"/>
+          <a:ext cx="0" cy="0"/>
+          <a:chOff x="0" y="0"/>
+          <a:chExt cx="0" cy="0"/>
+        </a:xfrm>
+      </p:grpSpPr>
+      <p:sp>
+        <p:nvSpPr>
+          <p:cNvPr id="2" name="Text 0"/>
+          <p:cNvSpPr/>
+          <p:nvPr/>
+        </p:nvSpPr>
+        <p:spPr>
+          <a:xfrm>
+            <a:off x="0" y="0"/>
+            <a:ext cx="9144000" cy="101501"/>
+          </a:xfrm>
+          <a:prstGeom prst="rect">
+            <a:avLst/>
+          </a:prstGeom>
+          <a:solidFill>
+            <a:srgbClr val="277884"/>
+          </a:solidFill>
+          <a:ln/>
+        </p:spPr>
+        <p:txBody>
+          <a:bodyPr wrap="square" rtlCol="0" anchor="ctr"/>
+          <a:lstStyle/>
+          <a:p>
+            <a:pPr indent="0" marL="0">
+              <a:buNone/>
+            </a:pPr>
+            <a:endParaRPr lang="en-US" dirty="0"/>
+          </a:p>
+        </p:txBody>
+      </p:sp>
+      <p:sp>
+        <p:nvSpPr>
+          <p:cNvPr id="3" name="Text 1"/>
+          <p:cNvSpPr/>
+          <p:nvPr/>
+        </p:nvSpPr>
+        <p:spPr>
+          <a:xfrm>
+            <a:off x="406301" y="457051"/>
+            <a:ext cx="8498026" cy="274290"/>
+          </a:xfrm>
+          <a:prstGeom prst="rect">
+            <a:avLst/>
+          </a:prstGeom>
+          <a:noFill/>
+          <a:ln/>
+        </p:spPr>
+        <p:txBody>
+          <a:bodyPr wrap="square" lIns="0" tIns="0" rIns="0" bIns="0" rtlCol="0" anchor="t"/>
+          <a:lstStyle/>
+          <a:p>
+            <a:pPr algn="l" indent="0" marL="0">
+              <a:lnSpc>
+                <a:spcPts val="2160"/>
+              </a:lnSpc>
+              <a:spcBef>
+                <a:spcPts val="600"/>
+              </a:spcBef>
+              <a:spcAft>
+                <a:spcPts val="800"/>
+              </a:spcAft>
+              <a:buNone/>
+            </a:pPr>
+            <a:r>
+              <a:rPr lang="en-US" sz="1800" b="1" dirty="0">
+                <a:solidFill>
+                  <a:srgbClr val="FE4447"/>
+                </a:solidFill>
+                <a:latin typeface="Georgia" pitchFamily="34" charset="0"/>
+                <a:ea typeface="Georgia" pitchFamily="34" charset="-122"/>
+                <a:cs typeface="Georgia" pitchFamily="34" charset="-120"/>
+              </a:rPr>
+              <a:t>Student-facing content</a:t>
+            </a:r>
+            <a:endParaRPr lang="en-US" sz="1800" dirty="0"/>
+          </a:p>
+        </p:txBody>
+      </p:sp>
+      <p:sp>
+        <p:nvSpPr>
+          <p:cNvPr id="4" name="Text 2"/>
+          <p:cNvSpPr/>
+          <p:nvPr/>
+        </p:nvSpPr>
+        <p:spPr>
+          <a:xfrm>
+            <a:off x="406301" y="883593"/>
+            <a:ext cx="8331398" cy="3033713"/>
+          </a:xfrm>
+          <a:prstGeom prst="rect">
+            <a:avLst/>
+          </a:prstGeom>
+          <a:solidFill>
+            <a:srgbClr val="F4F8F9"/>
+          </a:solidFill>
+          <a:ln/>
+        </p:spPr>
+        <p:txBody>
+          <a:bodyPr wrap="square" rtlCol="0" anchor="ctr"/>
+          <a:lstStyle/>
+          <a:p>
+            <a:pPr indent="0" marL="0">
+              <a:buNone/>
+            </a:pPr>
+            <a:endParaRPr lang="en-US" dirty="0"/>
+          </a:p>
+        </p:txBody>
+      </p:sp>
+      <p:sp>
+        <p:nvSpPr>
+          <p:cNvPr id="5" name="Shape 3"/>
+          <p:cNvSpPr/>
+          <p:nvPr/>
+        </p:nvSpPr>
+        <p:spPr>
+          <a:xfrm>
+            <a:off x="434876" y="883593"/>
+            <a:ext cx="0" cy="3033713"/>
+          </a:xfrm>
+          <a:prstGeom prst="line">
+            <a:avLst/>
+          </a:prstGeom>
+          <a:noFill/>
+          <a:ln w="57150">
+            <a:solidFill>
+              <a:srgbClr val="FE4447"/>
+            </a:solidFill>
+            <a:prstDash val="solid"/>
+          </a:ln>
+        </p:spPr>
+      </p:sp>
+      <p:sp>
+        <p:nvSpPr>
+          <p:cNvPr id="6" name="Text 4"/>
+          <p:cNvSpPr/>
+          <p:nvPr/>
+        </p:nvSpPr>
+        <p:spPr>
+          <a:xfrm>
+            <a:off x="692051" y="1074093"/>
+            <a:ext cx="7973389" cy="230981"/>
+          </a:xfrm>
+          <a:prstGeom prst="rect">
+            <a:avLst/>
+          </a:prstGeom>
+          <a:noFill/>
+          <a:ln/>
+        </p:spPr>
+        <p:txBody>
+          <a:bodyPr wrap="square" lIns="0" tIns="0" rIns="0" bIns="0" rtlCol="0" anchor="t"/>
+          <a:lstStyle/>
+          <a:p>
+            <a:pPr algn="l" indent="0" marL="0">
+              <a:lnSpc>
+                <a:spcPts val="1820"/>
+              </a:lnSpc>
+              <a:spcBef>
+                <a:spcPts val="300"/>
+              </a:spcBef>
+              <a:spcAft>
+                <a:spcPts val="300"/>
+              </a:spcAft>
+              <a:buNone/>
+            </a:pPr>
+            <a:r>
+              <a:rPr lang="en-US" sz="1300" b="1" i="1" dirty="0">
+                <a:solidFill>
+                  <a:srgbClr val="1C2833"/>
+                </a:solidFill>
+                <a:latin typeface="Georgia" pitchFamily="34" charset="0"/>
+                <a:ea typeface="Georgia" pitchFamily="34" charset="-122"/>
+                <a:cs typeface="Georgia" pitchFamily="34" charset="-120"/>
+              </a:rPr>
+              <a:t>The safety rule, in one sentence:</a:t>
+            </a:r>
+            <a:endParaRPr lang="en-US" sz="1300" dirty="0"/>
+          </a:p>
+        </p:txBody>
+      </p:sp>
+      <p:sp>
+        <p:nvSpPr>
+          <p:cNvPr id="7" name="Text 5"/>
+          <p:cNvSpPr/>
+          <p:nvPr/>
+        </p:nvSpPr>
+        <p:spPr>
+          <a:xfrm>
+            <a:off x="692051" y="1343174"/>
+            <a:ext cx="7973389" cy="230981"/>
+          </a:xfrm>
+          <a:prstGeom prst="rect">
+            <a:avLst/>
+          </a:prstGeom>
+          <a:noFill/>
+          <a:ln/>
+        </p:spPr>
+        <p:txBody>
+          <a:bodyPr wrap="square" lIns="0" tIns="0" rIns="0" bIns="0" rtlCol="0" anchor="t"/>
+          <a:lstStyle/>
+          <a:p>
+            <a:pPr algn="l" indent="0" marL="0">
+              <a:lnSpc>
+                <a:spcPts val="1820"/>
+              </a:lnSpc>
+              <a:spcBef>
+                <a:spcPts val="300"/>
+              </a:spcBef>
+              <a:spcAft>
+                <a:spcPts val="300"/>
+              </a:spcAft>
+              <a:buNone/>
+            </a:pPr>
+            <a:r>
+              <a:rPr lang="en-US" sz="1300" dirty="0">
+                <a:solidFill>
+                  <a:srgbClr val="1C2833"/>
+                </a:solidFill>
+                <a:latin typeface="Georgia" pitchFamily="34" charset="0"/>
+                <a:ea typeface="Georgia" pitchFamily="34" charset="-122"/>
+                <a:cs typeface="Georgia" pitchFamily="34" charset="-120"/>
+              </a:rPr>
+              <a:t>&gt; Doṣa language is for </a:t>
+            </a:r>
+            <a:pPr algn="l" indent="0" marL="0">
+              <a:lnSpc>
+                <a:spcPts val="1820"/>
+              </a:lnSpc>
+              <a:spcBef>
+                <a:spcPts val="300"/>
+              </a:spcBef>
+              <a:spcAft>
+                <a:spcPts val="300"/>
+              </a:spcAft>
+              <a:buNone/>
+            </a:pPr>
+            <a:r>
+              <a:rPr lang="en-US" sz="1300" i="1" dirty="0">
+                <a:solidFill>
+                  <a:srgbClr val="1C2833"/>
+                </a:solidFill>
+                <a:latin typeface="Georgia" pitchFamily="34" charset="0"/>
+                <a:ea typeface="Georgia" pitchFamily="34" charset="-122"/>
+                <a:cs typeface="Georgia" pitchFamily="34" charset="-120"/>
+              </a:rPr>
+              <a:t>noticing patterns</a:t>
+            </a:r>
+            <a:pPr algn="l" indent="0" marL="0">
+              <a:lnSpc>
+                <a:spcPts val="1820"/>
+              </a:lnSpc>
+              <a:spcBef>
+                <a:spcPts val="300"/>
+              </a:spcBef>
+              <a:spcAft>
+                <a:spcPts val="300"/>
+              </a:spcAft>
+              <a:buNone/>
+            </a:pPr>
+            <a:r>
+              <a:rPr lang="en-US" sz="1300" dirty="0">
+                <a:solidFill>
+                  <a:srgbClr val="1C2833"/>
+                </a:solidFill>
+                <a:latin typeface="Georgia" pitchFamily="34" charset="0"/>
+                <a:ea typeface="Georgia" pitchFamily="34" charset="-122"/>
+                <a:cs typeface="Georgia" pitchFamily="34" charset="-120"/>
+              </a:rPr>
+              <a:t> — not for </a:t>
+            </a:r>
+            <a:pPr algn="l" indent="0" marL="0">
+              <a:lnSpc>
+                <a:spcPts val="1820"/>
+              </a:lnSpc>
+              <a:spcBef>
+                <a:spcPts val="300"/>
+              </a:spcBef>
+              <a:spcAft>
+                <a:spcPts val="300"/>
+              </a:spcAft>
+              <a:buNone/>
+            </a:pPr>
+            <a:r>
+              <a:rPr lang="en-US" sz="1300" i="1" dirty="0">
+                <a:solidFill>
+                  <a:srgbClr val="1C2833"/>
+                </a:solidFill>
+                <a:latin typeface="Georgia" pitchFamily="34" charset="0"/>
+                <a:ea typeface="Georgia" pitchFamily="34" charset="-122"/>
+                <a:cs typeface="Georgia" pitchFamily="34" charset="-120"/>
+              </a:rPr>
+              <a:t>treating illness</a:t>
+            </a:r>
+            <a:pPr algn="l" indent="0" marL="0">
+              <a:lnSpc>
+                <a:spcPts val="1820"/>
+              </a:lnSpc>
+              <a:spcBef>
+                <a:spcPts val="300"/>
+              </a:spcBef>
+              <a:spcAft>
+                <a:spcPts val="300"/>
+              </a:spcAft>
+              <a:buNone/>
+            </a:pPr>
+            <a:r>
+              <a:rPr lang="en-US" sz="1300" dirty="0">
+                <a:solidFill>
+                  <a:srgbClr val="1C2833"/>
+                </a:solidFill>
+                <a:latin typeface="Georgia" pitchFamily="34" charset="0"/>
+                <a:ea typeface="Georgia" pitchFamily="34" charset="-122"/>
+                <a:cs typeface="Georgia" pitchFamily="34" charset="-120"/>
+              </a:rPr>
+              <a:t>.</a:t>
+            </a:r>
+            <a:endParaRPr lang="en-US" sz="1300" dirty="0"/>
+          </a:p>
+        </p:txBody>
+      </p:sp>
+      <p:sp>
+        <p:nvSpPr>
+          <p:cNvPr id="8" name="Text 6"/>
+          <p:cNvSpPr/>
+          <p:nvPr/>
+        </p:nvSpPr>
+        <p:spPr>
+          <a:xfrm>
+            <a:off x="692051" y="1612255"/>
+            <a:ext cx="7973389" cy="230981"/>
+          </a:xfrm>
+          <a:prstGeom prst="rect">
+            <a:avLst/>
+          </a:prstGeom>
+          <a:noFill/>
+          <a:ln/>
+        </p:spPr>
+        <p:txBody>
+          <a:bodyPr wrap="square" lIns="0" tIns="0" rIns="0" bIns="0" rtlCol="0" anchor="t"/>
+          <a:lstStyle/>
+          <a:p>
+            <a:pPr algn="l" indent="0" marL="0">
+              <a:lnSpc>
+                <a:spcPts val="1820"/>
+              </a:lnSpc>
+              <a:spcBef>
+                <a:spcPts val="300"/>
+              </a:spcBef>
+              <a:spcAft>
+                <a:spcPts val="300"/>
+              </a:spcAft>
+              <a:buNone/>
+            </a:pPr>
+            <a:r>
+              <a:rPr lang="en-US" sz="1300" b="1" i="1" dirty="0">
+                <a:solidFill>
+                  <a:srgbClr val="1C2833"/>
+                </a:solidFill>
+                <a:latin typeface="Georgia" pitchFamily="34" charset="0"/>
+                <a:ea typeface="Georgia" pitchFamily="34" charset="-122"/>
+                <a:cs typeface="Georgia" pitchFamily="34" charset="-120"/>
+              </a:rPr>
+              <a:t>When to use the framework:</a:t>
+            </a:r>
+            <a:endParaRPr lang="en-US" sz="1300" dirty="0"/>
+          </a:p>
+        </p:txBody>
+      </p:sp>
+      <p:sp>
+        <p:nvSpPr>
+          <p:cNvPr id="9" name="Text 7"/>
+          <p:cNvSpPr/>
+          <p:nvPr/>
+        </p:nvSpPr>
+        <p:spPr>
+          <a:xfrm>
+            <a:off x="692051" y="1881336"/>
+            <a:ext cx="7973389" cy="230981"/>
+          </a:xfrm>
+          <a:prstGeom prst="rect">
+            <a:avLst/>
+          </a:prstGeom>
+          <a:noFill/>
+          <a:ln/>
+        </p:spPr>
+        <p:txBody>
+          <a:bodyPr wrap="square" lIns="0" tIns="0" rIns="0" bIns="0" rtlCol="0" anchor="t"/>
+          <a:lstStyle/>
+          <a:p>
+            <a:pPr algn="l" indent="0" marL="0">
+              <a:lnSpc>
+                <a:spcPts val="1820"/>
+              </a:lnSpc>
+              <a:spcBef>
+                <a:spcPts val="300"/>
+              </a:spcBef>
+              <a:spcAft>
+                <a:spcPts val="300"/>
+              </a:spcAft>
+              <a:buNone/>
+            </a:pPr>
+            <a:r>
+              <a:rPr lang="en-US" sz="1300" i="1" dirty="0">
+                <a:solidFill>
+                  <a:srgbClr val="1C2833"/>
+                </a:solidFill>
+                <a:latin typeface="Georgia" pitchFamily="34" charset="0"/>
+                <a:ea typeface="Georgia" pitchFamily="34" charset="-122"/>
+                <a:cs typeface="Georgia" pitchFamily="34" charset="-120"/>
+              </a:rPr>
+              <a:t>Mild, brief, lifestyle-level: bit of dry skin, slow morning, late-night restlessness once.</a:t>
+            </a:r>
+            <a:endParaRPr lang="en-US" sz="1300" dirty="0"/>
+          </a:p>
+        </p:txBody>
+      </p:sp>
+      <p:sp>
+        <p:nvSpPr>
+          <p:cNvPr id="10" name="Text 8"/>
+          <p:cNvSpPr/>
+          <p:nvPr/>
+        </p:nvSpPr>
+        <p:spPr>
+          <a:xfrm>
+            <a:off x="692051" y="2150418"/>
+            <a:ext cx="7973389" cy="230981"/>
+          </a:xfrm>
+          <a:prstGeom prst="rect">
+            <a:avLst/>
+          </a:prstGeom>
+          <a:noFill/>
+          <a:ln/>
+        </p:spPr>
+        <p:txBody>
+          <a:bodyPr wrap="square" lIns="0" tIns="0" rIns="0" bIns="0" rtlCol="0" anchor="t"/>
+          <a:lstStyle/>
+          <a:p>
+            <a:pPr algn="l" indent="0" marL="0">
+              <a:lnSpc>
+                <a:spcPts val="1820"/>
+              </a:lnSpc>
+              <a:spcBef>
+                <a:spcPts val="300"/>
+              </a:spcBef>
+              <a:spcAft>
+                <a:spcPts val="300"/>
+              </a:spcAft>
+              <a:buNone/>
+            </a:pPr>
+            <a:r>
+              <a:rPr lang="en-US" sz="1300" i="1" dirty="0">
+                <a:solidFill>
+                  <a:srgbClr val="1C2833"/>
+                </a:solidFill>
+                <a:latin typeface="Georgia" pitchFamily="34" charset="0"/>
+                <a:ea typeface="Georgia" pitchFamily="34" charset="-122"/>
+                <a:cs typeface="Georgia" pitchFamily="34" charset="-120"/>
+              </a:rPr>
+              <a:t>You want to notice your patterns over weeks and months.</a:t>
+            </a:r>
+            <a:endParaRPr lang="en-US" sz="1300" dirty="0"/>
+          </a:p>
+        </p:txBody>
+      </p:sp>
+      <p:sp>
+        <p:nvSpPr>
+          <p:cNvPr id="11" name="Text 9"/>
+          <p:cNvSpPr/>
+          <p:nvPr/>
+        </p:nvSpPr>
+        <p:spPr>
+          <a:xfrm>
+            <a:off x="692051" y="2419499"/>
+            <a:ext cx="7973389" cy="230981"/>
+          </a:xfrm>
+          <a:prstGeom prst="rect">
+            <a:avLst/>
+          </a:prstGeom>
+          <a:noFill/>
+          <a:ln/>
+        </p:spPr>
+        <p:txBody>
+          <a:bodyPr wrap="square" lIns="0" tIns="0" rIns="0" bIns="0" rtlCol="0" anchor="t"/>
+          <a:lstStyle/>
+          <a:p>
+            <a:pPr algn="l" indent="0" marL="0">
+              <a:lnSpc>
+                <a:spcPts val="1820"/>
+              </a:lnSpc>
+              <a:spcBef>
+                <a:spcPts val="300"/>
+              </a:spcBef>
+              <a:spcAft>
+                <a:spcPts val="300"/>
+              </a:spcAft>
+              <a:buNone/>
+            </a:pPr>
+            <a:r>
+              <a:rPr lang="en-US" sz="1300" b="1" i="1" dirty="0">
+                <a:solidFill>
+                  <a:srgbClr val="1C2833"/>
+                </a:solidFill>
+                <a:latin typeface="Georgia" pitchFamily="34" charset="0"/>
+                <a:ea typeface="Georgia" pitchFamily="34" charset="-122"/>
+                <a:cs typeface="Georgia" pitchFamily="34" charset="-120"/>
+              </a:rPr>
+              <a:t>When to STOP and see a doctor:</a:t>
+            </a:r>
+            <a:endParaRPr lang="en-US" sz="1300" dirty="0"/>
+          </a:p>
+        </p:txBody>
+      </p:sp>
+      <p:sp>
+        <p:nvSpPr>
+          <p:cNvPr id="12" name="Text 10"/>
+          <p:cNvSpPr/>
+          <p:nvPr/>
+        </p:nvSpPr>
+        <p:spPr>
+          <a:xfrm>
+            <a:off x="692051" y="2688580"/>
+            <a:ext cx="7973389" cy="230981"/>
+          </a:xfrm>
+          <a:prstGeom prst="rect">
+            <a:avLst/>
+          </a:prstGeom>
+          <a:noFill/>
+          <a:ln/>
+        </p:spPr>
+        <p:txBody>
+          <a:bodyPr wrap="square" lIns="0" tIns="0" rIns="0" bIns="0" rtlCol="0" anchor="t"/>
+          <a:lstStyle/>
+          <a:p>
+            <a:pPr algn="l" indent="0" marL="0">
+              <a:lnSpc>
+                <a:spcPts val="1820"/>
+              </a:lnSpc>
+              <a:spcBef>
+                <a:spcPts val="300"/>
+              </a:spcBef>
+              <a:spcAft>
+                <a:spcPts val="300"/>
+              </a:spcAft>
+              <a:buNone/>
+            </a:pPr>
+            <a:r>
+              <a:rPr lang="en-US" sz="1300" i="1" dirty="0">
+                <a:solidFill>
+                  <a:srgbClr val="1C2833"/>
+                </a:solidFill>
+                <a:latin typeface="Georgia" pitchFamily="34" charset="0"/>
+                <a:ea typeface="Georgia" pitchFamily="34" charset="-122"/>
+                <a:cs typeface="Georgia" pitchFamily="34" charset="-120"/>
+              </a:rPr>
+              <a:t>Severe, persistent, or worsening symptoms.</a:t>
+            </a:r>
+            <a:endParaRPr lang="en-US" sz="1300" dirty="0"/>
+          </a:p>
+        </p:txBody>
+      </p:sp>
+      <p:sp>
+        <p:nvSpPr>
+          <p:cNvPr id="13" name="Text 11"/>
+          <p:cNvSpPr/>
+          <p:nvPr/>
+        </p:nvSpPr>
+        <p:spPr>
+          <a:xfrm>
+            <a:off x="692051" y="2957661"/>
+            <a:ext cx="7973389" cy="230981"/>
+          </a:xfrm>
+          <a:prstGeom prst="rect">
+            <a:avLst/>
+          </a:prstGeom>
+          <a:noFill/>
+          <a:ln/>
+        </p:spPr>
+        <p:txBody>
+          <a:bodyPr wrap="square" lIns="0" tIns="0" rIns="0" bIns="0" rtlCol="0" anchor="t"/>
+          <a:lstStyle/>
+          <a:p>
+            <a:pPr algn="l" indent="0" marL="0">
+              <a:lnSpc>
+                <a:spcPts val="1820"/>
+              </a:lnSpc>
+              <a:spcBef>
+                <a:spcPts val="300"/>
+              </a:spcBef>
+              <a:spcAft>
+                <a:spcPts val="300"/>
+              </a:spcAft>
+              <a:buNone/>
+            </a:pPr>
+            <a:r>
+              <a:rPr lang="en-US" sz="1300" i="1" dirty="0">
+                <a:solidFill>
+                  <a:srgbClr val="1C2833"/>
+                </a:solidFill>
+                <a:latin typeface="Georgia" pitchFamily="34" charset="0"/>
+                <a:ea typeface="Georgia" pitchFamily="34" charset="-122"/>
+                <a:cs typeface="Georgia" pitchFamily="34" charset="-120"/>
+              </a:rPr>
+              <a:t>Any symptom lasting &gt; 1–2 weeks.</a:t>
+            </a:r>
+            <a:endParaRPr lang="en-US" sz="1300" dirty="0"/>
+          </a:p>
+        </p:txBody>
+      </p:sp>
+      <p:sp>
+        <p:nvSpPr>
+          <p:cNvPr id="14" name="Text 12"/>
+          <p:cNvSpPr/>
+          <p:nvPr/>
+        </p:nvSpPr>
+        <p:spPr>
+          <a:xfrm>
+            <a:off x="692051" y="3226743"/>
+            <a:ext cx="7973389" cy="230981"/>
+          </a:xfrm>
+          <a:prstGeom prst="rect">
+            <a:avLst/>
+          </a:prstGeom>
+          <a:noFill/>
+          <a:ln/>
+        </p:spPr>
+        <p:txBody>
+          <a:bodyPr wrap="square" lIns="0" tIns="0" rIns="0" bIns="0" rtlCol="0" anchor="t"/>
+          <a:lstStyle/>
+          <a:p>
+            <a:pPr algn="l" indent="0" marL="0">
+              <a:lnSpc>
+                <a:spcPts val="1820"/>
+              </a:lnSpc>
+              <a:spcBef>
+                <a:spcPts val="300"/>
+              </a:spcBef>
+              <a:spcAft>
+                <a:spcPts val="300"/>
+              </a:spcAft>
+              <a:buNone/>
+            </a:pPr>
+            <a:r>
+              <a:rPr lang="en-US" sz="1300" i="1" dirty="0">
+                <a:solidFill>
+                  <a:srgbClr val="1C2833"/>
+                </a:solidFill>
+                <a:latin typeface="Georgia" pitchFamily="34" charset="0"/>
+                <a:ea typeface="Georgia" pitchFamily="34" charset="-122"/>
+                <a:cs typeface="Georgia" pitchFamily="34" charset="-120"/>
+              </a:rPr>
+              <a:t>Anything that interferes with school, sleep, eating, or basic mood.</a:t>
+            </a:r>
+            <a:endParaRPr lang="en-US" sz="1300" dirty="0"/>
+          </a:p>
+        </p:txBody>
+      </p:sp>
+      <p:sp>
+        <p:nvSpPr>
+          <p:cNvPr id="15" name="Text 13"/>
+          <p:cNvSpPr/>
+          <p:nvPr/>
+        </p:nvSpPr>
+        <p:spPr>
+          <a:xfrm>
+            <a:off x="692051" y="3495824"/>
+            <a:ext cx="7973389" cy="230981"/>
+          </a:xfrm>
+          <a:prstGeom prst="rect">
+            <a:avLst/>
+          </a:prstGeom>
+          <a:noFill/>
+          <a:ln/>
+        </p:spPr>
+        <p:txBody>
+          <a:bodyPr wrap="square" lIns="0" tIns="0" rIns="0" bIns="0" rtlCol="0" anchor="t"/>
+          <a:lstStyle/>
+          <a:p>
+            <a:pPr algn="l" indent="0" marL="0">
+              <a:lnSpc>
+                <a:spcPts val="1820"/>
+              </a:lnSpc>
+              <a:spcBef>
+                <a:spcPts val="300"/>
+              </a:spcBef>
+              <a:spcAft>
+                <a:spcPts val="300"/>
+              </a:spcAft>
+              <a:buNone/>
+            </a:pPr>
+            <a:r>
+              <a:rPr lang="en-US" sz="1300" i="1" dirty="0">
+                <a:solidFill>
+                  <a:srgbClr val="1C2833"/>
+                </a:solidFill>
+                <a:latin typeface="Georgia" pitchFamily="34" charset="0"/>
+                <a:ea typeface="Georgia" pitchFamily="34" charset="-122"/>
+                <a:cs typeface="Georgia" pitchFamily="34" charset="-120"/>
+              </a:rPr>
+              <a:t>Blood, fever, sustained pain, fainting — immediately.</a:t>
+            </a:r>
+            <a:endParaRPr lang="en-US" sz="1300" dirty="0"/>
+          </a:p>
+        </p:txBody>
+      </p:sp>
+      <p:sp>
+        <p:nvSpPr>
+          <p:cNvPr id="16" name="Text 14"/>
+          <p:cNvSpPr/>
+          <p:nvPr/>
+        </p:nvSpPr>
+        <p:spPr>
+          <a:xfrm>
+            <a:off x="406301" y="4434929"/>
+            <a:ext cx="8498026" cy="213271"/>
+          </a:xfrm>
+          <a:prstGeom prst="rect">
+            <a:avLst/>
+          </a:prstGeom>
+          <a:noFill/>
+          <a:ln/>
+        </p:spPr>
+        <p:txBody>
+          <a:bodyPr wrap="square" lIns="0" tIns="0" rIns="0" bIns="0" rtlCol="0" anchor="t"/>
+          <a:lstStyle/>
+          <a:p>
             <a:pPr algn="l" indent="0" marL="0">
               <a:lnSpc>
                 <a:spcPts val="1680"/>
@@ -3227,8 +6008,189 @@
                 <a:ea typeface="Arial" pitchFamily="34" charset="-122"/>
                 <a:cs typeface="Arial" pitchFamily="34" charset="-120"/>
               </a:rPr>
-              <a:t>sources.md</a:t>
-            </a:r>
+              <a:t>Middle ·  · IKS Curriculum</a:t>
+            </a:r>
+            <a:endParaRPr lang="en-US" sz="1200" dirty="0"/>
+          </a:p>
+        </p:txBody>
+      </p:sp>
+    </p:spTree>
+  </p:cSld>
+  <p:clrMapOvr>
+    <a:masterClrMapping/>
+  </p:clrMapOvr>
+</p:sld>
+</file>
+
+<file path=ppt/slides/slide17.xml><?xml version="1.0" encoding="utf-8"?>
+<p:sld xmlns:a="http://schemas.openxmlformats.org/drawingml/2006/main" xmlns:r="http://schemas.openxmlformats.org/officeDocument/2006/relationships" xmlns:p="http://schemas.openxmlformats.org/presentationml/2006/main">
+  <p:cSld name="Slide 17">
+    <p:bg>
+      <p:bgPr>
+        <a:solidFill>
+          <a:srgbClr val="FFFFFF"/>
+        </a:solidFill>
+      </p:bgPr>
+    </p:bg>
+    <p:spTree>
+      <p:nvGrpSpPr>
+        <p:cNvPr id="1" name=""/>
+        <p:cNvGrpSpPr/>
+        <p:nvPr/>
+      </p:nvGrpSpPr>
+      <p:grpSpPr>
+        <a:xfrm>
+          <a:off x="0" y="0"/>
+          <a:ext cx="0" cy="0"/>
+          <a:chOff x="0" y="0"/>
+          <a:chExt cx="0" cy="0"/>
+        </a:xfrm>
+      </p:grpSpPr>
+      <p:sp>
+        <p:nvSpPr>
+          <p:cNvPr id="2" name="Text 0"/>
+          <p:cNvSpPr/>
+          <p:nvPr/>
+        </p:nvSpPr>
+        <p:spPr>
+          <a:xfrm>
+            <a:off x="0" y="0"/>
+            <a:ext cx="9144000" cy="101501"/>
+          </a:xfrm>
+          <a:prstGeom prst="rect">
+            <a:avLst/>
+          </a:prstGeom>
+          <a:solidFill>
+            <a:srgbClr val="277884"/>
+          </a:solidFill>
+          <a:ln/>
+        </p:spPr>
+        <p:txBody>
+          <a:bodyPr wrap="square" rtlCol="0" anchor="ctr"/>
+          <a:lstStyle/>
+          <a:p>
+            <a:pPr indent="0" marL="0">
+              <a:buNone/>
+            </a:pPr>
+            <a:endParaRPr lang="en-US" dirty="0"/>
+          </a:p>
+        </p:txBody>
+      </p:sp>
+      <p:sp>
+        <p:nvSpPr>
+          <p:cNvPr id="3" name="Text 1"/>
+          <p:cNvSpPr/>
+          <p:nvPr/>
+        </p:nvSpPr>
+        <p:spPr>
+          <a:xfrm>
+            <a:off x="406301" y="457051"/>
+            <a:ext cx="8498026" cy="274290"/>
+          </a:xfrm>
+          <a:prstGeom prst="rect">
+            <a:avLst/>
+          </a:prstGeom>
+          <a:noFill/>
+          <a:ln/>
+        </p:spPr>
+        <p:txBody>
+          <a:bodyPr wrap="square" lIns="0" tIns="0" rIns="0" bIns="0" rtlCol="0" anchor="t"/>
+          <a:lstStyle/>
+          <a:p>
+            <a:pPr algn="l" indent="0" marL="0">
+              <a:lnSpc>
+                <a:spcPts val="2160"/>
+              </a:lnSpc>
+              <a:spcBef>
+                <a:spcPts val="600"/>
+              </a:spcBef>
+              <a:spcAft>
+                <a:spcPts val="800"/>
+              </a:spcAft>
+              <a:buNone/>
+            </a:pPr>
+            <a:r>
+              <a:rPr lang="en-US" sz="1800" b="1" dirty="0">
+                <a:solidFill>
+                  <a:srgbClr val="FE4447"/>
+                </a:solidFill>
+                <a:latin typeface="Georgia" pitchFamily="34" charset="0"/>
+                <a:ea typeface="Georgia" pitchFamily="34" charset="-122"/>
+                <a:cs typeface="Georgia" pitchFamily="34" charset="-120"/>
+              </a:rPr>
+              <a:t>Homework</a:t>
+            </a:r>
+            <a:endParaRPr lang="en-US" sz="1800" dirty="0"/>
+          </a:p>
+        </p:txBody>
+      </p:sp>
+      <p:sp>
+        <p:nvSpPr>
+          <p:cNvPr id="4" name="Text 2"/>
+          <p:cNvSpPr/>
+          <p:nvPr/>
+        </p:nvSpPr>
+        <p:spPr>
+          <a:xfrm>
+            <a:off x="634901" y="883593"/>
+            <a:ext cx="8102798" cy="487561"/>
+          </a:xfrm>
+          <a:prstGeom prst="rect">
+            <a:avLst/>
+          </a:prstGeom>
+          <a:noFill/>
+          <a:ln/>
+        </p:spPr>
+        <p:txBody>
+          <a:bodyPr wrap="square" lIns="0" tIns="0" rIns="0" bIns="0" rtlCol="0" anchor="t"/>
+          <a:lstStyle/>
+          <a:p>
+            <a:pPr algn="l" marL="342900" indent="-342900">
+              <a:lnSpc>
+                <a:spcPts val="1620"/>
+              </a:lnSpc>
+              <a:spcAft>
+                <a:spcPts val="300"/>
+              </a:spcAft>
+              <a:buSzPct val="100000"/>
+              <a:buChar char="•"/>
+            </a:pPr>
+            <a:r>
+              <a:rPr lang="en-US" sz="1200" dirty="0">
+                <a:solidFill>
+                  <a:srgbClr val="1C2833"/>
+                </a:solidFill>
+                <a:latin typeface="Arial" pitchFamily="34" charset="0"/>
+                <a:ea typeface="Arial" pitchFamily="34" charset="-122"/>
+                <a:cs typeface="Arial" pitchFamily="34" charset="-120"/>
+              </a:rPr>
+              <a:t>Look back at your week. Was there ONE thing where you said "my X is acting up" or "I'm too tired" — that you might have ignored too easily? Write one line.</a:t>
+            </a:r>
+            <a:endParaRPr lang="en-US" sz="1200" dirty="0"/>
+          </a:p>
+        </p:txBody>
+      </p:sp>
+      <p:sp>
+        <p:nvSpPr>
+          <p:cNvPr id="5" name="Text 3"/>
+          <p:cNvSpPr/>
+          <p:nvPr/>
+        </p:nvSpPr>
+        <p:spPr>
+          <a:xfrm>
+            <a:off x="406301" y="4434929"/>
+            <a:ext cx="8498026" cy="213271"/>
+          </a:xfrm>
+          <a:prstGeom prst="rect">
+            <a:avLst/>
+          </a:prstGeom>
+          <a:noFill/>
+          <a:ln/>
+        </p:spPr>
+        <p:txBody>
+          <a:bodyPr wrap="square" lIns="0" tIns="0" rIns="0" bIns="0" rtlCol="0" anchor="t"/>
+          <a:lstStyle/>
+          <a:p>
             <a:pPr algn="l" indent="0" marL="0">
               <a:lnSpc>
                 <a:spcPts val="1680"/>
@@ -3250,7 +6212,623 @@
                 <a:ea typeface="Arial" pitchFamily="34" charset="-122"/>
                 <a:cs typeface="Arial" pitchFamily="34" charset="-120"/>
               </a:rPr>
-              <a:t>.</a:t>
+              <a:t>Middle ·  · IKS Curriculum</a:t>
+            </a:r>
+            <a:endParaRPr lang="en-US" sz="1200" dirty="0"/>
+          </a:p>
+        </p:txBody>
+      </p:sp>
+    </p:spTree>
+  </p:cSld>
+  <p:clrMapOvr>
+    <a:masterClrMapping/>
+  </p:clrMapOvr>
+</p:sld>
+</file>
+
+<file path=ppt/slides/slide18.xml><?xml version="1.0" encoding="utf-8"?>
+<p:sld xmlns:a="http://schemas.openxmlformats.org/drawingml/2006/main" xmlns:r="http://schemas.openxmlformats.org/officeDocument/2006/relationships" xmlns:p="http://schemas.openxmlformats.org/presentationml/2006/main">
+  <p:cSld name="Slide 18">
+    <p:bg>
+      <p:bgPr>
+        <a:solidFill>
+          <a:srgbClr val="FFFFFF"/>
+        </a:solidFill>
+      </p:bgPr>
+    </p:bg>
+    <p:spTree>
+      <p:nvGrpSpPr>
+        <p:cNvPr id="1" name=""/>
+        <p:cNvGrpSpPr/>
+        <p:nvPr/>
+      </p:nvGrpSpPr>
+      <p:grpSpPr>
+        <a:xfrm>
+          <a:off x="0" y="0"/>
+          <a:ext cx="0" cy="0"/>
+          <a:chOff x="0" y="0"/>
+          <a:chExt cx="0" cy="0"/>
+        </a:xfrm>
+      </p:grpSpPr>
+      <p:sp>
+        <p:nvSpPr>
+          <p:cNvPr id="2" name="Text 0"/>
+          <p:cNvSpPr/>
+          <p:nvPr/>
+        </p:nvSpPr>
+        <p:spPr>
+          <a:xfrm>
+            <a:off x="0" y="0"/>
+            <a:ext cx="9144000" cy="101501"/>
+          </a:xfrm>
+          <a:prstGeom prst="rect">
+            <a:avLst/>
+          </a:prstGeom>
+          <a:solidFill>
+            <a:srgbClr val="277884"/>
+          </a:solidFill>
+          <a:ln/>
+        </p:spPr>
+        <p:txBody>
+          <a:bodyPr wrap="square" rtlCol="0" anchor="ctr"/>
+          <a:lstStyle/>
+          <a:p>
+            <a:pPr indent="0" marL="0">
+              <a:buNone/>
+            </a:pPr>
+            <a:endParaRPr lang="en-US" dirty="0"/>
+          </a:p>
+        </p:txBody>
+      </p:sp>
+      <p:sp>
+        <p:nvSpPr>
+          <p:cNvPr id="3" name="Text 1"/>
+          <p:cNvSpPr/>
+          <p:nvPr/>
+        </p:nvSpPr>
+        <p:spPr>
+          <a:xfrm>
+            <a:off x="406301" y="457051"/>
+            <a:ext cx="8498026" cy="274290"/>
+          </a:xfrm>
+          <a:prstGeom prst="rect">
+            <a:avLst/>
+          </a:prstGeom>
+          <a:noFill/>
+          <a:ln/>
+        </p:spPr>
+        <p:txBody>
+          <a:bodyPr wrap="square" lIns="0" tIns="0" rIns="0" bIns="0" rtlCol="0" anchor="t"/>
+          <a:lstStyle/>
+          <a:p>
+            <a:pPr algn="l" indent="0" marL="0">
+              <a:lnSpc>
+                <a:spcPts val="2160"/>
+              </a:lnSpc>
+              <a:spcBef>
+                <a:spcPts val="600"/>
+              </a:spcBef>
+              <a:spcAft>
+                <a:spcPts val="800"/>
+              </a:spcAft>
+              <a:buNone/>
+            </a:pPr>
+            <a:r>
+              <a:rPr lang="en-US" sz="1800" b="1" dirty="0">
+                <a:solidFill>
+                  <a:srgbClr val="FE4447"/>
+                </a:solidFill>
+                <a:latin typeface="Georgia" pitchFamily="34" charset="0"/>
+                <a:ea typeface="Georgia" pitchFamily="34" charset="-122"/>
+                <a:cs typeface="Georgia" pitchFamily="34" charset="-120"/>
+              </a:rPr>
+              <a:t>Differentiation</a:t>
+            </a:r>
+            <a:endParaRPr lang="en-US" sz="1800" dirty="0"/>
+          </a:p>
+        </p:txBody>
+      </p:sp>
+      <p:sp>
+        <p:nvSpPr>
+          <p:cNvPr id="4" name="Text 2"/>
+          <p:cNvSpPr/>
+          <p:nvPr/>
+        </p:nvSpPr>
+        <p:spPr>
+          <a:xfrm>
+            <a:off x="634901" y="883593"/>
+            <a:ext cx="8102798" cy="937022"/>
+          </a:xfrm>
+          <a:prstGeom prst="rect">
+            <a:avLst/>
+          </a:prstGeom>
+          <a:noFill/>
+          <a:ln/>
+        </p:spPr>
+        <p:txBody>
+          <a:bodyPr wrap="square" lIns="0" tIns="0" rIns="0" bIns="0" rtlCol="0" anchor="t"/>
+          <a:lstStyle/>
+          <a:p>
+            <a:pPr algn="l" marL="342900" indent="-342900">
+              <a:lnSpc>
+                <a:spcPts val="1620"/>
+              </a:lnSpc>
+              <a:spcAft>
+                <a:spcPts val="300"/>
+              </a:spcAft>
+              <a:buSzPct val="100000"/>
+              <a:buChar char="•"/>
+            </a:pPr>
+            <a:r>
+              <a:rPr lang="en-US" sz="1200" b="1" dirty="0">
+                <a:solidFill>
+                  <a:srgbClr val="1C2833"/>
+                </a:solidFill>
+                <a:latin typeface="Arial" pitchFamily="34" charset="0"/>
+                <a:ea typeface="Arial" pitchFamily="34" charset="-122"/>
+                <a:cs typeface="Arial" pitchFamily="34" charset="-120"/>
+              </a:rPr>
+              <a:t>One tier up:</a:t>
+            </a:r>
+            <a:pPr algn="l" indent="0" marL="0">
+              <a:lnSpc>
+                <a:spcPts val="1620"/>
+              </a:lnSpc>
+              <a:spcAft>
+                <a:spcPts val="300"/>
+              </a:spcAft>
+              <a:buNone/>
+            </a:pPr>
+            <a:r>
+              <a:rPr lang="en-US" sz="1200" dirty="0">
+                <a:solidFill>
+                  <a:srgbClr val="1C2833"/>
+                </a:solidFill>
+                <a:latin typeface="Arial" pitchFamily="34" charset="0"/>
+                <a:ea typeface="Arial" pitchFamily="34" charset="-122"/>
+                <a:cs typeface="Arial" pitchFamily="34" charset="-120"/>
+              </a:rPr>
+              <a:t> Imagine you are an Ayurvedic clinician AND a modern doctor in conversation. Write a 3-line dialogue about a teenage patient with persistent dry cough. Who says what?</a:t>
+            </a:r>
+            <a:endParaRPr lang="en-US" sz="1200" dirty="0"/>
+          </a:p>
+          <a:p>
+            <a:pPr algn="l" marL="342900" indent="-342900">
+              <a:lnSpc>
+                <a:spcPts val="1620"/>
+              </a:lnSpc>
+              <a:spcAft>
+                <a:spcPts val="300"/>
+              </a:spcAft>
+              <a:buSzPct val="100000"/>
+              <a:buChar char="•"/>
+            </a:pPr>
+            <a:r>
+              <a:rPr lang="en-US" sz="1200" b="1" dirty="0">
+                <a:solidFill>
+                  <a:srgbClr val="1C2833"/>
+                </a:solidFill>
+                <a:latin typeface="Arial" pitchFamily="34" charset="0"/>
+                <a:ea typeface="Arial" pitchFamily="34" charset="-122"/>
+                <a:cs typeface="Arial" pitchFamily="34" charset="-120"/>
+              </a:rPr>
+              <a:t>One tier down:</a:t>
+            </a:r>
+            <a:pPr algn="l" indent="0" marL="0">
+              <a:lnSpc>
+                <a:spcPts val="1620"/>
+              </a:lnSpc>
+              <a:spcAft>
+                <a:spcPts val="300"/>
+              </a:spcAft>
+              <a:buNone/>
+            </a:pPr>
+            <a:r>
+              <a:rPr lang="en-US" sz="1200" dirty="0">
+                <a:solidFill>
+                  <a:srgbClr val="1C2833"/>
+                </a:solidFill>
+                <a:latin typeface="Arial" pitchFamily="34" charset="0"/>
+                <a:ea typeface="Arial" pitchFamily="34" charset="-122"/>
+                <a:cs typeface="Arial" pitchFamily="34" charset="-120"/>
+              </a:rPr>
+              <a:t> Memorise the two-column rule of thumb: </a:t>
+            </a:r>
+            <a:pPr algn="l" indent="0" marL="0">
+              <a:lnSpc>
+                <a:spcPts val="1620"/>
+              </a:lnSpc>
+              <a:spcAft>
+                <a:spcPts val="300"/>
+              </a:spcAft>
+              <a:buNone/>
+            </a:pPr>
+            <a:r>
+              <a:rPr lang="en-US" sz="1200" i="1" dirty="0">
+                <a:solidFill>
+                  <a:srgbClr val="1C2833"/>
+                </a:solidFill>
+                <a:latin typeface="Arial" pitchFamily="34" charset="0"/>
+                <a:ea typeface="Arial" pitchFamily="34" charset="-122"/>
+                <a:cs typeface="Arial" pitchFamily="34" charset="-120"/>
+              </a:rPr>
+              <a:t>"persistent or severe → doctor; brief and mild → notice + adjust."</a:t>
+            </a:r>
+            <a:endParaRPr lang="en-US" sz="1200" dirty="0"/>
+          </a:p>
+        </p:txBody>
+      </p:sp>
+      <p:sp>
+        <p:nvSpPr>
+          <p:cNvPr id="5" name="Text 3"/>
+          <p:cNvSpPr/>
+          <p:nvPr/>
+        </p:nvSpPr>
+        <p:spPr>
+          <a:xfrm>
+            <a:off x="406301" y="4434929"/>
+            <a:ext cx="8498026" cy="213271"/>
+          </a:xfrm>
+          <a:prstGeom prst="rect">
+            <a:avLst/>
+          </a:prstGeom>
+          <a:noFill/>
+          <a:ln/>
+        </p:spPr>
+        <p:txBody>
+          <a:bodyPr wrap="square" lIns="0" tIns="0" rIns="0" bIns="0" rtlCol="0" anchor="t"/>
+          <a:lstStyle/>
+          <a:p>
+            <a:pPr algn="l" indent="0" marL="0">
+              <a:lnSpc>
+                <a:spcPts val="1680"/>
+              </a:lnSpc>
+              <a:spcBef>
+                <a:spcPts val="300"/>
+              </a:spcBef>
+              <a:spcAft>
+                <a:spcPts val="300"/>
+              </a:spcAft>
+              <a:buNone/>
+            </a:pPr>
+            <a:r>
+              <a:rPr lang="en-US" sz="1200" dirty="0">
+                <a:solidFill>
+                  <a:srgbClr val="1C2833"/>
+                </a:solidFill>
+                <a:latin typeface="Arial" pitchFamily="34" charset="0"/>
+                <a:ea typeface="Arial" pitchFamily="34" charset="-122"/>
+                <a:cs typeface="Arial" pitchFamily="34" charset="-120"/>
+              </a:rPr>
+              <a:t>Middle ·  · IKS Curriculum</a:t>
+            </a:r>
+            <a:endParaRPr lang="en-US" sz="1200" dirty="0"/>
+          </a:p>
+        </p:txBody>
+      </p:sp>
+    </p:spTree>
+  </p:cSld>
+  <p:clrMapOvr>
+    <a:masterClrMapping/>
+  </p:clrMapOvr>
+</p:sld>
+</file>
+
+<file path=ppt/slides/slide19.xml><?xml version="1.0" encoding="utf-8"?>
+<p:sld xmlns:a="http://schemas.openxmlformats.org/drawingml/2006/main" xmlns:r="http://schemas.openxmlformats.org/officeDocument/2006/relationships" xmlns:p="http://schemas.openxmlformats.org/presentationml/2006/main">
+  <p:cSld name="Slide 19">
+    <p:bg>
+      <p:bgPr>
+        <a:solidFill>
+          <a:srgbClr val="FFFFFF"/>
+        </a:solidFill>
+      </p:bgPr>
+    </p:bg>
+    <p:spTree>
+      <p:nvGrpSpPr>
+        <p:cNvPr id="1" name=""/>
+        <p:cNvGrpSpPr/>
+        <p:nvPr/>
+      </p:nvGrpSpPr>
+      <p:grpSpPr>
+        <a:xfrm>
+          <a:off x="0" y="0"/>
+          <a:ext cx="0" cy="0"/>
+          <a:chOff x="0" y="0"/>
+          <a:chExt cx="0" cy="0"/>
+        </a:xfrm>
+      </p:grpSpPr>
+      <p:sp>
+        <p:nvSpPr>
+          <p:cNvPr id="2" name="Text 0"/>
+          <p:cNvSpPr/>
+          <p:nvPr/>
+        </p:nvSpPr>
+        <p:spPr>
+          <a:xfrm>
+            <a:off x="0" y="0"/>
+            <a:ext cx="9144000" cy="101501"/>
+          </a:xfrm>
+          <a:prstGeom prst="rect">
+            <a:avLst/>
+          </a:prstGeom>
+          <a:solidFill>
+            <a:srgbClr val="277884"/>
+          </a:solidFill>
+          <a:ln/>
+        </p:spPr>
+        <p:txBody>
+          <a:bodyPr wrap="square" rtlCol="0" anchor="ctr"/>
+          <a:lstStyle/>
+          <a:p>
+            <a:pPr indent="0" marL="0">
+              <a:buNone/>
+            </a:pPr>
+            <a:endParaRPr lang="en-US" dirty="0"/>
+          </a:p>
+        </p:txBody>
+      </p:sp>
+      <p:sp>
+        <p:nvSpPr>
+          <p:cNvPr id="3" name="Text 1"/>
+          <p:cNvSpPr/>
+          <p:nvPr/>
+        </p:nvSpPr>
+        <p:spPr>
+          <a:xfrm>
+            <a:off x="406301" y="457051"/>
+            <a:ext cx="8498026" cy="274290"/>
+          </a:xfrm>
+          <a:prstGeom prst="rect">
+            <a:avLst/>
+          </a:prstGeom>
+          <a:noFill/>
+          <a:ln/>
+        </p:spPr>
+        <p:txBody>
+          <a:bodyPr wrap="square" lIns="0" tIns="0" rIns="0" bIns="0" rtlCol="0" anchor="t"/>
+          <a:lstStyle/>
+          <a:p>
+            <a:pPr algn="l" indent="0" marL="0">
+              <a:lnSpc>
+                <a:spcPts val="2160"/>
+              </a:lnSpc>
+              <a:spcBef>
+                <a:spcPts val="600"/>
+              </a:spcBef>
+              <a:spcAft>
+                <a:spcPts val="800"/>
+              </a:spcAft>
+              <a:buNone/>
+            </a:pPr>
+            <a:r>
+              <a:rPr lang="en-US" sz="1800" b="1" dirty="0">
+                <a:solidFill>
+                  <a:srgbClr val="FE4447"/>
+                </a:solidFill>
+                <a:latin typeface="Georgia" pitchFamily="34" charset="0"/>
+                <a:ea typeface="Georgia" pitchFamily="34" charset="-122"/>
+                <a:cs typeface="Georgia" pitchFamily="34" charset="-120"/>
+              </a:rPr>
+              <a:t>Teacher notes</a:t>
+            </a:r>
+            <a:endParaRPr lang="en-US" sz="1800" dirty="0"/>
+          </a:p>
+        </p:txBody>
+      </p:sp>
+      <p:sp>
+        <p:nvSpPr>
+          <p:cNvPr id="4" name="Text 2"/>
+          <p:cNvSpPr/>
+          <p:nvPr/>
+        </p:nvSpPr>
+        <p:spPr>
+          <a:xfrm>
+            <a:off x="634901" y="883593"/>
+            <a:ext cx="8102798" cy="1218902"/>
+          </a:xfrm>
+          <a:prstGeom prst="rect">
+            <a:avLst/>
+          </a:prstGeom>
+          <a:noFill/>
+          <a:ln/>
+        </p:spPr>
+        <p:txBody>
+          <a:bodyPr wrap="square" lIns="0" tIns="0" rIns="0" bIns="0" rtlCol="0" anchor="t"/>
+          <a:lstStyle/>
+          <a:p>
+            <a:pPr algn="l" marL="342900" indent="-342900">
+              <a:lnSpc>
+                <a:spcPts val="1620"/>
+              </a:lnSpc>
+              <a:spcAft>
+                <a:spcPts val="300"/>
+              </a:spcAft>
+              <a:buSzPct val="100000"/>
+              <a:buChar char="•"/>
+            </a:pPr>
+            <a:r>
+              <a:rPr lang="en-US" sz="1200" dirty="0">
+                <a:solidFill>
+                  <a:srgbClr val="1C2833"/>
+                </a:solidFill>
+                <a:latin typeface="Arial" pitchFamily="34" charset="0"/>
+                <a:ea typeface="Arial" pitchFamily="34" charset="-122"/>
+                <a:cs typeface="Arial" pitchFamily="34" charset="-120"/>
+              </a:rPr>
+              <a:t>This is the safety lesson. </a:t>
+            </a:r>
+            <a:pPr algn="l" indent="0" marL="0">
+              <a:lnSpc>
+                <a:spcPts val="1620"/>
+              </a:lnSpc>
+              <a:spcAft>
+                <a:spcPts val="300"/>
+              </a:spcAft>
+              <a:buNone/>
+            </a:pPr>
+            <a:r>
+              <a:rPr lang="en-US" sz="1200" b="1" dirty="0">
+                <a:solidFill>
+                  <a:srgbClr val="1C2833"/>
+                </a:solidFill>
+                <a:latin typeface="Arial" pitchFamily="34" charset="0"/>
+                <a:ea typeface="Arial" pitchFamily="34" charset="-122"/>
+                <a:cs typeface="Arial" pitchFamily="34" charset="-120"/>
+              </a:rPr>
+              <a:t>Do not skip even if compressing the module.</a:t>
+            </a:r>
+            <a:endParaRPr lang="en-US" sz="1200" dirty="0"/>
+          </a:p>
+          <a:p>
+            <a:pPr algn="l" marL="342900" indent="-342900">
+              <a:lnSpc>
+                <a:spcPts val="1620"/>
+              </a:lnSpc>
+              <a:spcAft>
+                <a:spcPts val="300"/>
+              </a:spcAft>
+              <a:buSzPct val="100000"/>
+              <a:buChar char="•"/>
+            </a:pPr>
+            <a:r>
+              <a:rPr lang="en-US" sz="1200" dirty="0">
+                <a:solidFill>
+                  <a:srgbClr val="1C2833"/>
+                </a:solidFill>
+                <a:latin typeface="Arial" pitchFamily="34" charset="0"/>
+                <a:ea typeface="Arial" pitchFamily="34" charset="-122"/>
+                <a:cs typeface="Arial" pitchFamily="34" charset="-120"/>
+              </a:rPr>
+              <a:t>Some students may have actual unmanaged symptoms. Be alert. Refer to school counsellor or nurse where needed.</a:t>
+            </a:r>
+            <a:endParaRPr lang="en-US" sz="1200" dirty="0"/>
+          </a:p>
+          <a:p>
+            <a:pPr algn="l" marL="342900" indent="-342900">
+              <a:lnSpc>
+                <a:spcPts val="1620"/>
+              </a:lnSpc>
+              <a:spcAft>
+                <a:spcPts val="300"/>
+              </a:spcAft>
+              <a:buSzPct val="100000"/>
+              <a:buChar char="•"/>
+            </a:pPr>
+            <a:r>
+              <a:rPr lang="en-US" sz="1200" dirty="0">
+                <a:solidFill>
+                  <a:srgbClr val="1C2833"/>
+                </a:solidFill>
+                <a:latin typeface="Arial" pitchFamily="34" charset="0"/>
+                <a:ea typeface="Arial" pitchFamily="34" charset="-122"/>
+                <a:cs typeface="Arial" pitchFamily="34" charset="-120"/>
+              </a:rPr>
+              <a:t>Don't list specific herbs or remedies even casually. Module 4 is observation-only.</a:t>
+            </a:r>
+            <a:endParaRPr lang="en-US" sz="1200" dirty="0"/>
+          </a:p>
+          <a:p>
+            <a:pPr algn="l" marL="342900" indent="-342900">
+              <a:lnSpc>
+                <a:spcPts val="1620"/>
+              </a:lnSpc>
+              <a:spcAft>
+                <a:spcPts val="300"/>
+              </a:spcAft>
+              <a:buSzPct val="100000"/>
+              <a:buChar char="•"/>
+            </a:pPr>
+            <a:r>
+              <a:rPr lang="en-US" sz="1200" dirty="0">
+                <a:solidFill>
+                  <a:srgbClr val="1C2833"/>
+                </a:solidFill>
+                <a:latin typeface="Arial" pitchFamily="34" charset="0"/>
+                <a:ea typeface="Arial" pitchFamily="34" charset="-122"/>
+                <a:cs typeface="Arial" pitchFamily="34" charset="-120"/>
+              </a:rPr>
+              <a:t>Some Indian families do consult Ayurvedic doctors. Honour that. The point is: </a:t>
+            </a:r>
+            <a:pPr algn="l" indent="0" marL="0">
+              <a:lnSpc>
+                <a:spcPts val="1620"/>
+              </a:lnSpc>
+              <a:spcAft>
+                <a:spcPts val="300"/>
+              </a:spcAft>
+              <a:buNone/>
+            </a:pPr>
+            <a:r>
+              <a:rPr lang="en-US" sz="1200" i="1" dirty="0">
+                <a:solidFill>
+                  <a:srgbClr val="1C2833"/>
+                </a:solidFill>
+                <a:latin typeface="Arial" pitchFamily="34" charset="0"/>
+                <a:ea typeface="Arial" pitchFamily="34" charset="-122"/>
+                <a:cs typeface="Arial" pitchFamily="34" charset="-120"/>
+              </a:rPr>
+              <a:t>a qualified clinician</a:t>
+            </a:r>
+            <a:pPr algn="l" indent="0" marL="0">
+              <a:lnSpc>
+                <a:spcPts val="1620"/>
+              </a:lnSpc>
+              <a:spcAft>
+                <a:spcPts val="300"/>
+              </a:spcAft>
+              <a:buNone/>
+            </a:pPr>
+            <a:r>
+              <a:rPr lang="en-US" sz="1200" dirty="0">
+                <a:solidFill>
+                  <a:srgbClr val="1C2833"/>
+                </a:solidFill>
+                <a:latin typeface="Arial" pitchFamily="34" charset="0"/>
+                <a:ea typeface="Arial" pitchFamily="34" charset="-122"/>
+                <a:cs typeface="Arial" pitchFamily="34" charset="-120"/>
+              </a:rPr>
+              <a:t> — Ayurvedic or modern — is who diagnoses. </a:t>
+            </a:r>
+            <a:pPr algn="l" indent="0" marL="0">
+              <a:lnSpc>
+                <a:spcPts val="1620"/>
+              </a:lnSpc>
+              <a:spcAft>
+                <a:spcPts val="300"/>
+              </a:spcAft>
+              <a:buNone/>
+            </a:pPr>
+            <a:r>
+              <a:rPr lang="en-US" sz="1200" i="1" dirty="0">
+                <a:solidFill>
+                  <a:srgbClr val="1C2833"/>
+                </a:solidFill>
+                <a:latin typeface="Arial" pitchFamily="34" charset="0"/>
+                <a:ea typeface="Arial" pitchFamily="34" charset="-122"/>
+                <a:cs typeface="Arial" pitchFamily="34" charset="-120"/>
+              </a:rPr>
+              <a:t>A student with a wall poster</a:t>
+            </a:r>
+            <a:pPr algn="l" indent="0" marL="0">
+              <a:lnSpc>
+                <a:spcPts val="1620"/>
+              </a:lnSpc>
+              <a:spcAft>
+                <a:spcPts val="300"/>
+              </a:spcAft>
+              <a:buNone/>
+            </a:pPr>
+            <a:r>
+              <a:rPr lang="en-US" sz="1200" dirty="0">
+                <a:solidFill>
+                  <a:srgbClr val="1C2833"/>
+                </a:solidFill>
+                <a:latin typeface="Arial" pitchFamily="34" charset="0"/>
+                <a:ea typeface="Arial" pitchFamily="34" charset="-122"/>
+                <a:cs typeface="Arial" pitchFamily="34" charset="-120"/>
+              </a:rPr>
+              <a:t> is not.</a:t>
             </a:r>
             <a:endParaRPr lang="en-US" sz="1200" dirty="0"/>
           </a:p>
@@ -3408,7 +6986,7 @@
                 <a:ea typeface="Georgia" pitchFamily="34" charset="-122"/>
                 <a:cs typeface="Georgia" pitchFamily="34" charset="-120"/>
               </a:rPr>
-              <a:t>Materials</a:t>
+              <a:t>Learning objective</a:t>
             </a:r>
             <a:endParaRPr lang="en-US" sz="1800" dirty="0"/>
           </a:p>
@@ -3423,7 +7001,7 @@
         <p:spPr>
           <a:xfrm>
             <a:off x="406301" y="870942"/>
-            <a:ext cx="8498026" cy="436066"/>
+            <a:ext cx="8498026" cy="639812"/>
           </a:xfrm>
           <a:prstGeom prst="rect">
             <a:avLst/>
@@ -3456,7 +7034,7 @@
                 <a:ea typeface="Arial" pitchFamily="34" charset="-122"/>
                 <a:cs typeface="Arial" pitchFamily="34" charset="-120"/>
               </a:rPr>
-              <a:t>– The class </a:t>
+              <a:t>By the end of this lesson, students name three observable signs of imbalance per </a:t>
             </a:r>
             <a:pPr algn="l" indent="0" marL="0">
               <a:lnSpc>
@@ -3479,7 +7057,7 @@
                 <a:ea typeface="Arial" pitchFamily="34" charset="-122"/>
                 <a:cs typeface="Arial" pitchFamily="34" charset="-120"/>
               </a:rPr>
-              <a:t>tridoṣa</a:t>
+              <a:t>doṣa</a:t>
             </a:r>
             <a:pPr algn="l" indent="0" marL="0">
               <a:lnSpc>
@@ -3502,7 +7080,7 @@
                 <a:ea typeface="Arial" pitchFamily="34" charset="-122"/>
                 <a:cs typeface="Arial" pitchFamily="34" charset="-120"/>
               </a:rPr>
-              <a:t> poster – Whiteboard, divided into TWO columns: </a:t>
+              <a:t>, distinguish between </a:t>
             </a:r>
             <a:pPr algn="l" indent="0" marL="0">
               <a:lnSpc>
@@ -3525,7 +7103,7 @@
                 <a:ea typeface="Arial" pitchFamily="34" charset="-122"/>
                 <a:cs typeface="Arial" pitchFamily="34" charset="-120"/>
               </a:rPr>
-              <a:t>"Lifestyle range — observe + adjust"</a:t>
+              <a:t>lifestyle observation</a:t>
             </a:r>
             <a:pPr algn="l" indent="0" marL="0">
               <a:lnSpc>
@@ -3548,7 +7126,7 @@
                 <a:ea typeface="Arial" pitchFamily="34" charset="-122"/>
                 <a:cs typeface="Arial" pitchFamily="34" charset="-120"/>
               </a:rPr>
-              <a:t> and </a:t>
+              <a:t> (where Ayurveda's framework can help) and </a:t>
             </a:r>
             <a:pPr algn="l" indent="0" marL="0">
               <a:lnSpc>
@@ -3571,7 +7149,7 @@
                 <a:ea typeface="Arial" pitchFamily="34" charset="-122"/>
                 <a:cs typeface="Arial" pitchFamily="34" charset="-120"/>
               </a:rPr>
-              <a:t>"Medical territory — see a doctor"</a:t>
+              <a:t>medical symptom</a:t>
             </a:r>
             <a:pPr algn="l" indent="0" marL="0">
               <a:lnSpc>
@@ -3594,8 +7172,33 @@
                 <a:ea typeface="Arial" pitchFamily="34" charset="-122"/>
                 <a:cs typeface="Arial" pitchFamily="34" charset="-120"/>
               </a:rPr>
-              <a:t> – Scenario cards (in </a:t>
-            </a:r>
+              <a:t> (where a doctor must be consulted), and articulate the safety boundary in their own words.</a:t>
+            </a:r>
+            <a:endParaRPr lang="en-US" sz="1200" dirty="0"/>
+          </a:p>
+        </p:txBody>
+      </p:sp>
+      <p:sp>
+        <p:nvSpPr>
+          <p:cNvPr id="5" name="Text 3"/>
+          <p:cNvSpPr/>
+          <p:nvPr/>
+        </p:nvSpPr>
+        <p:spPr>
+          <a:xfrm>
+            <a:off x="406301" y="4434929"/>
+            <a:ext cx="8498026" cy="213271"/>
+          </a:xfrm>
+          <a:prstGeom prst="rect">
+            <a:avLst/>
+          </a:prstGeom>
+          <a:noFill/>
+          <a:ln/>
+        </p:spPr>
+        <p:txBody>
+          <a:bodyPr wrap="square" lIns="0" tIns="0" rIns="0" bIns="0" rtlCol="0" anchor="t"/>
+          <a:lstStyle/>
+          <a:p>
             <a:pPr algn="l" indent="0" marL="0">
               <a:lnSpc>
                 <a:spcPts val="1680"/>
@@ -3617,19 +7220,152 @@
                 <a:ea typeface="Arial" pitchFamily="34" charset="-122"/>
                 <a:cs typeface="Arial" pitchFamily="34" charset="-120"/>
               </a:rPr>
-              <a:t>activities/activity-03-scope-debate.md</a:t>
-            </a:r>
-            <a:pPr algn="l" indent="0" marL="0">
-              <a:lnSpc>
-                <a:spcPts val="1680"/>
+              <a:t>Middle ·  · IKS Curriculum</a:t>
+            </a:r>
+            <a:endParaRPr lang="en-US" sz="1200" dirty="0"/>
+          </a:p>
+        </p:txBody>
+      </p:sp>
+    </p:spTree>
+  </p:cSld>
+  <p:clrMapOvr>
+    <a:masterClrMapping/>
+  </p:clrMapOvr>
+</p:sld>
+</file>
+
+<file path=ppt/slides/slide20.xml><?xml version="1.0" encoding="utf-8"?>
+<p:sld xmlns:a="http://schemas.openxmlformats.org/drawingml/2006/main" xmlns:r="http://schemas.openxmlformats.org/officeDocument/2006/relationships" xmlns:p="http://schemas.openxmlformats.org/presentationml/2006/main">
+  <p:cSld name="Slide 20">
+    <p:bg>
+      <p:bgPr>
+        <a:solidFill>
+          <a:srgbClr val="FFFFFF"/>
+        </a:solidFill>
+      </p:bgPr>
+    </p:bg>
+    <p:spTree>
+      <p:nvGrpSpPr>
+        <p:cNvPr id="1" name=""/>
+        <p:cNvGrpSpPr/>
+        <p:nvPr/>
+      </p:nvGrpSpPr>
+      <p:grpSpPr>
+        <a:xfrm>
+          <a:off x="0" y="0"/>
+          <a:ext cx="0" cy="0"/>
+          <a:chOff x="0" y="0"/>
+          <a:chExt cx="0" cy="0"/>
+        </a:xfrm>
+      </p:grpSpPr>
+      <p:sp>
+        <p:nvSpPr>
+          <p:cNvPr id="2" name="Text 0"/>
+          <p:cNvSpPr/>
+          <p:nvPr/>
+        </p:nvSpPr>
+        <p:spPr>
+          <a:xfrm>
+            <a:off x="0" y="0"/>
+            <a:ext cx="9144000" cy="101501"/>
+          </a:xfrm>
+          <a:prstGeom prst="rect">
+            <a:avLst/>
+          </a:prstGeom>
+          <a:solidFill>
+            <a:srgbClr val="277884"/>
+          </a:solidFill>
+          <a:ln/>
+        </p:spPr>
+        <p:txBody>
+          <a:bodyPr wrap="square" rtlCol="0" anchor="ctr"/>
+          <a:lstStyle/>
+          <a:p>
+            <a:pPr indent="0" marL="0">
+              <a:buNone/>
+            </a:pPr>
+            <a:endParaRPr lang="en-US" dirty="0"/>
+          </a:p>
+        </p:txBody>
+      </p:sp>
+      <p:sp>
+        <p:nvSpPr>
+          <p:cNvPr id="3" name="Text 1"/>
+          <p:cNvSpPr/>
+          <p:nvPr/>
+        </p:nvSpPr>
+        <p:spPr>
+          <a:xfrm>
+            <a:off x="406301" y="457051"/>
+            <a:ext cx="8498026" cy="274290"/>
+          </a:xfrm>
+          <a:prstGeom prst="rect">
+            <a:avLst/>
+          </a:prstGeom>
+          <a:noFill/>
+          <a:ln/>
+        </p:spPr>
+        <p:txBody>
+          <a:bodyPr wrap="square" lIns="0" tIns="0" rIns="0" bIns="0" rtlCol="0" anchor="t"/>
+          <a:lstStyle/>
+          <a:p>
+            <a:pPr algn="l" indent="0" marL="0">
+              <a:lnSpc>
+                <a:spcPts val="2160"/>
               </a:lnSpc>
               <a:spcBef>
-                <a:spcPts val="300"/>
+                <a:spcPts val="600"/>
               </a:spcBef>
               <a:spcAft>
-                <a:spcPts val="300"/>
-              </a:spcAft>
-              <a:buNone/>
+                <a:spcPts val="800"/>
+              </a:spcAft>
+              <a:buNone/>
+            </a:pPr>
+            <a:r>
+              <a:rPr lang="en-US" sz="1800" b="1" dirty="0">
+                <a:solidFill>
+                  <a:srgbClr val="FE4447"/>
+                </a:solidFill>
+                <a:latin typeface="Georgia" pitchFamily="34" charset="0"/>
+                <a:ea typeface="Georgia" pitchFamily="34" charset="-122"/>
+                <a:cs typeface="Georgia" pitchFamily="34" charset="-120"/>
+              </a:rPr>
+              <a:t>Citation(s) used in this lesson</a:t>
+            </a:r>
+            <a:endParaRPr lang="en-US" sz="1800" dirty="0"/>
+          </a:p>
+        </p:txBody>
+      </p:sp>
+      <p:sp>
+        <p:nvSpPr>
+          <p:cNvPr id="4" name="Text 2"/>
+          <p:cNvSpPr/>
+          <p:nvPr/>
+        </p:nvSpPr>
+        <p:spPr>
+          <a:xfrm>
+            <a:off x="634901" y="883593"/>
+            <a:ext cx="8102798" cy="300930"/>
+          </a:xfrm>
+          <a:prstGeom prst="rect">
+            <a:avLst/>
+          </a:prstGeom>
+          <a:noFill/>
+          <a:ln/>
+        </p:spPr>
+        <p:txBody>
+          <a:bodyPr wrap="square" lIns="0" tIns="0" rIns="0" bIns="0" rtlCol="0" anchor="t"/>
+          <a:lstStyle/>
+          <a:p>
+            <a:pPr algn="l" marL="342900" indent="-342900">
+              <a:lnSpc>
+                <a:spcPts val="1620"/>
+              </a:lnSpc>
+              <a:spcAft>
+                <a:spcPts val="300"/>
+              </a:spcAft>
+              <a:buSzPct val="100000"/>
+              <a:buChar char="•"/>
             </a:pPr>
             <a:r>
               <a:rPr lang="en-US" sz="1200" dirty="0">
@@ -3640,7 +7376,87 @@
                 <a:ea typeface="Arial" pitchFamily="34" charset="-122"/>
                 <a:cs typeface="Arial" pitchFamily="34" charset="-120"/>
               </a:rPr>
-              <a:t>)</a:t>
+              <a:t>Aṣṭāṅga Hṛdaya, </a:t>
+            </a:r>
+            <a:pPr algn="l" indent="0" marL="0">
+              <a:lnSpc>
+                <a:spcPts val="1620"/>
+              </a:lnSpc>
+              <a:spcAft>
+                <a:spcPts val="300"/>
+              </a:spcAft>
+              <a:buNone/>
+            </a:pPr>
+            <a:r>
+              <a:rPr lang="en-US" sz="1200" i="1" dirty="0">
+                <a:solidFill>
+                  <a:srgbClr val="1C2833"/>
+                </a:solidFill>
+                <a:latin typeface="Arial" pitchFamily="34" charset="0"/>
+                <a:ea typeface="Arial" pitchFamily="34" charset="-122"/>
+                <a:cs typeface="Arial" pitchFamily="34" charset="-120"/>
+              </a:rPr>
+              <a:t>Sūtrasthāna</a:t>
+            </a:r>
+            <a:pPr algn="l" indent="0" marL="0">
+              <a:lnSpc>
+                <a:spcPts val="1620"/>
+              </a:lnSpc>
+              <a:spcAft>
+                <a:spcPts val="300"/>
+              </a:spcAft>
+              <a:buNone/>
+            </a:pPr>
+            <a:r>
+              <a:rPr lang="en-US" sz="1200" dirty="0">
+                <a:solidFill>
+                  <a:srgbClr val="1C2833"/>
+                </a:solidFill>
+                <a:latin typeface="Arial" pitchFamily="34" charset="0"/>
+                <a:ea typeface="Arial" pitchFamily="34" charset="-122"/>
+                <a:cs typeface="Arial" pitchFamily="34" charset="-120"/>
+              </a:rPr>
+              <a:t> 1.8 (paraphrase). See </a:t>
+            </a:r>
+            <a:pPr algn="l" indent="0" marL="0">
+              <a:lnSpc>
+                <a:spcPts val="1620"/>
+              </a:lnSpc>
+              <a:spcAft>
+                <a:spcPts val="300"/>
+              </a:spcAft>
+              <a:buNone/>
+            </a:pPr>
+            <a:r>
+              <a:rPr lang="en-US" sz="1200" dirty="0">
+                <a:solidFill>
+                  <a:srgbClr val="1C2833"/>
+                </a:solidFill>
+                <a:latin typeface="Arial" pitchFamily="34" charset="0"/>
+                <a:ea typeface="Arial" pitchFamily="34" charset="-122"/>
+                <a:cs typeface="Arial" pitchFamily="34" charset="-120"/>
+              </a:rPr>
+              <a:t>sources.md</a:t>
+            </a:r>
+            <a:pPr algn="l" indent="0" marL="0">
+              <a:lnSpc>
+                <a:spcPts val="1620"/>
+              </a:lnSpc>
+              <a:spcAft>
+                <a:spcPts val="300"/>
+              </a:spcAft>
+              <a:buNone/>
+            </a:pPr>
+            <a:r>
+              <a:rPr lang="en-US" sz="1200" dirty="0">
+                <a:solidFill>
+                  <a:srgbClr val="1C2833"/>
+                </a:solidFill>
+                <a:latin typeface="Arial" pitchFamily="34" charset="0"/>
+                <a:ea typeface="Arial" pitchFamily="34" charset="-122"/>
+                <a:cs typeface="Arial" pitchFamily="34" charset="-120"/>
+              </a:rPr>
+              <a:t>.</a:t>
             </a:r>
             <a:endParaRPr lang="en-US" sz="1200" dirty="0"/>
           </a:p>
@@ -3798,7 +7614,7 @@
                 <a:ea typeface="Georgia" pitchFamily="34" charset="-122"/>
                 <a:cs typeface="Georgia" pitchFamily="34" charset="-120"/>
               </a:rPr>
-              <a:t>Vocabulary refreshed</a:t>
+              <a:t>Materials</a:t>
             </a:r>
             <a:endParaRPr lang="en-US" sz="1800" dirty="0"/>
           </a:p>
@@ -3813,7 +7629,7 @@
         <p:spPr>
           <a:xfrm>
             <a:off x="634901" y="883593"/>
-            <a:ext cx="8102798" cy="281880"/>
+            <a:ext cx="8102798" cy="788491"/>
           </a:xfrm>
           <a:prstGeom prst="rect">
             <a:avLst/>
@@ -3836,6 +7652,26 @@
               <a:buChar char="•"/>
             </a:pPr>
             <a:r>
+              <a:rPr lang="en-US" sz="1200" dirty="0">
+                <a:solidFill>
+                  <a:srgbClr val="1C2833"/>
+                </a:solidFill>
+                <a:latin typeface="Arial" pitchFamily="34" charset="0"/>
+                <a:ea typeface="Arial" pitchFamily="34" charset="-122"/>
+                <a:cs typeface="Arial" pitchFamily="34" charset="-120"/>
+              </a:rPr>
+              <a:t>The class </a:t>
+            </a:r>
+            <a:pPr algn="l" indent="0" marL="0">
+              <a:lnSpc>
+                <a:spcPts val="1620"/>
+              </a:lnSpc>
+              <a:spcAft>
+                <a:spcPts val="300"/>
+              </a:spcAft>
+              <a:buNone/>
+            </a:pPr>
+            <a:r>
               <a:rPr lang="en-US" sz="1200" i="1" dirty="0">
                 <a:solidFill>
                   <a:srgbClr val="1C2833"/>
@@ -3844,7 +7680,7 @@
                 <a:ea typeface="Arial" pitchFamily="34" charset="-122"/>
                 <a:cs typeface="Arial" pitchFamily="34" charset="-120"/>
               </a:rPr>
-              <a:t>vikṛti</a:t>
+              <a:t>tridoṣa</a:t>
             </a:r>
             <a:pPr algn="l" indent="0" marL="0">
               <a:lnSpc>
@@ -3864,7 +7700,155 @@
                 <a:ea typeface="Arial" pitchFamily="34" charset="-122"/>
                 <a:cs typeface="Arial" pitchFamily="34" charset="-120"/>
               </a:rPr>
-              <a:t> (imbalance) — reused from Day 3.</a:t>
+              <a:t> poster</a:t>
+            </a:r>
+            <a:endParaRPr lang="en-US" sz="1200" dirty="0"/>
+          </a:p>
+          <a:p>
+            <a:pPr algn="l" marL="342900" indent="-342900">
+              <a:lnSpc>
+                <a:spcPts val="1620"/>
+              </a:lnSpc>
+              <a:spcAft>
+                <a:spcPts val="300"/>
+              </a:spcAft>
+              <a:buSzPct val="100000"/>
+              <a:buChar char="•"/>
+            </a:pPr>
+            <a:r>
+              <a:rPr lang="en-US" sz="1200" dirty="0">
+                <a:solidFill>
+                  <a:srgbClr val="1C2833"/>
+                </a:solidFill>
+                <a:latin typeface="Arial" pitchFamily="34" charset="0"/>
+                <a:ea typeface="Arial" pitchFamily="34" charset="-122"/>
+                <a:cs typeface="Arial" pitchFamily="34" charset="-120"/>
+              </a:rPr>
+              <a:t>Whiteboard, divided into TWO columns: </a:t>
+            </a:r>
+            <a:pPr algn="l" indent="0" marL="0">
+              <a:lnSpc>
+                <a:spcPts val="1620"/>
+              </a:lnSpc>
+              <a:spcAft>
+                <a:spcPts val="300"/>
+              </a:spcAft>
+              <a:buNone/>
+            </a:pPr>
+            <a:r>
+              <a:rPr lang="en-US" sz="1200" i="1" dirty="0">
+                <a:solidFill>
+                  <a:srgbClr val="1C2833"/>
+                </a:solidFill>
+                <a:latin typeface="Arial" pitchFamily="34" charset="0"/>
+                <a:ea typeface="Arial" pitchFamily="34" charset="-122"/>
+                <a:cs typeface="Arial" pitchFamily="34" charset="-120"/>
+              </a:rPr>
+              <a:t>"Lifestyle range — observe + adjust"</a:t>
+            </a:r>
+            <a:pPr algn="l" indent="0" marL="0">
+              <a:lnSpc>
+                <a:spcPts val="1620"/>
+              </a:lnSpc>
+              <a:spcAft>
+                <a:spcPts val="300"/>
+              </a:spcAft>
+              <a:buNone/>
+            </a:pPr>
+            <a:r>
+              <a:rPr lang="en-US" sz="1200" dirty="0">
+                <a:solidFill>
+                  <a:srgbClr val="1C2833"/>
+                </a:solidFill>
+                <a:latin typeface="Arial" pitchFamily="34" charset="0"/>
+                <a:ea typeface="Arial" pitchFamily="34" charset="-122"/>
+                <a:cs typeface="Arial" pitchFamily="34" charset="-120"/>
+              </a:rPr>
+              <a:t> and </a:t>
+            </a:r>
+            <a:pPr algn="l" indent="0" marL="0">
+              <a:lnSpc>
+                <a:spcPts val="1620"/>
+              </a:lnSpc>
+              <a:spcAft>
+                <a:spcPts val="300"/>
+              </a:spcAft>
+              <a:buNone/>
+            </a:pPr>
+            <a:r>
+              <a:rPr lang="en-US" sz="1200" i="1" dirty="0">
+                <a:solidFill>
+                  <a:srgbClr val="1C2833"/>
+                </a:solidFill>
+                <a:latin typeface="Arial" pitchFamily="34" charset="0"/>
+                <a:ea typeface="Arial" pitchFamily="34" charset="-122"/>
+                <a:cs typeface="Arial" pitchFamily="34" charset="-120"/>
+              </a:rPr>
+              <a:t>"Medical territory — see a doctor"</a:t>
+            </a:r>
+            <a:endParaRPr lang="en-US" sz="1200" dirty="0"/>
+          </a:p>
+          <a:p>
+            <a:pPr algn="l" marL="342900" indent="-342900">
+              <a:lnSpc>
+                <a:spcPts val="1620"/>
+              </a:lnSpc>
+              <a:spcAft>
+                <a:spcPts val="300"/>
+              </a:spcAft>
+              <a:buSzPct val="100000"/>
+              <a:buChar char="•"/>
+            </a:pPr>
+            <a:r>
+              <a:rPr lang="en-US" sz="1200" dirty="0">
+                <a:solidFill>
+                  <a:srgbClr val="1C2833"/>
+                </a:solidFill>
+                <a:latin typeface="Arial" pitchFamily="34" charset="0"/>
+                <a:ea typeface="Arial" pitchFamily="34" charset="-122"/>
+                <a:cs typeface="Arial" pitchFamily="34" charset="-120"/>
+              </a:rPr>
+              <a:t>Scenario cards (in </a:t>
+            </a:r>
+            <a:pPr algn="l" indent="0" marL="0">
+              <a:lnSpc>
+                <a:spcPts val="1620"/>
+              </a:lnSpc>
+              <a:spcAft>
+                <a:spcPts val="300"/>
+              </a:spcAft>
+              <a:buNone/>
+            </a:pPr>
+            <a:r>
+              <a:rPr lang="en-US" sz="1200" dirty="0">
+                <a:solidFill>
+                  <a:srgbClr val="1C2833"/>
+                </a:solidFill>
+                <a:latin typeface="Arial" pitchFamily="34" charset="0"/>
+                <a:ea typeface="Arial" pitchFamily="34" charset="-122"/>
+                <a:cs typeface="Arial" pitchFamily="34" charset="-120"/>
+              </a:rPr>
+              <a:t>activities/activity-03-scope-debate.md</a:t>
+            </a:r>
+            <a:pPr algn="l" indent="0" marL="0">
+              <a:lnSpc>
+                <a:spcPts val="1620"/>
+              </a:lnSpc>
+              <a:spcAft>
+                <a:spcPts val="300"/>
+              </a:spcAft>
+              <a:buNone/>
+            </a:pPr>
+            <a:r>
+              <a:rPr lang="en-US" sz="1200" dirty="0">
+                <a:solidFill>
+                  <a:srgbClr val="1C2833"/>
+                </a:solidFill>
+                <a:latin typeface="Arial" pitchFamily="34" charset="0"/>
+                <a:ea typeface="Arial" pitchFamily="34" charset="-122"/>
+                <a:cs typeface="Arial" pitchFamily="34" charset="-120"/>
+              </a:rPr>
+              <a:t>)</a:t>
             </a:r>
             <a:endParaRPr lang="en-US" sz="1200" dirty="0"/>
           </a:p>
@@ -4022,7 +8006,7 @@
                 <a:ea typeface="Georgia" pitchFamily="34" charset="-122"/>
                 <a:cs typeface="Georgia" pitchFamily="34" charset="-120"/>
               </a:rPr>
-              <a:t>Lesson flow</a:t>
+              <a:t>Vocabulary refreshed</a:t>
             </a:r>
             <a:endParaRPr lang="en-US" sz="1800" dirty="0"/>
           </a:p>
@@ -4031,6 +8015,72 @@
       <p:sp>
         <p:nvSpPr>
           <p:cNvPr id="4" name="Text 2"/>
+          <p:cNvSpPr/>
+          <p:nvPr/>
+        </p:nvSpPr>
+        <p:spPr>
+          <a:xfrm>
+            <a:off x="634901" y="883593"/>
+            <a:ext cx="8102798" cy="281880"/>
+          </a:xfrm>
+          <a:prstGeom prst="rect">
+            <a:avLst/>
+          </a:prstGeom>
+          <a:noFill/>
+          <a:ln/>
+        </p:spPr>
+        <p:txBody>
+          <a:bodyPr wrap="square" lIns="0" tIns="0" rIns="0" bIns="0" rtlCol="0" anchor="t"/>
+          <a:lstStyle/>
+          <a:p>
+            <a:pPr algn="l" marL="342900" indent="-342900">
+              <a:lnSpc>
+                <a:spcPts val="1620"/>
+              </a:lnSpc>
+              <a:spcAft>
+                <a:spcPts val="300"/>
+              </a:spcAft>
+              <a:buSzPct val="100000"/>
+              <a:buChar char="•"/>
+            </a:pPr>
+            <a:r>
+              <a:rPr lang="en-US" sz="1200" i="1" dirty="0">
+                <a:solidFill>
+                  <a:srgbClr val="1C2833"/>
+                </a:solidFill>
+                <a:latin typeface="Arial" pitchFamily="34" charset="0"/>
+                <a:ea typeface="Arial" pitchFamily="34" charset="-122"/>
+                <a:cs typeface="Arial" pitchFamily="34" charset="-120"/>
+              </a:rPr>
+              <a:t>vikṛti</a:t>
+            </a:r>
+            <a:pPr algn="l" indent="0" marL="0">
+              <a:lnSpc>
+                <a:spcPts val="1620"/>
+              </a:lnSpc>
+              <a:spcAft>
+                <a:spcPts val="300"/>
+              </a:spcAft>
+              <a:buNone/>
+            </a:pPr>
+            <a:r>
+              <a:rPr lang="en-US" sz="1200" dirty="0">
+                <a:solidFill>
+                  <a:srgbClr val="1C2833"/>
+                </a:solidFill>
+                <a:latin typeface="Arial" pitchFamily="34" charset="0"/>
+                <a:ea typeface="Arial" pitchFamily="34" charset="-122"/>
+                <a:cs typeface="Arial" pitchFamily="34" charset="-120"/>
+              </a:rPr>
+              <a:t> (imbalance) — reused from Day 3.</a:t>
+            </a:r>
+            <a:endParaRPr lang="en-US" sz="1200" dirty="0"/>
+          </a:p>
+        </p:txBody>
+      </p:sp>
+      <p:sp>
+        <p:nvSpPr>
+          <p:cNvPr id="5" name="Text 3"/>
           <p:cNvSpPr/>
           <p:nvPr/>
         </p:nvSpPr>
@@ -4180,7 +8230,7 @@
                 <a:ea typeface="Georgia" pitchFamily="34" charset="-122"/>
                 <a:cs typeface="Georgia" pitchFamily="34" charset="-120"/>
               </a:rPr>
-              <a:t>Warm-up (5 min)</a:t>
+              <a:t>Lesson flow</a:t>
             </a:r>
             <a:endParaRPr lang="en-US" sz="1800" dirty="0"/>
           </a:p>
@@ -4189,123 +8239,6 @@
       <p:sp>
         <p:nvSpPr>
           <p:cNvPr id="4" name="Text 2"/>
-          <p:cNvSpPr/>
-          <p:nvPr/>
-        </p:nvSpPr>
-        <p:spPr>
-          <a:xfrm>
-            <a:off x="406301" y="870942"/>
-            <a:ext cx="8498026" cy="213271"/>
-          </a:xfrm>
-          <a:prstGeom prst="rect">
-            <a:avLst/>
-          </a:prstGeom>
-          <a:noFill/>
-          <a:ln/>
-        </p:spPr>
-        <p:txBody>
-          <a:bodyPr wrap="square" lIns="0" tIns="0" rIns="0" bIns="0" rtlCol="0" anchor="t"/>
-          <a:lstStyle/>
-          <a:p>
-            <a:pPr algn="l" indent="0" marL="0">
-              <a:lnSpc>
-                <a:spcPts val="1680"/>
-              </a:lnSpc>
-              <a:spcBef>
-                <a:spcPts val="300"/>
-              </a:spcBef>
-              <a:spcAft>
-                <a:spcPts val="300"/>
-              </a:spcAft>
-              <a:buNone/>
-            </a:pPr>
-            <a:r>
-              <a:rPr lang="en-US" sz="1200" dirty="0">
-                <a:solidFill>
-                  <a:srgbClr val="1C2833"/>
-                </a:solidFill>
-                <a:latin typeface="Arial" pitchFamily="34" charset="0"/>
-                <a:ea typeface="Arial" pitchFamily="34" charset="-122"/>
-                <a:cs typeface="Arial" pitchFamily="34" charset="-120"/>
-              </a:rPr>
-              <a:t>– Recall: </a:t>
-            </a:r>
-            <a:pPr algn="l" indent="0" marL="0">
-              <a:lnSpc>
-                <a:spcPts val="1680"/>
-              </a:lnSpc>
-              <a:spcBef>
-                <a:spcPts val="300"/>
-              </a:spcBef>
-              <a:spcAft>
-                <a:spcPts val="300"/>
-              </a:spcAft>
-              <a:buNone/>
-            </a:pPr>
-            <a:r>
-              <a:rPr lang="en-US" sz="1200" i="1" dirty="0">
-                <a:solidFill>
-                  <a:srgbClr val="1C2833"/>
-                </a:solidFill>
-                <a:latin typeface="Arial" pitchFamily="34" charset="0"/>
-                <a:ea typeface="Arial" pitchFamily="34" charset="-122"/>
-                <a:cs typeface="Arial" pitchFamily="34" charset="-120"/>
-              </a:rPr>
-              <a:t>"What is the difference between prakṛti and vikṛti?"</a:t>
-            </a:r>
-            <a:endParaRPr lang="en-US" sz="1200" dirty="0"/>
-          </a:p>
-        </p:txBody>
-      </p:sp>
-      <p:sp>
-        <p:nvSpPr>
-          <p:cNvPr id="5" name="Text 3"/>
-          <p:cNvSpPr/>
-          <p:nvPr/>
-        </p:nvSpPr>
-        <p:spPr>
-          <a:xfrm>
-            <a:off x="634901" y="1173063"/>
-            <a:ext cx="8102798" cy="281880"/>
-          </a:xfrm>
-          <a:prstGeom prst="rect">
-            <a:avLst/>
-          </a:prstGeom>
-          <a:noFill/>
-          <a:ln/>
-        </p:spPr>
-        <p:txBody>
-          <a:bodyPr wrap="square" lIns="0" tIns="0" rIns="0" bIns="0" rtlCol="0" anchor="t"/>
-          <a:lstStyle/>
-          <a:p>
-            <a:pPr algn="l" marL="342900" indent="-342900">
-              <a:lnSpc>
-                <a:spcPts val="1620"/>
-              </a:lnSpc>
-              <a:spcAft>
-                <a:spcPts val="300"/>
-              </a:spcAft>
-              <a:buSzPct val="100000"/>
-              <a:buChar char="•"/>
-            </a:pPr>
-            <a:r>
-              <a:rPr lang="en-US" sz="1200" i="1" dirty="0">
-                <a:solidFill>
-                  <a:srgbClr val="1C2833"/>
-                </a:solidFill>
-                <a:latin typeface="Arial" pitchFamily="34" charset="0"/>
-                <a:ea typeface="Arial" pitchFamily="34" charset="-122"/>
-                <a:cs typeface="Arial" pitchFamily="34" charset="-120"/>
-              </a:rPr>
-              <a:t>"Today: when is a vikṛti just a temporary tilt — and when is it something that needs a doctor?"</a:t>
-            </a:r>
-            <a:endParaRPr lang="en-US" sz="1200" dirty="0"/>
-          </a:p>
-        </p:txBody>
-      </p:sp>
-      <p:sp>
-        <p:nvSpPr>
-          <p:cNvPr id="6" name="Text 4"/>
           <p:cNvSpPr/>
           <p:nvPr/>
         </p:nvSpPr>
@@ -4455,7 +8388,7 @@
                 <a:ea typeface="Georgia" pitchFamily="34" charset="-122"/>
                 <a:cs typeface="Georgia" pitchFamily="34" charset="-120"/>
               </a:rPr>
-              <a:t>Activity (15 min) — Scope debate</a:t>
+              <a:t>Warm-up (5 min)</a:t>
             </a:r>
             <a:endParaRPr lang="en-US" sz="1800" dirty="0"/>
           </a:p>
@@ -4469,8 +8402,8 @@
         </p:nvSpPr>
         <p:spPr>
           <a:xfrm>
-            <a:off x="406301" y="870942"/>
-            <a:ext cx="8498026" cy="222796"/>
+            <a:off x="634901" y="883593"/>
+            <a:ext cx="8102798" cy="525661"/>
           </a:xfrm>
           <a:prstGeom prst="rect">
             <a:avLst/>
@@ -4482,17 +8415,15 @@
           <a:bodyPr wrap="square" lIns="0" tIns="0" rIns="0" bIns="0" rtlCol="0" anchor="t"/>
           <a:lstStyle/>
           <a:p>
-            <a:pPr algn="l" indent="0" marL="0">
-              <a:lnSpc>
-                <a:spcPts val="1680"/>
-              </a:lnSpc>
-              <a:spcBef>
-                <a:spcPts val="300"/>
-              </a:spcBef>
-              <a:spcAft>
-                <a:spcPts val="300"/>
-              </a:spcAft>
-              <a:buNone/>
+            <a:pPr algn="l" marL="342900" indent="-342900">
+              <a:lnSpc>
+                <a:spcPts val="1620"/>
+              </a:lnSpc>
+              <a:spcAft>
+                <a:spcPts val="300"/>
+              </a:spcAft>
+              <a:buSzPct val="100000"/>
+              <a:buChar char="•"/>
             </a:pPr>
             <a:r>
               <a:rPr lang="en-US" sz="1200" dirty="0">
@@ -4503,109 +8434,59 @@
                 <a:ea typeface="Arial" pitchFamily="34" charset="-122"/>
                 <a:cs typeface="Arial" pitchFamily="34" charset="-120"/>
               </a:rPr>
-              <a:t>Detailed in </a:t>
-            </a:r>
-            <a:pPr algn="l" indent="0" marL="0">
-              <a:lnSpc>
-                <a:spcPts val="1680"/>
-              </a:lnSpc>
-              <a:spcBef>
-                <a:spcPts val="300"/>
-              </a:spcBef>
-              <a:spcAft>
-                <a:spcPts val="300"/>
-              </a:spcAft>
-              <a:buNone/>
-            </a:pPr>
-            <a:r>
-              <a:rPr lang="en-US" sz="1200" dirty="0">
-                <a:solidFill>
-                  <a:srgbClr val="1C2833"/>
-                </a:solidFill>
-                <a:latin typeface="Arial" pitchFamily="34" charset="0"/>
-                <a:ea typeface="Arial" pitchFamily="34" charset="-122"/>
-                <a:cs typeface="Arial" pitchFamily="34" charset="-120"/>
-              </a:rPr>
-              <a:t>activities/activity-03-scope-debate.md</a:t>
-            </a:r>
-            <a:pPr algn="l" indent="0" marL="0">
-              <a:lnSpc>
-                <a:spcPts val="1680"/>
-              </a:lnSpc>
-              <a:spcBef>
-                <a:spcPts val="300"/>
-              </a:spcBef>
-              <a:spcAft>
-                <a:spcPts val="300"/>
-              </a:spcAft>
-              <a:buNone/>
-            </a:pPr>
-            <a:r>
-              <a:rPr lang="en-US" sz="1200" dirty="0">
-                <a:solidFill>
-                  <a:srgbClr val="1C2833"/>
-                </a:solidFill>
-                <a:latin typeface="Arial" pitchFamily="34" charset="0"/>
-                <a:ea typeface="Arial" pitchFamily="34" charset="-122"/>
-                <a:cs typeface="Arial" pitchFamily="34" charset="-120"/>
-              </a:rPr>
-              <a:t>. Summary:</a:t>
+              <a:t>Recall: </a:t>
+            </a:r>
+            <a:pPr algn="l" indent="0" marL="0">
+              <a:lnSpc>
+                <a:spcPts val="1620"/>
+              </a:lnSpc>
+              <a:spcAft>
+                <a:spcPts val="300"/>
+              </a:spcAft>
+              <a:buNone/>
+            </a:pPr>
+            <a:r>
+              <a:rPr lang="en-US" sz="1200" i="1" dirty="0">
+                <a:solidFill>
+                  <a:srgbClr val="1C2833"/>
+                </a:solidFill>
+                <a:latin typeface="Arial" pitchFamily="34" charset="0"/>
+                <a:ea typeface="Arial" pitchFamily="34" charset="-122"/>
+                <a:cs typeface="Arial" pitchFamily="34" charset="-120"/>
+              </a:rPr>
+              <a:t>"What is the difference between prakṛti and vikṛti?"</a:t>
             </a:r>
             <a:endParaRPr lang="en-US" sz="1200" dirty="0"/>
           </a:p>
+          <a:p>
+            <a:pPr algn="l" marL="342900" indent="-342900">
+              <a:lnSpc>
+                <a:spcPts val="1620"/>
+              </a:lnSpc>
+              <a:spcAft>
+                <a:spcPts val="300"/>
+              </a:spcAft>
+              <a:buSzPct val="100000"/>
+              <a:buChar char="•"/>
+            </a:pPr>
+            <a:r>
+              <a:rPr lang="en-US" sz="1200" i="1" dirty="0">
+                <a:solidFill>
+                  <a:srgbClr val="1C2833"/>
+                </a:solidFill>
+                <a:latin typeface="Arial" pitchFamily="34" charset="0"/>
+                <a:ea typeface="Arial" pitchFamily="34" charset="-122"/>
+                <a:cs typeface="Arial" pitchFamily="34" charset="-120"/>
+              </a:rPr>
+              <a:t>"Today: when is a vikṛti just a temporary tilt — and when is it something that needs a doctor?"</a:t>
+            </a:r>
+            <a:endParaRPr lang="en-US" sz="1200" dirty="0"/>
+          </a:p>
         </p:txBody>
       </p:sp>
       <p:sp>
         <p:nvSpPr>
           <p:cNvPr id="5" name="Text 3"/>
-          <p:cNvSpPr/>
-          <p:nvPr/>
-        </p:nvSpPr>
-        <p:spPr>
-          <a:xfrm>
-            <a:off x="406301" y="1169938"/>
-            <a:ext cx="8498026" cy="639812"/>
-          </a:xfrm>
-          <a:prstGeom prst="rect">
-            <a:avLst/>
-          </a:prstGeom>
-          <a:noFill/>
-          <a:ln/>
-        </p:spPr>
-        <p:txBody>
-          <a:bodyPr wrap="square" lIns="0" tIns="0" rIns="0" bIns="0" rtlCol="0" anchor="t"/>
-          <a:lstStyle/>
-          <a:p>
-            <a:pPr algn="l" indent="0" marL="0">
-              <a:lnSpc>
-                <a:spcPts val="1680"/>
-              </a:lnSpc>
-              <a:spcBef>
-                <a:spcPts val="300"/>
-              </a:spcBef>
-              <a:spcAft>
-                <a:spcPts val="300"/>
-              </a:spcAft>
-              <a:buNone/>
-            </a:pPr>
-            <a:r>
-              <a:rPr lang="en-US" sz="1200" dirty="0">
-                <a:solidFill>
-                  <a:srgbClr val="1C2833"/>
-                </a:solidFill>
-                <a:latin typeface="Arial" pitchFamily="34" charset="0"/>
-                <a:ea typeface="Arial" pitchFamily="34" charset="-122"/>
-                <a:cs typeface="Arial" pitchFamily="34" charset="-120"/>
-              </a:rPr>
-              <a:t>– Pairs receive a scenario card describing a person and symptom. – Pair discusses: lifestyle range or medical territory? Why? – 5 scenario rounds. After each, brief class share. – Some cards are deliberately ambiguous — the discussion is the lesson.</a:t>
-            </a:r>
-            <a:endParaRPr lang="en-US" sz="1200" dirty="0"/>
-          </a:p>
-        </p:txBody>
-      </p:sp>
-      <p:sp>
-        <p:nvSpPr>
-          <p:cNvPr id="6" name="Text 4"/>
           <p:cNvSpPr/>
           <p:nvPr/>
         </p:nvSpPr>
@@ -4755,7 +8636,7 @@
                 <a:ea typeface="Georgia" pitchFamily="34" charset="-122"/>
                 <a:cs typeface="Georgia" pitchFamily="34" charset="-120"/>
               </a:rPr>
-              <a:t>Wrap-up (5 min)</a:t>
+              <a:t>Core (20 min)</a:t>
             </a:r>
             <a:endParaRPr lang="en-US" sz="1800" dirty="0"/>
           </a:p>
@@ -4770,7 +8651,7 @@
         <p:spPr>
           <a:xfrm>
             <a:off x="634901" y="883593"/>
-            <a:ext cx="8102798" cy="487561"/>
+            <a:ext cx="8102798" cy="281880"/>
           </a:xfrm>
           <a:prstGeom prst="rect">
             <a:avLst/>
@@ -4801,7 +8682,7 @@
                 <a:ea typeface="Arial" pitchFamily="34" charset="-122"/>
                 <a:cs typeface="Arial" pitchFamily="34" charset="-120"/>
               </a:rPr>
-              <a:t>Exit question</a:t>
+              <a:t>The signs of imbalance per doṣa</a:t>
             </a:r>
             <a:pPr algn="l" indent="0" marL="0">
               <a:lnSpc>
@@ -4821,27 +8702,7 @@
                 <a:ea typeface="Arial" pitchFamily="34" charset="-122"/>
                 <a:cs typeface="Arial" pitchFamily="34" charset="-120"/>
               </a:rPr>
-              <a:t> (whole class, no slip needed): </a:t>
-            </a:r>
-            <a:pPr algn="l" indent="0" marL="0">
-              <a:lnSpc>
-                <a:spcPts val="1620"/>
-              </a:lnSpc>
-              <a:spcAft>
-                <a:spcPts val="300"/>
-              </a:spcAft>
-              <a:buNone/>
-            </a:pPr>
-            <a:r>
-              <a:rPr lang="en-US" sz="1200" i="1" dirty="0">
-                <a:solidFill>
-                  <a:srgbClr val="1C2833"/>
-                </a:solidFill>
-                <a:latin typeface="Arial" pitchFamily="34" charset="0"/>
-                <a:ea typeface="Arial" pitchFamily="34" charset="-122"/>
-                <a:cs typeface="Arial" pitchFamily="34" charset="-120"/>
-              </a:rPr>
-              <a:t>"In your own words — when do you stop using doṣa language and call a doctor?"</a:t>
+              <a:t> — build the table:</a:t>
             </a:r>
             <a:endParaRPr lang="en-US" sz="1200" dirty="0"/>
           </a:p>
@@ -4855,8 +8716,8 @@
         </p:nvSpPr>
         <p:spPr>
           <a:xfrm>
-            <a:off x="406301" y="1460004"/>
-            <a:ext cx="8498026" cy="639812"/>
+            <a:off x="406301" y="1254323"/>
+            <a:ext cx="8498026" cy="213271"/>
           </a:xfrm>
           <a:prstGeom prst="rect">
             <a:avLst/>
@@ -4881,29 +8742,6 @@
               <a:buNone/>
             </a:pPr>
             <a:r>
-              <a:rPr lang="en-US" sz="1200" dirty="0">
-                <a:solidFill>
-                  <a:srgbClr val="1C2833"/>
-                </a:solidFill>
-                <a:latin typeface="Arial" pitchFamily="34" charset="0"/>
-                <a:ea typeface="Arial" pitchFamily="34" charset="-122"/>
-                <a:cs typeface="Arial" pitchFamily="34" charset="-120"/>
-              </a:rPr>
-              <a:t>– Take 3 student answers. The frame to aim for: </a:t>
-            </a:r>
-            <a:pPr algn="l" indent="0" marL="0">
-              <a:lnSpc>
-                <a:spcPts val="1680"/>
-              </a:lnSpc>
-              <a:spcBef>
-                <a:spcPts val="300"/>
-              </a:spcBef>
-              <a:spcAft>
-                <a:spcPts val="300"/>
-              </a:spcAft>
-              <a:buNone/>
-            </a:pPr>
-            <a:r>
               <a:rPr lang="en-US" sz="1200" i="1" dirty="0">
                 <a:solidFill>
                   <a:srgbClr val="1C2833"/>
@@ -4912,53 +8750,7 @@
                 <a:ea typeface="Arial" pitchFamily="34" charset="-122"/>
                 <a:cs typeface="Arial" pitchFamily="34" charset="-120"/>
               </a:rPr>
-              <a:t>"When the observation lasts longer than a week or is severe, or when someone is suffering. Doṣa language is for noticing patterns over time — not for treating something that's actually wrong."</a:t>
-            </a:r>
-            <a:pPr algn="l" indent="0" marL="0">
-              <a:lnSpc>
-                <a:spcPts val="1680"/>
-              </a:lnSpc>
-              <a:spcBef>
-                <a:spcPts val="300"/>
-              </a:spcBef>
-              <a:spcAft>
-                <a:spcPts val="300"/>
-              </a:spcAft>
-              <a:buNone/>
-            </a:pPr>
-            <a:r>
-              <a:rPr lang="en-US" sz="1200" dirty="0">
-                <a:solidFill>
-                  <a:srgbClr val="1C2833"/>
-                </a:solidFill>
-                <a:latin typeface="Arial" pitchFamily="34" charset="0"/>
-                <a:ea typeface="Arial" pitchFamily="34" charset="-122"/>
-                <a:cs typeface="Arial" pitchFamily="34" charset="-120"/>
-              </a:rPr>
-              <a:t> – Preview Day 8: </a:t>
-            </a:r>
-            <a:pPr algn="l" indent="0" marL="0">
-              <a:lnSpc>
-                <a:spcPts val="1680"/>
-              </a:lnSpc>
-              <a:spcBef>
-                <a:spcPts val="300"/>
-              </a:spcBef>
-              <a:spcAft>
-                <a:spcPts val="300"/>
-              </a:spcAft>
-              <a:buNone/>
-            </a:pPr>
-            <a:r>
-              <a:rPr lang="en-US" sz="1200" i="1" dirty="0">
-                <a:solidFill>
-                  <a:srgbClr val="1C2833"/>
-                </a:solidFill>
-                <a:latin typeface="Arial" pitchFamily="34" charset="0"/>
-                <a:ea typeface="Arial" pitchFamily="34" charset="-122"/>
-                <a:cs typeface="Arial" pitchFamily="34" charset="-120"/>
-              </a:rPr>
-              <a:t>"Tomorrow — you start designing your own 5-day doṣa-aware week."</a:t>
+              <a:t>Each row: Doṣa · When excess (vitiated) · Common lifestyle observations.</a:t>
             </a:r>
             <a:endParaRPr lang="en-US" sz="1200" dirty="0"/>
           </a:p>
@@ -5116,7 +8908,7 @@
                 <a:ea typeface="Georgia" pitchFamily="34" charset="-122"/>
                 <a:cs typeface="Georgia" pitchFamily="34" charset="-120"/>
               </a:rPr>
-              <a:t>Student-facing content</a:t>
+              <a:t>Core (20 min) (cont.)</a:t>
             </a:r>
             <a:endParaRPr lang="en-US" sz="1800" dirty="0"/>
           </a:p>
@@ -5130,61 +8922,8 @@
         </p:nvSpPr>
         <p:spPr>
           <a:xfrm>
-            <a:off x="406301" y="883593"/>
-            <a:ext cx="8331398" cy="2112169"/>
-          </a:xfrm>
-          <a:prstGeom prst="rect">
-            <a:avLst/>
-          </a:prstGeom>
-          <a:solidFill>
-            <a:srgbClr val="F4F8F9"/>
-          </a:solidFill>
-          <a:ln/>
-        </p:spPr>
-        <p:txBody>
-          <a:bodyPr wrap="square" rtlCol="0" anchor="ctr"/>
-          <a:lstStyle/>
-          <a:p>
-            <a:pPr indent="0" marL="0">
-              <a:buNone/>
-            </a:pPr>
-            <a:endParaRPr lang="en-US" dirty="0"/>
-          </a:p>
-        </p:txBody>
-      </p:sp>
-      <p:sp>
-        <p:nvSpPr>
-          <p:cNvPr id="5" name="Shape 3"/>
-          <p:cNvSpPr/>
-          <p:nvPr/>
-        </p:nvSpPr>
-        <p:spPr>
-          <a:xfrm>
-            <a:off x="434876" y="883593"/>
-            <a:ext cx="0" cy="2112169"/>
-          </a:xfrm>
-          <a:prstGeom prst="line">
-            <a:avLst/>
-          </a:prstGeom>
-          <a:noFill/>
-          <a:ln w="57150">
-            <a:solidFill>
-              <a:srgbClr val="FE4447"/>
-            </a:solidFill>
-            <a:prstDash val="solid"/>
-          </a:ln>
-        </p:spPr>
-      </p:sp>
-      <p:sp>
-        <p:nvSpPr>
-          <p:cNvPr id="6" name="Text 4"/>
-          <p:cNvSpPr/>
-          <p:nvPr/>
-        </p:nvSpPr>
-        <p:spPr>
-          <a:xfrm>
-            <a:off x="692051" y="1074093"/>
-            <a:ext cx="7973389" cy="230981"/>
+            <a:off x="634901" y="883593"/>
+            <a:ext cx="8102798" cy="769441"/>
           </a:xfrm>
           <a:prstGeom prst="rect">
             <a:avLst/>
@@ -5196,43 +8935,149 @@
           <a:bodyPr wrap="square" lIns="0" tIns="0" rIns="0" bIns="0" rtlCol="0" anchor="t"/>
           <a:lstStyle/>
           <a:p>
-            <a:pPr algn="l" indent="0" marL="0">
-              <a:lnSpc>
-                <a:spcPts val="1820"/>
-              </a:lnSpc>
-              <a:spcBef>
-                <a:spcPts val="300"/>
-              </a:spcBef>
-              <a:spcAft>
-                <a:spcPts val="300"/>
-              </a:spcAft>
-              <a:buNone/>
-            </a:pPr>
-            <a:r>
-              <a:rPr lang="en-US" sz="1300" b="1" i="1" dirty="0">
-                <a:solidFill>
-                  <a:srgbClr val="1C2833"/>
-                </a:solidFill>
-                <a:latin typeface="Georgia" pitchFamily="34" charset="0"/>
-                <a:ea typeface="Georgia" pitchFamily="34" charset="-122"/>
-                <a:cs typeface="Georgia" pitchFamily="34" charset="-120"/>
-              </a:rPr>
-              <a:t>The safety rule, in one sentence:</a:t>
-            </a:r>
-            <a:endParaRPr lang="en-US" sz="1300" dirty="0"/>
-          </a:p>
-        </p:txBody>
-      </p:sp>
-      <p:sp>
-        <p:nvSpPr>
-          <p:cNvPr id="7" name="Text 5"/>
-          <p:cNvSpPr/>
-          <p:nvPr/>
-        </p:nvSpPr>
-        <p:spPr>
-          <a:xfrm>
-            <a:off x="692051" y="1343174"/>
-            <a:ext cx="7973389" cy="230981"/>
+            <a:pPr algn="l" marL="342900" indent="-342900">
+              <a:lnSpc>
+                <a:spcPts val="1620"/>
+              </a:lnSpc>
+              <a:spcAft>
+                <a:spcPts val="300"/>
+              </a:spcAft>
+              <a:buSzPct val="100000"/>
+              <a:buChar char="•"/>
+            </a:pPr>
+            <a:r>
+              <a:rPr lang="en-US" sz="1200" i="1" dirty="0">
+                <a:solidFill>
+                  <a:srgbClr val="1C2833"/>
+                </a:solidFill>
+                <a:latin typeface="Arial" pitchFamily="34" charset="0"/>
+                <a:ea typeface="Arial" pitchFamily="34" charset="-122"/>
+                <a:cs typeface="Arial" pitchFamily="34" charset="-120"/>
+              </a:rPr>
+              <a:t>Vāta</a:t>
+            </a:r>
+            <a:pPr algn="l" indent="0" marL="0">
+              <a:lnSpc>
+                <a:spcPts val="1620"/>
+              </a:lnSpc>
+              <a:spcAft>
+                <a:spcPts val="300"/>
+              </a:spcAft>
+              <a:buNone/>
+            </a:pPr>
+            <a:r>
+              <a:rPr lang="en-US" sz="1200" dirty="0">
+                <a:solidFill>
+                  <a:srgbClr val="1C2833"/>
+                </a:solidFill>
+                <a:latin typeface="Arial" pitchFamily="34" charset="0"/>
+                <a:ea typeface="Arial" pitchFamily="34" charset="-122"/>
+                <a:cs typeface="Arial" pitchFamily="34" charset="-120"/>
+              </a:rPr>
+              <a:t> — dry, cold, wind · dry skin, constipation, insomnia, anxiety, joint cracking, gas, light-headedness</a:t>
+            </a:r>
+            <a:endParaRPr lang="en-US" sz="1200" dirty="0"/>
+          </a:p>
+          <a:p>
+            <a:pPr algn="l" marL="342900" indent="-342900">
+              <a:lnSpc>
+                <a:spcPts val="1620"/>
+              </a:lnSpc>
+              <a:spcAft>
+                <a:spcPts val="300"/>
+              </a:spcAft>
+              <a:buSzPct val="100000"/>
+              <a:buChar char="•"/>
+            </a:pPr>
+            <a:r>
+              <a:rPr lang="en-US" sz="1200" i="1" dirty="0">
+                <a:solidFill>
+                  <a:srgbClr val="1C2833"/>
+                </a:solidFill>
+                <a:latin typeface="Arial" pitchFamily="34" charset="0"/>
+                <a:ea typeface="Arial" pitchFamily="34" charset="-122"/>
+                <a:cs typeface="Arial" pitchFamily="34" charset="-120"/>
+              </a:rPr>
+              <a:t>Pitta</a:t>
+            </a:r>
+            <a:pPr algn="l" indent="0" marL="0">
+              <a:lnSpc>
+                <a:spcPts val="1620"/>
+              </a:lnSpc>
+              <a:spcAft>
+                <a:spcPts val="300"/>
+              </a:spcAft>
+              <a:buNone/>
+            </a:pPr>
+            <a:r>
+              <a:rPr lang="en-US" sz="1200" dirty="0">
+                <a:solidFill>
+                  <a:srgbClr val="1C2833"/>
+                </a:solidFill>
+                <a:latin typeface="Arial" pitchFamily="34" charset="0"/>
+                <a:ea typeface="Arial" pitchFamily="34" charset="-122"/>
+                <a:cs typeface="Arial" pitchFamily="34" charset="-120"/>
+              </a:rPr>
+              <a:t> — hot, sharp, oily · heartburn, acne, irritability, sharp anger, skin rashes, excess sweat, premature greying</a:t>
+            </a:r>
+            <a:endParaRPr lang="en-US" sz="1200" dirty="0"/>
+          </a:p>
+          <a:p>
+            <a:pPr algn="l" marL="342900" indent="-342900">
+              <a:lnSpc>
+                <a:spcPts val="1620"/>
+              </a:lnSpc>
+              <a:spcAft>
+                <a:spcPts val="300"/>
+              </a:spcAft>
+              <a:buSzPct val="100000"/>
+              <a:buChar char="•"/>
+            </a:pPr>
+            <a:r>
+              <a:rPr lang="en-US" sz="1200" i="1" dirty="0">
+                <a:solidFill>
+                  <a:srgbClr val="1C2833"/>
+                </a:solidFill>
+                <a:latin typeface="Arial" pitchFamily="34" charset="0"/>
+                <a:ea typeface="Arial" pitchFamily="34" charset="-122"/>
+                <a:cs typeface="Arial" pitchFamily="34" charset="-120"/>
+              </a:rPr>
+              <a:t>Kapha</a:t>
+            </a:r>
+            <a:pPr algn="l" indent="0" marL="0">
+              <a:lnSpc>
+                <a:spcPts val="1620"/>
+              </a:lnSpc>
+              <a:spcAft>
+                <a:spcPts val="300"/>
+              </a:spcAft>
+              <a:buNone/>
+            </a:pPr>
+            <a:r>
+              <a:rPr lang="en-US" sz="1200" dirty="0">
+                <a:solidFill>
+                  <a:srgbClr val="1C2833"/>
+                </a:solidFill>
+                <a:latin typeface="Arial" pitchFamily="34" charset="0"/>
+                <a:ea typeface="Arial" pitchFamily="34" charset="-122"/>
+                <a:cs typeface="Arial" pitchFamily="34" charset="-120"/>
+              </a:rPr>
+              <a:t> — heavy, cold, oily · congestion, mucus, lethargy, weight gain, swelling, slow digestion, oversleeping</a:t>
+            </a:r>
+            <a:endParaRPr lang="en-US" sz="1200" dirty="0"/>
+          </a:p>
+        </p:txBody>
+      </p:sp>
+      <p:sp>
+        <p:nvSpPr>
+          <p:cNvPr id="5" name="Text 3"/>
+          <p:cNvSpPr/>
+          <p:nvPr/>
+        </p:nvSpPr>
+        <p:spPr>
+          <a:xfrm>
+            <a:off x="634901" y="1754535"/>
+            <a:ext cx="8102798" cy="281880"/>
           </a:xfrm>
           <a:prstGeom prst="rect">
             <a:avLst/>
@@ -5244,270 +9089,94 @@
           <a:bodyPr wrap="square" lIns="0" tIns="0" rIns="0" bIns="0" rtlCol="0" anchor="t"/>
           <a:lstStyle/>
           <a:p>
-            <a:pPr algn="l" indent="0" marL="0">
-              <a:lnSpc>
-                <a:spcPts val="1820"/>
-              </a:lnSpc>
-              <a:spcBef>
-                <a:spcPts val="300"/>
-              </a:spcBef>
-              <a:spcAft>
-                <a:spcPts val="300"/>
-              </a:spcAft>
-              <a:buNone/>
-            </a:pPr>
-            <a:r>
-              <a:rPr lang="en-US" sz="1300" dirty="0">
-                <a:solidFill>
-                  <a:srgbClr val="1C2833"/>
-                </a:solidFill>
-                <a:latin typeface="Georgia" pitchFamily="34" charset="0"/>
-                <a:ea typeface="Georgia" pitchFamily="34" charset="-122"/>
-                <a:cs typeface="Georgia" pitchFamily="34" charset="-120"/>
-              </a:rPr>
-              <a:t>&gt; Doṣa language is for </a:t>
-            </a:r>
-            <a:pPr algn="l" indent="0" marL="0">
-              <a:lnSpc>
-                <a:spcPts val="1820"/>
-              </a:lnSpc>
-              <a:spcBef>
-                <a:spcPts val="300"/>
-              </a:spcBef>
-              <a:spcAft>
-                <a:spcPts val="300"/>
-              </a:spcAft>
-              <a:buNone/>
-            </a:pPr>
-            <a:r>
-              <a:rPr lang="en-US" sz="1300" i="1" dirty="0">
-                <a:solidFill>
-                  <a:srgbClr val="1C2833"/>
-                </a:solidFill>
-                <a:latin typeface="Georgia" pitchFamily="34" charset="0"/>
-                <a:ea typeface="Georgia" pitchFamily="34" charset="-122"/>
-                <a:cs typeface="Georgia" pitchFamily="34" charset="-120"/>
-              </a:rPr>
-              <a:t>noticing patterns</a:t>
-            </a:r>
-            <a:pPr algn="l" indent="0" marL="0">
-              <a:lnSpc>
-                <a:spcPts val="1820"/>
-              </a:lnSpc>
-              <a:spcBef>
-                <a:spcPts val="300"/>
-              </a:spcBef>
-              <a:spcAft>
-                <a:spcPts val="300"/>
-              </a:spcAft>
-              <a:buNone/>
-            </a:pPr>
-            <a:r>
-              <a:rPr lang="en-US" sz="1300" dirty="0">
-                <a:solidFill>
-                  <a:srgbClr val="1C2833"/>
-                </a:solidFill>
-                <a:latin typeface="Georgia" pitchFamily="34" charset="0"/>
-                <a:ea typeface="Georgia" pitchFamily="34" charset="-122"/>
-                <a:cs typeface="Georgia" pitchFamily="34" charset="-120"/>
-              </a:rPr>
-              <a:t> — not for </a:t>
-            </a:r>
-            <a:pPr algn="l" indent="0" marL="0">
-              <a:lnSpc>
-                <a:spcPts val="1820"/>
-              </a:lnSpc>
-              <a:spcBef>
-                <a:spcPts val="300"/>
-              </a:spcBef>
-              <a:spcAft>
-                <a:spcPts val="300"/>
-              </a:spcAft>
-              <a:buNone/>
-            </a:pPr>
-            <a:r>
-              <a:rPr lang="en-US" sz="1300" i="1" dirty="0">
-                <a:solidFill>
-                  <a:srgbClr val="1C2833"/>
-                </a:solidFill>
-                <a:latin typeface="Georgia" pitchFamily="34" charset="0"/>
-                <a:ea typeface="Georgia" pitchFamily="34" charset="-122"/>
-                <a:cs typeface="Georgia" pitchFamily="34" charset="-120"/>
-              </a:rPr>
-              <a:t>treating illness</a:t>
-            </a:r>
-            <a:pPr algn="l" indent="0" marL="0">
-              <a:lnSpc>
-                <a:spcPts val="1820"/>
-              </a:lnSpc>
-              <a:spcBef>
-                <a:spcPts val="300"/>
-              </a:spcBef>
-              <a:spcAft>
-                <a:spcPts val="300"/>
-              </a:spcAft>
-              <a:buNone/>
-            </a:pPr>
-            <a:r>
-              <a:rPr lang="en-US" sz="1300" dirty="0">
-                <a:solidFill>
-                  <a:srgbClr val="1C2833"/>
-                </a:solidFill>
-                <a:latin typeface="Georgia" pitchFamily="34" charset="0"/>
-                <a:ea typeface="Georgia" pitchFamily="34" charset="-122"/>
-                <a:cs typeface="Georgia" pitchFamily="34" charset="-120"/>
-              </a:rPr>
-              <a:t>.</a:t>
-            </a:r>
-            <a:endParaRPr lang="en-US" sz="1300" dirty="0"/>
-          </a:p>
-        </p:txBody>
-      </p:sp>
-      <p:sp>
-        <p:nvSpPr>
-          <p:cNvPr id="8" name="Text 6"/>
-          <p:cNvSpPr/>
-          <p:nvPr/>
-        </p:nvSpPr>
-        <p:spPr>
-          <a:xfrm>
-            <a:off x="692051" y="1612255"/>
-            <a:ext cx="7973389" cy="461963"/>
-          </a:xfrm>
-          <a:prstGeom prst="rect">
-            <a:avLst/>
-          </a:prstGeom>
-          <a:noFill/>
-          <a:ln/>
-        </p:spPr>
-        <p:txBody>
-          <a:bodyPr wrap="square" lIns="0" tIns="0" rIns="0" bIns="0" rtlCol="0" anchor="t"/>
-          <a:lstStyle/>
-          <a:p>
-            <a:pPr algn="l" indent="0" marL="0">
-              <a:lnSpc>
-                <a:spcPts val="1820"/>
-              </a:lnSpc>
-              <a:spcBef>
-                <a:spcPts val="300"/>
-              </a:spcBef>
-              <a:spcAft>
-                <a:spcPts val="300"/>
-              </a:spcAft>
-              <a:buNone/>
-            </a:pPr>
-            <a:r>
-              <a:rPr lang="en-US" sz="1300" b="1" i="1" dirty="0">
-                <a:solidFill>
-                  <a:srgbClr val="1C2833"/>
-                </a:solidFill>
-                <a:latin typeface="Georgia" pitchFamily="34" charset="0"/>
-                <a:ea typeface="Georgia" pitchFamily="34" charset="-122"/>
-                <a:cs typeface="Georgia" pitchFamily="34" charset="-120"/>
-              </a:rPr>
-              <a:t>When to use the framework:</a:t>
-            </a:r>
-            <a:pPr algn="l" indent="0" marL="0">
-              <a:lnSpc>
-                <a:spcPts val="1820"/>
-              </a:lnSpc>
-              <a:spcBef>
-                <a:spcPts val="300"/>
-              </a:spcBef>
-              <a:spcAft>
-                <a:spcPts val="300"/>
-              </a:spcAft>
-              <a:buNone/>
-            </a:pPr>
-            <a:r>
-              <a:rPr lang="en-US" sz="1300" dirty="0">
-                <a:solidFill>
-                  <a:srgbClr val="1C2833"/>
-                </a:solidFill>
-                <a:latin typeface="Georgia" pitchFamily="34" charset="0"/>
-                <a:ea typeface="Georgia" pitchFamily="34" charset="-122"/>
-                <a:cs typeface="Georgia" pitchFamily="34" charset="-120"/>
-              </a:rPr>
-              <a:t> - Mild, brief, lifestyle-level: bit of dry skin, slow morning, late-night restlessness once. - You want to notice your patterns over weeks and months.</a:t>
-            </a:r>
-            <a:endParaRPr lang="en-US" sz="1300" dirty="0"/>
-          </a:p>
-        </p:txBody>
-      </p:sp>
-      <p:sp>
-        <p:nvSpPr>
-          <p:cNvPr id="9" name="Text 7"/>
-          <p:cNvSpPr/>
-          <p:nvPr/>
-        </p:nvSpPr>
-        <p:spPr>
-          <a:xfrm>
-            <a:off x="692051" y="2112318"/>
-            <a:ext cx="7973389" cy="692944"/>
-          </a:xfrm>
-          <a:prstGeom prst="rect">
-            <a:avLst/>
-          </a:prstGeom>
-          <a:noFill/>
-          <a:ln/>
-        </p:spPr>
-        <p:txBody>
-          <a:bodyPr wrap="square" lIns="0" tIns="0" rIns="0" bIns="0" rtlCol="0" anchor="t"/>
-          <a:lstStyle/>
-          <a:p>
-            <a:pPr algn="l" indent="0" marL="0">
-              <a:lnSpc>
-                <a:spcPts val="1820"/>
-              </a:lnSpc>
-              <a:spcBef>
-                <a:spcPts val="300"/>
-              </a:spcBef>
-              <a:spcAft>
-                <a:spcPts val="300"/>
-              </a:spcAft>
-              <a:buNone/>
-            </a:pPr>
-            <a:r>
-              <a:rPr lang="en-US" sz="1300" b="1" i="1" dirty="0">
-                <a:solidFill>
-                  <a:srgbClr val="1C2833"/>
-                </a:solidFill>
-                <a:latin typeface="Georgia" pitchFamily="34" charset="0"/>
-                <a:ea typeface="Georgia" pitchFamily="34" charset="-122"/>
-                <a:cs typeface="Georgia" pitchFamily="34" charset="-120"/>
-              </a:rPr>
-              <a:t>When to STOP and see a doctor:</a:t>
-            </a:r>
-            <a:pPr algn="l" indent="0" marL="0">
-              <a:lnSpc>
-                <a:spcPts val="1820"/>
-              </a:lnSpc>
-              <a:spcBef>
-                <a:spcPts val="300"/>
-              </a:spcBef>
-              <a:spcAft>
-                <a:spcPts val="300"/>
-              </a:spcAft>
-              <a:buNone/>
-            </a:pPr>
-            <a:r>
-              <a:rPr lang="en-US" sz="1300" dirty="0">
-                <a:solidFill>
-                  <a:srgbClr val="1C2833"/>
-                </a:solidFill>
-                <a:latin typeface="Georgia" pitchFamily="34" charset="0"/>
-                <a:ea typeface="Georgia" pitchFamily="34" charset="-122"/>
-                <a:cs typeface="Georgia" pitchFamily="34" charset="-120"/>
-              </a:rPr>
-              <a:t> - Severe, persistent, or worsening symptoms. - Any symptom lasting &gt; 1–2 weeks. - Anything that interferes with school, sleep, eating, or basic mood. - Blood, fever, sustained pain, fainting — immediately.</a:t>
-            </a:r>
-            <a:endParaRPr lang="en-US" sz="1300" dirty="0"/>
-          </a:p>
-        </p:txBody>
-      </p:sp>
-      <p:sp>
-        <p:nvSpPr>
-          <p:cNvPr id="10" name="Text 8"/>
+            <a:pPr algn="l" marL="342900" indent="-342900">
+              <a:lnSpc>
+                <a:spcPts val="1620"/>
+              </a:lnSpc>
+              <a:spcAft>
+                <a:spcPts val="300"/>
+              </a:spcAft>
+              <a:buSzPct val="100000"/>
+              <a:buChar char="•"/>
+            </a:pPr>
+            <a:r>
+              <a:rPr lang="en-US" sz="1200" b="1" dirty="0">
+                <a:solidFill>
+                  <a:srgbClr val="1C2833"/>
+                </a:solidFill>
+                <a:latin typeface="Arial" pitchFamily="34" charset="0"/>
+                <a:ea typeface="Arial" pitchFamily="34" charset="-122"/>
+                <a:cs typeface="Arial" pitchFamily="34" charset="-120"/>
+              </a:rPr>
+              <a:t>The crucial framing</a:t>
+            </a:r>
+            <a:pPr algn="l" indent="0" marL="0">
+              <a:lnSpc>
+                <a:spcPts val="1620"/>
+              </a:lnSpc>
+              <a:spcAft>
+                <a:spcPts val="300"/>
+              </a:spcAft>
+              <a:buNone/>
+            </a:pPr>
+            <a:r>
+              <a:rPr lang="en-US" sz="1200" dirty="0">
+                <a:solidFill>
+                  <a:srgbClr val="1C2833"/>
+                </a:solidFill>
+                <a:latin typeface="Arial" pitchFamily="34" charset="0"/>
+                <a:ea typeface="Arial" pitchFamily="34" charset="-122"/>
+                <a:cs typeface="Arial" pitchFamily="34" charset="-120"/>
+              </a:rPr>
+              <a:t> — </a:t>
+            </a:r>
+            <a:pPr algn="l" indent="0" marL="0">
+              <a:lnSpc>
+                <a:spcPts val="1620"/>
+              </a:lnSpc>
+              <a:spcAft>
+                <a:spcPts val="300"/>
+              </a:spcAft>
+              <a:buNone/>
+            </a:pPr>
+            <a:r>
+              <a:rPr lang="en-US" sz="1200" i="1" dirty="0">
+                <a:solidFill>
+                  <a:srgbClr val="1C2833"/>
+                </a:solidFill>
+                <a:latin typeface="Arial" pitchFamily="34" charset="0"/>
+                <a:ea typeface="Arial" pitchFamily="34" charset="-122"/>
+                <a:cs typeface="Arial" pitchFamily="34" charset="-120"/>
+              </a:rPr>
+              <a:t>write on the board, get students to copy</a:t>
+            </a:r>
+            <a:pPr algn="l" indent="0" marL="0">
+              <a:lnSpc>
+                <a:spcPts val="1620"/>
+              </a:lnSpc>
+              <a:spcAft>
+                <a:spcPts val="300"/>
+              </a:spcAft>
+              <a:buNone/>
+            </a:pPr>
+            <a:r>
+              <a:rPr lang="en-US" sz="1200" dirty="0">
+                <a:solidFill>
+                  <a:srgbClr val="1C2833"/>
+                </a:solidFill>
+                <a:latin typeface="Arial" pitchFamily="34" charset="0"/>
+                <a:ea typeface="Arial" pitchFamily="34" charset="-122"/>
+                <a:cs typeface="Arial" pitchFamily="34" charset="-120"/>
+              </a:rPr>
+              <a:t>:</a:t>
+            </a:r>
+            <a:endParaRPr lang="en-US" sz="1200" dirty="0"/>
+          </a:p>
+        </p:txBody>
+      </p:sp>
+      <p:sp>
+        <p:nvSpPr>
+          <p:cNvPr id="6" name="Text 4"/>
           <p:cNvSpPr/>
           <p:nvPr/>
         </p:nvSpPr>
@@ -5657,7 +9326,7 @@
                 <a:ea typeface="Georgia" pitchFamily="34" charset="-122"/>
                 <a:cs typeface="Georgia" pitchFamily="34" charset="-120"/>
               </a:rPr>
-              <a:t>Homework</a:t>
+              <a:t>Core (20 min) (cont.)</a:t>
             </a:r>
             <a:endParaRPr lang="en-US" sz="1800" dirty="0"/>
           </a:p>
@@ -5671,8 +9340,61 @@
         </p:nvSpPr>
         <p:spPr>
           <a:xfrm>
-            <a:off x="406301" y="870942"/>
-            <a:ext cx="8498026" cy="426541"/>
+            <a:off x="406301" y="883593"/>
+            <a:ext cx="8331398" cy="842963"/>
+          </a:xfrm>
+          <a:prstGeom prst="rect">
+            <a:avLst/>
+          </a:prstGeom>
+          <a:solidFill>
+            <a:srgbClr val="F4F8F9"/>
+          </a:solidFill>
+          <a:ln/>
+        </p:spPr>
+        <p:txBody>
+          <a:bodyPr wrap="square" rtlCol="0" anchor="ctr"/>
+          <a:lstStyle/>
+          <a:p>
+            <a:pPr indent="0" marL="0">
+              <a:buNone/>
+            </a:pPr>
+            <a:endParaRPr lang="en-US" dirty="0"/>
+          </a:p>
+        </p:txBody>
+      </p:sp>
+      <p:sp>
+        <p:nvSpPr>
+          <p:cNvPr id="5" name="Shape 3"/>
+          <p:cNvSpPr/>
+          <p:nvPr/>
+        </p:nvSpPr>
+        <p:spPr>
+          <a:xfrm>
+            <a:off x="434876" y="883593"/>
+            <a:ext cx="0" cy="842963"/>
+          </a:xfrm>
+          <a:prstGeom prst="line">
+            <a:avLst/>
+          </a:prstGeom>
+          <a:noFill/>
+          <a:ln w="57150">
+            <a:solidFill>
+              <a:srgbClr val="FE4447"/>
+            </a:solidFill>
+            <a:prstDash val="solid"/>
+          </a:ln>
+        </p:spPr>
+      </p:sp>
+      <p:sp>
+        <p:nvSpPr>
+          <p:cNvPr id="6" name="Text 4"/>
+          <p:cNvSpPr/>
+          <p:nvPr/>
+        </p:nvSpPr>
+        <p:spPr>
+          <a:xfrm>
+            <a:off x="692051" y="1074093"/>
+            <a:ext cx="7973389" cy="461963"/>
           </a:xfrm>
           <a:prstGeom prst="rect">
             <a:avLst/>
@@ -5686,6 +9408,120 @@
           <a:p>
             <a:pPr algn="l" indent="0" marL="0">
               <a:lnSpc>
+                <a:spcPts val="1820"/>
+              </a:lnSpc>
+              <a:spcBef>
+                <a:spcPts val="300"/>
+              </a:spcBef>
+              <a:spcAft>
+                <a:spcPts val="300"/>
+              </a:spcAft>
+              <a:buNone/>
+            </a:pPr>
+            <a:r>
+              <a:rPr lang="en-US" sz="1300" b="1" i="1" dirty="0">
+                <a:solidFill>
+                  <a:srgbClr val="1C2833"/>
+                </a:solidFill>
+                <a:latin typeface="Georgia" pitchFamily="34" charset="0"/>
+                <a:ea typeface="Georgia" pitchFamily="34" charset="-122"/>
+                <a:cs typeface="Georgia" pitchFamily="34" charset="-120"/>
+              </a:rPr>
+              <a:t>Some of these belong in lifestyle awareness. Some belong in a doctor's office. The skill is knowing which is which.</a:t>
+            </a:r>
+            <a:endParaRPr lang="en-US" sz="1300" dirty="0"/>
+          </a:p>
+        </p:txBody>
+      </p:sp>
+      <p:sp>
+        <p:nvSpPr>
+          <p:cNvPr id="7" name="Text 5"/>
+          <p:cNvSpPr/>
+          <p:nvPr/>
+        </p:nvSpPr>
+        <p:spPr>
+          <a:xfrm>
+            <a:off x="634901" y="1828056"/>
+            <a:ext cx="8102798" cy="281880"/>
+          </a:xfrm>
+          <a:prstGeom prst="rect">
+            <a:avLst/>
+          </a:prstGeom>
+          <a:noFill/>
+          <a:ln/>
+        </p:spPr>
+        <p:txBody>
+          <a:bodyPr wrap="square" lIns="0" tIns="0" rIns="0" bIns="0" rtlCol="0" anchor="t"/>
+          <a:lstStyle/>
+          <a:p>
+            <a:pPr algn="l" marL="342900" indent="-342900">
+              <a:lnSpc>
+                <a:spcPts val="1620"/>
+              </a:lnSpc>
+              <a:spcAft>
+                <a:spcPts val="300"/>
+              </a:spcAft>
+              <a:buSzPct val="100000"/>
+              <a:buChar char="•"/>
+            </a:pPr>
+            <a:r>
+              <a:rPr lang="en-US" sz="1200" b="1" dirty="0">
+                <a:solidFill>
+                  <a:srgbClr val="1C2833"/>
+                </a:solidFill>
+                <a:latin typeface="Arial" pitchFamily="34" charset="0"/>
+                <a:ea typeface="Arial" pitchFamily="34" charset="-122"/>
+                <a:cs typeface="Arial" pitchFamily="34" charset="-120"/>
+              </a:rPr>
+              <a:t>Build the two-column table together</a:t>
+            </a:r>
+            <a:pPr algn="l" indent="0" marL="0">
+              <a:lnSpc>
+                <a:spcPts val="1620"/>
+              </a:lnSpc>
+              <a:spcAft>
+                <a:spcPts val="300"/>
+              </a:spcAft>
+              <a:buNone/>
+            </a:pPr>
+            <a:r>
+              <a:rPr lang="en-US" sz="1200" dirty="0">
+                <a:solidFill>
+                  <a:srgbClr val="1C2833"/>
+                </a:solidFill>
+                <a:latin typeface="Arial" pitchFamily="34" charset="0"/>
+                <a:ea typeface="Arial" pitchFamily="34" charset="-122"/>
+                <a:cs typeface="Arial" pitchFamily="34" charset="-120"/>
+              </a:rPr>
+              <a:t>:</a:t>
+            </a:r>
+            <a:endParaRPr lang="en-US" sz="1200" dirty="0"/>
+          </a:p>
+        </p:txBody>
+      </p:sp>
+      <p:sp>
+        <p:nvSpPr>
+          <p:cNvPr id="8" name="Text 6"/>
+          <p:cNvSpPr/>
+          <p:nvPr/>
+        </p:nvSpPr>
+        <p:spPr>
+          <a:xfrm>
+            <a:off x="406301" y="2198787"/>
+            <a:ext cx="8498026" cy="213271"/>
+          </a:xfrm>
+          <a:prstGeom prst="rect">
+            <a:avLst/>
+          </a:prstGeom>
+          <a:noFill/>
+          <a:ln/>
+        </p:spPr>
+        <p:txBody>
+          <a:bodyPr wrap="square" lIns="0" tIns="0" rIns="0" bIns="0" rtlCol="0" anchor="t"/>
+          <a:lstStyle/>
+          <a:p>
+            <a:pPr algn="l" indent="0" marL="0">
+              <a:lnSpc>
                 <a:spcPts val="1680"/>
               </a:lnSpc>
               <a:spcBef>
@@ -5697,15 +9533,15 @@
               <a:buNone/>
             </a:pPr>
             <a:r>
-              <a:rPr lang="en-US" sz="1200" dirty="0">
-                <a:solidFill>
-                  <a:srgbClr val="1C2833"/>
-                </a:solidFill>
-                <a:latin typeface="Arial" pitchFamily="34" charset="0"/>
-                <a:ea typeface="Arial" pitchFamily="34" charset="-122"/>
-                <a:cs typeface="Arial" pitchFamily="34" charset="-120"/>
-              </a:rPr>
-              <a:t>– Look back at your week. Was there ONE thing where you said "my X is acting up" or "I'm too tired" — that you might have ignored too easily? Write one line.</a:t>
+              <a:rPr lang="en-US" sz="1200" i="1" dirty="0">
+                <a:solidFill>
+                  <a:srgbClr val="1C2833"/>
+                </a:solidFill>
+                <a:latin typeface="Arial" pitchFamily="34" charset="0"/>
+                <a:ea typeface="Arial" pitchFamily="34" charset="-122"/>
+                <a:cs typeface="Arial" pitchFamily="34" charset="-120"/>
+              </a:rPr>
+              <a:t>Each row: Lifestyle range — observe + adjust · Medical territory — see a doctor.</a:t>
             </a:r>
             <a:endParaRPr lang="en-US" sz="1200" dirty="0"/>
           </a:p>
@@ -5713,7 +9549,7 @@
       </p:sp>
       <p:sp>
         <p:nvSpPr>
-          <p:cNvPr id="5" name="Text 3"/>
+          <p:cNvPr id="9" name="Text 7"/>
           <p:cNvSpPr/>
           <p:nvPr/>
         </p:nvSpPr>
